--- a/docs/FutureMirror.Deck.pptx
+++ b/docs/FutureMirror.Deck.pptx
@@ -1977,7 +1977,7 @@
   <p:cSld>
     <p:spTree>
       <p:nvGrpSpPr>
-        <p:cNvPr id="33" name="" descr="&lt;Slide style={{&#10;    width: '1280px',&#10;    height: '720px',&#10;    background: '#FFFFFF',&#10;    padding: 0,&#10;    position: 'relative',&#10;    overflow: 'hidden',&#10;    fontFamily: &quot;'Noto Sans SC','Source Han Sans SC','PingFang SC','Microsoft YaHei',sans-serif&quot;,&#10;}}&gt;&#10;    {/* ===== 母版：A3 深蓝顶条 ===== */}&#10;    &lt;Box style={{ position: 'absolute', top: 0, left: 0, width: '1280px', height: 84, background: '#0E3F8C' }}&gt;&#10;        &lt;svg style={{ position: 'absolute', right: 210, top: 18, opacity: 0.16 }} width={150} height={48} viewBox='0 0 150 48'&gt;&#10;            &lt;g stroke='#FFFFFF' strokeWidth='1.2' fill='none'&gt;&#10;                &lt;path d='M2 24 L28 24 L38 10 L74 10 L84 24 L120 24 L130 38 L148 38' /&gt;&#10;                &lt;path d='M38 10 L38 38 L74 38' /&gt;&#10;                &lt;circle cx='28' cy='24' r='3' fill='#FFFFFF' /&gt;&#10;                &lt;circle cx='84' cy='24' r='3' fill='#FFFFFF' /&gt;&#10;            &lt;/g&gt;&#10;        &lt;/svg&gt;&#10;        &lt;Box style={{ position: 'absolute', left: 40, top: 0, height: 84, justifyContent: 'center' }}&gt;&#10;            &lt;Text style={{ fontSize: 26, fontWeight: 'bold', color: '#FFFFFF' }}&gt;&#10;                评分引擎：五个维度，全部可机械判定&#10;            &lt;/Text&gt;&#10;        &lt;/Box&gt;&#10;        &lt;Box style={{ position: 'absolute', right: 40, top: 24, background: '#1E4FA8', padding: '7px 16px', borderRadius: 14 }}&gt;&#10;            &lt;Text style={{ fontSize: 14, color: '#FFFFFF', letterSpacing: 1 }}&gt;&#10;                02 原创性论证&#10;            &lt;/Text&gt;&#10;        &lt;/Box&gt;&#10;    &lt;/Box&gt;&#10;    {/* ===== 内容区 ===== */}&#10;    &lt;Box style={{ position: 'absolute', top: 84, left: 0, width: '1280px', height: 572, padding: '24px 40px', boxSizing: 'border-box', flexDirection: 'row', gap: 28 }}&gt;&#10;        {/* 左 60%：五维信号表 */}&#10;        &lt;Box style={{ width: 700, flexDirection: 'column' }}&gt;&#10;            &lt;Text style={{ fontSize: 16, fontWeight: 'bold', color: '#0E3F8C', letterSpacing: 1 }}&gt;&#10;                五维信号设计（权重 + 可机械判定的信号 + 满分条件）&#10;            &lt;/Text&gt;&#10;            &lt;Box style={{ marginTop: 12, height: 396 }}&gt;&#10;                &lt;Table&#10;                    style={{ width: '100%', height: 396 }}&#10;                    defaultTextStyle={{ fontSize: 12.5, textAlign: 'center', color: '#1A2230' }}&#10;                    defaultCellStyle={{&#10;                        border: {&#10;                            left: { width: 1, color: '#D6DCE5' },&#10;                            right: { width: 1, color: '#D6DCE5' },&#10;                            top: { width: 1, color: '#D6DCE5' },&#10;                            bottom: { width: 1, color: '#D6DCE5' },&#10;                        },&#10;                    }}&#10;                    cells={[&#10;                        [&#10;                            { text: '维度', textStyle: { bold: true, color: '#FFFFFF' }, cellStyle: { background: { color: '#0E3F8C' } } },&#10;                            { text: '权重', textStyle: { bold: true, color: '#FFFFFF' }, cellStyle: { background: { color: '#0E3F8C' } } },&#10;                            { text: '评分信号（可机械判定）', textStyle: { bold: true, color: '#FFFFFF' }, cellStyle: { background: { color: '#0E3F8C' } } },&#10;                            { text: '满分条件', textStyle: { bold: true, color: '#FFFFFF' }, cellStyle: { background: { color: '#0E3F8C' } } },&#10;                        ],&#10;                        [&#10;                            { text: '内容深度', textStyle: { bold: true, color: '#0E3F8C' } },&#10;                            { text: '25%' },&#10;                            { text: '数字个数 ×2.2（上限 22）、技术词命中 ×2.5（上限 18）、轮次 ≥4 +8、代码沙盒通过率融合' },&#10;                            { text: '4+ 量化且 3+ 技术词' },&#10;                        ],&#10;                        [&#10;                            { text: '结构逻辑', textStyle: { bold: true, color: '#0E3F8C' }, cellStyle: { background: { color: '#F7F9FC' } } },&#10;                            { text: '20%', cellStyle: { background: { color: '#F7F9FC' } } },&#10;                            { text: 'STAR 词命中（背景/目标/负责/通过/最终/结果/因此/于是）×4 上限 30', cellStyle: { background: { color: '#F7F9FC' } } },&#10;                            { text: '命中 3+', cellStyle: { background: { color: '#F7F9FC' } } },&#10;                        ],&#10;                        [&#10;                            { text: '语言表达', textStyle: { bold: true, color: '#0E3F8C' } },&#10;                            { text: '15%' },&#10;                            { text: '口头禅（然后/那个/就是）×5 上限 24、短答数（&lt;40 字）×4' },&#10;                            { text: '口头禅 ≤2 且无短答' },&#10;                        ],&#10;                        [&#10;                            { text: '岗位匹配', textStyle: { bold: true, color: '#0E3F8C' }, cellStyle: { background: { color: '#F7F9FC' } } },&#10;                            { text: '20%', cellStyle: { background: { color: '#F7F9FC' } } },&#10;                            { text: '匹配报告分 ×0.4 + 技术词命中（上限 10）；无报告时按技能命中估算', cellStyle: { background: { color: '#F7F9FC' } } },&#10;                            { text: '匹配分高 + 缺口少', cellStyle: { background: { color: '#F7F9FC' } } },&#10;                        ],&#10;                        [&#10;                            { text: '抗压表现', textStyle: { bold: true, color: '#0E3F8C' } },&#10;                            { text: '20%' },&#10;                            { text: '防御性表述（不是我的/跟我没关系/但是/我没有）×6 上限 20；压力轮短答 ×3 上限 12' },&#10;                            { text: '无防御性表述' },&#10;                        ],&#10;                    ]}&#10;                /&gt;&#10;            &lt;/Box&gt;&#10;            &lt;Text style={{ fontSize: 13, color: '#8B97A8', marginTop: 10, lineHeight: 1.6 }}&gt;&#10;                信号不是拍脑袋：量化数据（STAR 的 Result 可验证化）、STAR 结构词、口头禅密度、防御性表述，分别对应面试评估中内容、结构、表达、抗压四类公认维度。&#10;            &lt;/Text&gt;&#10;        &lt;/Box&gt;&#10;        {/* 右 40%：设计目标与边界 */}&#10;        &lt;Box style={{ flex: 1, flexDirection: 'column' }}&gt;&#10;            &lt;Text style={{ fontSize: 16, fontWeight: 'bold', color: '#0E3F8C', letterSpacing: 1 }}&gt;&#10;                评分引擎要回答的四个问题&#10;            &lt;/Text&gt;&#10;            &lt;Box style={{ flexDirection: 'column', gap: 10, marginTop: 12 }}&gt;&#10;                &lt;Box style={{ background: '#F7F9FC', border: '1px solid #D6DCE5', padding: '10px 14px', flexDirection: 'row', alignItems: 'center', gap: 12 }}&gt;&#10;                    &lt;Text style={{ fontSize: 17, fontWeight: 'bold', color: '#1E4FA8', width: 26 }}&gt;①&lt;/Text&gt;&#10;                    &lt;Text style={{ fontSize: 14, color: '#1A2230', lineHeight: 1.5 }}&gt;&#10;                        &lt;span style={{ fontWeight: 'bold' }}&gt;可解释&lt;/span&gt;——每个分数能追溯到对话原话&#10;                    &lt;/Text&gt;&#10;                &lt;/Box&gt;&#10;                &lt;Box style={{ background: '#F7F9FC', border: '1px solid #D6DCE5', padding: '10px 14px', flexDirection: 'row', alignItems: 'center', gap: 12 }}&gt;&#10;                    &lt;Text style={{ fontSize: 17, fontWeight: 'bold', color: '#1E4FA8', width: 26 }}&gt;②&lt;/Text&gt;&#10;                    &lt;Text style={{ fontSize: 14, color: '#1A2230', lineHeight: 1.5 }}&gt;&#10;                        &lt;span style={{ fontWeight: 'bold' }}&gt;可复现&lt;/span&gt;——同一输入永远同一输出，不靠模型运气&#10;                    &lt;/Text&gt;&#10;                &lt;/Box&gt;&#10;                &lt;Box style={{ background: '#F7F9FC', border: '1px solid #D6DCE5', padding: '10px 14px', flexDirection: 'row', alignItems: 'center', gap: 12 }}&gt;&#10;                    &lt;Text style={{ fontSize: 17, fontWeight: 'bold', color: '#1E4FA8', width: 26 }}&gt;③&lt;/Text&gt;&#10;                    &lt;Text style={{ fontSize: 14, color: '#1A2230', lineHeight: 1.5 }}&gt;&#10;                        &lt;span style={{ fontWeight: 'bold' }}&gt;双引擎同构&lt;/span&gt;——前端本地引擎与服务端逐位一致，支撑三级降级&#10;                    &lt;/Text&gt;&#10;                &lt;/Box&gt;&#10;                &lt;Box style={{ background: '#F7F9FC', border: '1px solid #D6DCE5', padding: '10px 14px', flexDirection: 'row', alignItems: 'center', gap: 12 }}&gt;&#10;                    &lt;Text style={{ fontSize: 17, fontWeight: 'bold', color: '#1E4FA8', width: 26 }}&gt;④&lt;/Text&gt;&#10;                    &lt;Text style={{ fontSize: 14, color: '#1A2230', lineHeight: 1.5 }}&gt;&#10;                        &lt;span style={{ fontWeight: 'bold' }}&gt;对匹配报告开放&lt;/span&gt;——匹配分作为先验进入拟合维度，而非另起一套&#10;                    &lt;/Text&gt;&#10;                &lt;/Box&gt;&#10;            &lt;/Box&gt;&#10;            &lt;Box style={{ background: '#E8EFF8', padding: '14px 16px', marginTop: 16 }}&gt;&#10;                &lt;Text style={{ fontSize: 15, fontWeight: 'bold', color: '#0E3F8C' }}&gt;&#10;                    边界裁剪 [30, 96]&#10;                &lt;/Text&gt;&#10;                &lt;Text style={{ fontSize: 13.5, color: '#4A5568', marginTop: 6, lineHeight: 1.65 }}&gt;&#10;                    下限 30：再差的回答也有保底，避免「零分挫败」吓退用户；上限 96：不留满分，保留「还能更好」的成长空间。总分 = 五维均值。&#10;                &lt;/Text&gt;&#10;            &lt;/Box&gt;&#10;            &lt;Box style={{ flex: 1 }} /&gt;&#10;            &lt;Box style={{ background: '#0E3F8C', padding: '14px 16px' }}&gt;&#10;                &lt;Text style={{ fontSize: 14.5, color: '#FFFFFF', lineHeight: 1.65, fontWeight: 'bold' }}&gt;&#10;                    规则引擎（而非让 LLM 直接打分），是同时满足四者的唯一选择。&#10;                &lt;/Text&gt;&#10;            &lt;/Box&gt;&#10;        &lt;/Box&gt;&#10;    &lt;/Box&gt;&#10;    {/* ===== 母版：页脚 ===== */}&#10;    &lt;Box style={{ position: 'absolute', bottom: 0, left: 0, width: '1280px', height: 64, borderTop: '1px solid #E5E7EB', flexDirection: 'row', alignItems: 'center', justifyContent: 'space-between', padding: '0 40px', boxSizing: 'border-box' }}&gt;&#10;        &lt;Text style={{ fontSize: 13, color: '#8B97A8' }}&gt;&#10;            面镜 FutureMirror · 竞赛演示&#10;        &lt;/Text&gt;&#10;        &lt;Text style={{ fontSize: 14, color: '#1E4FA8', fontWeight: 'bold' }}&gt;&#10;            10 / 16&#10;        &lt;/Text&gt;&#10;    &lt;/Box&gt;&#10;&lt;/Slide&gt;&#10;"/>
+        <p:cNvPr id="33" name="" descr="&lt;Slide style={{&#10;    width: '1280px',&#10;    height: '720px',&#10;    background: '#FFFFFF',&#10;    padding: 0,&#10;    position: 'relative',&#10;    overflow: 'hidden',&#10;    fontFamily: &quot;'Noto Sans SC','Source Han Sans SC','PingFang SC','Microsoft YaHei',sans-serif&quot;,&#10;}}&gt;&#10;    {/* ===== 母版：A3 深蓝顶条 ===== */}&#10;    &lt;Box style={{ position: 'absolute', top: 0, left: 0, width: '1280px', height: 84, background: '#0E3F8C' }}&gt;&#10;        &lt;svg style={{ position: 'absolute', right: 210, top: 18, opacity: 0.16 }} width={150} height={48} viewBox='0 0 150 48'&gt;&#10;            &lt;g stroke='#FFFFFF' strokeWidth='1.2' fill='none'&gt;&#10;                &lt;path d='M2 24 L28 24 L38 10 L74 10 L84 24 L120 24 L130 38 L148 38' /&gt;&#10;                &lt;path d='M38 10 L38 38 L74 38' /&gt;&#10;                &lt;circle cx='28' cy='24' r='3' fill='#FFFFFF' /&gt;&#10;                &lt;circle cx='84' cy='24' r='3' fill='#FFFFFF' /&gt;&#10;            &lt;/g&gt;&#10;        &lt;/svg&gt;&#10;        &lt;Box style={{ position: 'absolute', left: 40, top: 0, height: 84, justifyContent: 'center' }}&gt;&#10;            &lt;Text style={{ fontSize: 26, fontWeight: 'bold', color: '#FFFFFF' }}&gt;&#10;                评分引擎：五个维度，全部可机械判定&#10;            &lt;/Text&gt;&#10;        &lt;/Box&gt;&#10;        &lt;Box style={{ position: 'absolute', right: 40, top: 24, background: '#1E4FA8', padding: '7px 16px', borderRadius: 14 }}&gt;&#10;            &lt;Text style={{ fontSize: 14, color: '#FFFFFF', letterSpacing: 1 }}&gt;&#10;                02 原创性论证&#10;            &lt;/Text&gt;&#10;        &lt;/Box&gt;&#10;    &lt;/Box&gt;&#10;    {/* ===== 内容区 ===== */}&#10;    &lt;Box style={{ position: 'absolute', top: 84, left: 0, width: '1280px', height: 572, padding: '24px 40px', boxSizing: 'border-box', flexDirection: 'row', gap: 28 }}&gt;&#10;        {/* 左 60%：五维信号表 */}&#10;        &lt;Box style={{ width: 700, flexDirection: 'column' }}&gt;&#10;            &lt;Text style={{ fontSize: 16, fontWeight: 'bold', color: '#0E3F8C', letterSpacing: 1 }}&gt;&#10;                五维信号设计（权重 + 可机械判定的信号 + 满分条件）&#10;            &lt;/Text&gt;&#10;            &lt;Box style={{ marginTop: 12, height: 396 }}&gt;&#10;                &lt;Table&#10;                    style={{ width: '100%', height: 396 }}&#10;                    defaultTextStyle={{ fontSize: 12.5, textAlign: 'center', color: '#1A2230' }}&#10;                    defaultCellStyle={{&#10;                        border: {&#10;                            left: { width: 1, color: '#D6DCE5' },&#10;                            right: { width: 1, color: '#D6DCE5' },&#10;                            top: { width: 1, color: '#D6DCE5' },&#10;                            bottom: { width: 1, color: '#D6DCE5' },&#10;                        },&#10;                    }}&#10;                    cells={[&#10;                        [&#10;                            { text: '维度', textStyle: { bold: true, color: '#FFFFFF' }, cellStyle: { background: { color: '#0E3F8C' } } },&#10;                            { text: '权重', textStyle: { bold: true, color: '#FFFFFF' }, cellStyle: { background: { color: '#0E3F8C' } } },&#10;                            { text: '评分信号（可机械判定）', textStyle: { bold: true, color: '#FFFFFF' }, cellStyle: { background: { color: '#0E3F8C' } } },&#10;                            { text: '满分条件', textStyle: { bold: true, color: '#FFFFFF' }, cellStyle: { background: { color: '#0E3F8C' } } },&#10;                        ],&#10;                        [&#10;                            { text: '内容深度', textStyle: { bold: true, color: '#0E3F8C' } },&#10;                            { text: '25%' },&#10;                            { text: '数字个数 ×2.2（上限 22）、技术词命中 ×2.5（上限 18）、轮次 ≥4 +8、代码沙盒通过率融合' },&#10;                            { text: '4+ 量化且 3+ 技术词' },&#10;                        ],&#10;                        [&#10;                            { text: '结构逻辑', textStyle: { bold: true, color: '#0E3F8C' }, cellStyle: { background: { color: '#F7F9FC' } } },&#10;                            { text: '20%', cellStyle: { background: { color: '#F7F9FC' } } },&#10;                            { text: 'STAR 词命中（背景/目标/负责/通过/最终/结果/因此/于是）×4 上限 30', cellStyle: { background: { color: '#F7F9FC' } } },&#10;                            { text: '命中 3+', cellStyle: { background: { color: '#F7F9FC' } } },&#10;                        ],&#10;                        [&#10;                            { text: '语言表达', textStyle: { bold: true, color: '#0E3F8C' } },&#10;                            { text: '15%' },&#10;                            { text: '口头禅（然后/那个/就是）×5 上限 24、短答数（&lt;40 字）×4' },&#10;                            { text: '口头禅 ≤2 且无短答' },&#10;                        ],&#10;                        [&#10;                            { text: '岗位匹配', textStyle: { bold: true, color: '#0E3F8C' }, cellStyle: { background: { color: '#F7F9FC' } } },&#10;                            { text: '20%', cellStyle: { background: { color: '#F7F9FC' } } },&#10;                            { text: '匹配报告分 ×0.4 + 技术词命中（上限 10）；无报告时按技能命中估算', cellStyle: { background: { color: '#F7F9FC' } } },&#10;                            { text: '匹配分高 + 缺口少', cellStyle: { background: { color: '#F7F9FC' } } },&#10;                        ],&#10;                        [&#10;                            { text: '抗压表现', textStyle: { bold: true, color: '#0E3F8C' } },&#10;                            { text: '20%' },&#10;                            { text: '防御性表述（不是我的/跟我没关系/但是/我没有）×6 上限 20；压力轮短答 ×3 上限 12' },&#10;                            { text: '无防御性表述' },&#10;                        ],&#10;                    ]}&#10;                /&gt;&#10;            &lt;/Box&gt;&#10;            &lt;Text style={{ fontSize: 13, color: '#8B97A8', marginTop: 10, lineHeight: 1.6 }}&gt;&#10;                信号不是拍脑袋：量化数据（STAR 的 Result 可验证化）、STAR 结构词、口头禅密度、防御性表述，分别对应面试评估中内容、结构、表达、抗压四类公认维度。&#10;            &lt;/Text&gt;&#10;        &lt;/Box&gt;&#10;        {/* 右 40%：设计目标与边界 */}&#10;        &lt;Box style={{ flex: 1, flexDirection: 'column' }}&gt;&#10;            &lt;Text style={{ fontSize: 16, fontWeight: 'bold', color: '#0E3F8C', letterSpacing: 1 }}&gt;&#10;                评分引擎要回答的四个问题&#10;            &lt;/Text&gt;&#10;            &lt;Box style={{ flexDirection: 'column', gap: 10, marginTop: 12 }}&gt;&#10;                &lt;Box style={{ background: '#F7F9FC', border: '1px solid #D6DCE5', padding: '10px 14px', flexDirection: 'row', alignItems: 'center', gap: 12 }}&gt;&#10;                    &lt;Text style={{ fontSize: 17, fontWeight: 'bold', color: '#1E4FA8', width: 26 }}&gt;①&lt;/Text&gt;&#10;                    &lt;Text style={{ fontSize: 14, color: '#1A2230', lineHeight: 1.5 }}&gt;&#10;                        &lt;span style={{ fontWeight: 'bold' }}&gt;可解释&lt;/span&gt;——每个分数能追溯到对话原话&#10;                    &lt;/Text&gt;&#10;                &lt;/Box&gt;&#10;                &lt;Box style={{ background: '#F7F9FC', border: '1px solid #D6DCE5', padding: '10px 14px', flexDirection: 'row', alignItems: 'center', gap: 12 }}&gt;&#10;                    &lt;Text style={{ fontSize: 17, fontWeight: 'bold', color: '#1E4FA8', width: 26 }}&gt;②&lt;/Text&gt;&#10;                    &lt;Text style={{ fontSize: 14, color: '#1A2230', lineHeight: 1.5 }}&gt;&#10;                        &lt;span style={{ fontWeight: 'bold' }}&gt;可复现&lt;/span&gt;——同一输入永远同一输出，不靠模型运气&#10;                    &lt;/Text&gt;&#10;                &lt;/Box&gt;&#10;                &lt;Box style={{ background: '#F7F9FC', border: '1px solid #D6DCE5', padding: '10px 14px', flexDirection: 'row', alignItems: 'center', gap: 12 }}&gt;&#10;                    &lt;Text style={{ fontSize: 17, fontWeight: 'bold', color: '#1E4FA8', width: 26 }}&gt;③&lt;/Text&gt;&#10;                    &lt;Text style={{ fontSize: 14, color: '#1A2230', lineHeight: 1.5 }}&gt;&#10;                        &lt;span style={{ fontWeight: 'bold' }}&gt;双引擎同构&lt;/span&gt;——前端本地引擎与服务端逐位一致，支撑三级降级&#10;                    &lt;/Text&gt;&#10;                &lt;/Box&gt;&#10;                &lt;Box style={{ background: '#F7F9FC', border: '1px solid #D6DCE5', padding: '10px 14px', flexDirection: 'row', alignItems: 'center', gap: 12 }}&gt;&#10;                    &lt;Text style={{ fontSize: 17, fontWeight: 'bold', color: '#1E4FA8', width: 26 }}&gt;④&lt;/Text&gt;&#10;                    &lt;Text style={{ fontSize: 14, color: '#1A2230', lineHeight: 1.5 }}&gt;&#10;                        &lt;span style={{ fontWeight: 'bold' }}&gt;对匹配报告开放&lt;/span&gt;——匹配分作为先验进入拟合维度，而非另起一套&#10;                    &lt;/Text&gt;&#10;                &lt;/Box&gt;&#10;            &lt;/Box&gt;&#10;            &lt;Box style={{ background: '#E8EFF8', padding: '14px 16px', marginTop: 16 }}&gt;&#10;                &lt;Text style={{ fontSize: 15, fontWeight: 'bold', color: '#0E3F8C' }}&gt;&#10;                    边界裁剪 [30, 96]&#10;                &lt;/Text&gt;&#10;                &lt;Text style={{ fontSize: 13.5, color: '#4A5568', marginTop: 6, lineHeight: 1.65 }}&gt;&#10;                    下限 30：再差的回答也有保底，避免「零分挫败」吓退用户；上限 96：不留满分，保留「还能更好」的成长空间。总分 = 五维均值。&#10;                &lt;/Text&gt;&#10;            &lt;/Box&gt;&#10;            &lt;Box style={{ flex: 1 }} /&gt;&#10;            &lt;Box style={{ background: '#0E3F8C', padding: '14px 16px' }}&gt;&#10;                &lt;Text style={{ fontSize: 14.5, color: '#FFFFFF', lineHeight: 1.65, fontWeight: 'bold' }}&gt;&#10;                    规则引擎（而非让 LLM 直接打分），是同时满足四者的唯一选择。&#10;                &lt;/Text&gt;&#10;            &lt;/Box&gt;&#10;        &lt;/Box&gt;&#10;    &lt;/Box&gt;&#10;    {/* ===== 母版：页脚 ===== */}&#10;    &lt;Box style={{ position: 'absolute', bottom: 0, left: 0, width: '1280px', height: 64, borderTop: '1px solid #E5E7EB', flexDirection: 'row', alignItems: 'center', justifyContent: 'space-between', padding: '0 40px', boxSizing: 'border-box' }}&gt;&#10;        &lt;Text style={{ fontSize: 13, color: '#8B97A8' }}&gt;&#10;            面镜 FutureMirror · 功能演示&#10;        &lt;/Text&gt;&#10;        &lt;Text style={{ fontSize: 14, color: '#1E4FA8', fontWeight: 'bold' }}&gt;&#10;            10 / 16&#10;        &lt;/Text&gt;&#10;    &lt;/Box&gt;&#10;&lt;/Slide&gt;&#10;"/>
         <p:cNvGrpSpPr/>
         <p:nvPr/>
       </p:nvGrpSpPr>
@@ -4213,7 +4213,7 @@
                 <a:latin typeface="Noto Sans SC"/>
                 <a:ea typeface="Noto Sans SC"/>
               </a:rPr>
-              <a:t>竞赛演示</a:t>
+              <a:t>功能演示</a:t>
             </a:r>
             <a:endParaRPr/>
           </a:p>
@@ -4264,7 +4264,7 @@
   <p:cSld>
     <p:spTree>
       <p:nvGrpSpPr>
-        <p:cNvPr id="64" name="" descr="&lt;Slide style={{&#10;    width: '1280px',&#10;    height: '720px',&#10;    background: '#FFFFFF',&#10;    padding: 0,&#10;    position: 'relative',&#10;    overflow: 'hidden',&#10;    fontFamily: &quot;'Noto Sans SC','Source Han Sans SC','PingFang SC','Microsoft YaHei',sans-serif&quot;,&#10;}}&gt;&#10;    {/* ===== 母版：A3 深蓝顶条 ===== */}&#10;    &lt;Box style={{ position: 'absolute', top: 0, left: 0, width: '1280px', height: 84, background: '#0E3F8C' }}&gt;&#10;        &lt;svg style={{ position: 'absolute', right: 210, top: 18, opacity: 0.16 }} width={150} height={48} viewBox='0 0 150 48'&gt;&#10;            &lt;g stroke='#FFFFFF' strokeWidth='1.2' fill='none'&gt;&#10;                &lt;path d='M2 24 L28 24 L38 10 L74 10 L84 24 L120 24 L130 38 L148 38' /&gt;&#10;                &lt;path d='M38 10 L38 38 L74 38' /&gt;&#10;                &lt;circle cx='28' cy='24' r='3' fill='#FFFFFF' /&gt;&#10;                &lt;circle cx='84' cy='24' r='3' fill='#FFFFFF' /&gt;&#10;            &lt;/g&gt;&#10;        &lt;/svg&gt;&#10;        &lt;Box style={{ position: 'absolute', left: 40, top: 0, height: 84, justifyContent: 'center' }}&gt;&#10;            &lt;Text style={{ fontSize: 26, fontWeight: 'bold', color: '#FFFFFF' }}&gt;&#10;                校准：双引擎对拍，发现一次真实舍入缺陷&#10;            &lt;/Text&gt;&#10;        &lt;/Box&gt;&#10;        &lt;Box style={{ position: 'absolute', right: 40, top: 24, background: '#1E4FA8', padding: '7px 16px', borderRadius: 14 }}&gt;&#10;            &lt;Text style={{ fontSize: 14, color: '#FFFFFF', letterSpacing: 1 }}&gt;&#10;                02 原创性论证&#10;            &lt;/Text&gt;&#10;        &lt;/Box&gt;&#10;    &lt;/Box&gt;&#10;    {/* ===== 内容区 ===== */}&#10;    &lt;Box style={{ position: 'absolute', top: 84, left: 0, width: '1280px', height: 572, padding: '22px 40px', boxSizing: 'border-box', flexDirection: 'row', gap: 28 }}&gt;&#10;        {/* 左 55%：校准总分图 + 四步校准 */}&#10;        &lt;Box style={{ width: 648, flexDirection: 'column' }}&gt;&#10;            &lt;Text style={{ fontSize: 16, fontWeight: 'bold', color: '#0E3F8C', letterSpacing: 1 }}&gt;&#10;                五个标准样本的总分（双引擎一致输出）&#10;            &lt;/Text&gt;&#10;            &lt;Chart&#10;                style={{ height: 268, marginTop: 10 }}&#10;                chartType='barChart'&#10;                colors={['#1E4FA8']}&#10;                background='#FFFFFF'&#10;                showLegend={false}&#10;                showDataLabels={true}&#10;                dataLabelColor='#0E3F8C'&#10;                axisColor='#4A5568'&#10;                data={[&#10;                    ['样本', '总分'],&#10;                    ['C3 短答', 55],&#10;                    ['C4 防御', 56],&#10;                    ['C2 缺量化', 64],&#10;                    ['C1 强答', 77],&#10;                    ['C5 匹配', 82],&#10;                ]}&#10;            /&gt;&#10;            &lt;Text style={{ fontSize: 13, color: '#8B97A8', marginTop: 4 }}&gt;&#10;                总分单调：55 → 56 → 64 → 77 → 82——答题质量提升，总分必须提升（不变量之一）&#10;            &lt;/Text&gt;&#10;            &lt;Box style={{ flexDirection: 'row', gap: 12, marginTop: 16 }}&gt;&#10;                &lt;Box style={{ flex: 1, background: '#F7F9FC', border: '1px solid #D6DCE5', padding: '10px 12px' }}&gt;&#10;                    &lt;Text style={{ fontSize: 15, fontWeight: 'bold', color: '#1E4FA8' }}&gt;① 规则来源&lt;/Text&gt;&#10;                    &lt;Text style={{ fontSize: 12.5, color: '#4A5568', marginTop: 4, lineHeight: 1.5 }}&gt;&#10;                        信号对应面试评估公认维度&#10;                    &lt;/Text&gt;&#10;                &lt;/Box&gt;&#10;                &lt;Box style={{ flex: 1, background: '#F7F9FC', border: '1px solid #D6DCE5', padding: '10px 12px' }}&gt;&#10;                    &lt;Text style={{ fontSize: 15, fontWeight: 'bold', color: '#1E4FA8' }}&gt;② 双引擎对拍&lt;/Text&gt;&#10;                    &lt;Text style={{ fontSize: 12.5, color: '#4A5568', marginTop: 4, lineHeight: 1.5 }}&gt;&#10;                        Python 与 JS 共用 5 个标准样本&#10;                    &lt;/Text&gt;&#10;                &lt;/Box&gt;&#10;                &lt;Box style={{ flex: 1, background: '#F7F9FC', border: '1px solid #D6DCE5', padding: '10px 12px' }}&gt;&#10;                    &lt;Text style={{ fontSize: 15, fontWeight: 'bold', color: '#1E4FA8' }}&gt;③ 缺陷修复&lt;/Text&gt;&#10;                    &lt;Text style={{ fontSize: 12.5, color: '#4A5568', marginTop: 4, lineHeight: 1.5 }}&gt;&#10;                        对拍首跑发现舍入分歧&#10;                    &lt;/Text&gt;&#10;                &lt;/Box&gt;&#10;                &lt;Box style={{ flex: 1, background: '#F7F9FC', border: '1px solid #D6DCE5', padding: '10px 12px' }}&gt;&#10;                    &lt;Text style={{ fontSize: 15, fontWeight: 'bold', color: '#1E4FA8' }}&gt;④ 不变量固化&lt;/Text&gt;&#10;                    &lt;Text style={{ fontSize: 12.5, color: '#4A5568', marginTop: 4, lineHeight: 1.5 }}&gt;&#10;                        11 条断言常驻回归&#10;                    &lt;/Text&gt;&#10;                &lt;/Box&gt;&#10;            &lt;/Box&gt;&#10;        &lt;/Box&gt;&#10;        {/* 右 45%：舍入缺陷 + 区分度 */}&#10;        &lt;Box style={{ flex: 1, flexDirection: 'column' }}&gt;&#10;            &lt;Box style={{ background: '#FFFFFF', border: '1px solid #D6DCE5', borderLeft: '4px solid #D9534F', padding: '14px 18px' }}&gt;&#10;                &lt;Text style={{ fontSize: 16, fontWeight: 'bold', color: '#0E3F8C' }}&gt;&#10;                    对拍发现的真实缺陷（锚点数字）&#10;                &lt;/Text&gt;&#10;                &lt;Box style={{ flexDirection: 'row', alignItems: 'baseline', gap: 12, marginTop: 8 }}&gt;&#10;                    &lt;Text style={{ fontSize: 52, fontWeight: 'bold', color: '#D9534F', lineHeight: 1 }}&gt;&#10;                        90.5&#10;                    &lt;/Text&gt;&#10;                    &lt;Text style={{ fontSize: 26, fontWeight: 'bold', color: '#4A5568' }}&gt;&#10;                        →&#10;                    &lt;/Text&gt;&#10;                    &lt;Text style={{ fontSize: 52, fontWeight: 'bold', color: '#1E4FA8', lineHeight: 1 }}&gt;&#10;                        91&#10;                    &lt;/Text&gt;&#10;                &lt;/Box&gt;&#10;                &lt;Text style={{ fontSize: 13.5, color: '#4A5568', marginTop: 10, lineHeight: 1.65 }}&gt;&#10;                    真值 48 + 22 + 5×2.5 + 8 = 90.5 恰在 .5 边界：Python &lt;span style={{ fontFamily: &quot;'Times New Roman',serif&quot; }}&gt;round()&lt;/span&gt; 银行家舍入得 90，JS &lt;span style={{ fontFamily: &quot;'Times New Roman',serif&quot; }}&gt;Math.round()&lt;/span&gt; 半价向上得 91。肉眼读代码发现不了——修复为 &lt;span style={{ fontFamily: &quot;'Times New Roman',serif&quot; }}&gt;floor(v+0.5)&lt;/span&gt; 后，对拍从 3/5 变为 5/5 完全一致。&#10;                &lt;/Text&gt;&#10;            &lt;/Box&gt;&#10;            &lt;Box style={{ background: '#F7F9FC', border: '1px solid #D6DCE5', padding: '14px 18px', marginTop: 14 }}&gt;&#10;                &lt;Text style={{ fontSize: 16, fontWeight: 'bold', color: '#0E3F8C' }}&gt;&#10;                    区分度即校准证据&#10;                &lt;/Text&gt;&#10;                &lt;Text style={{ fontSize: 13.5, color: '#4A5568', marginTop: 8, lineHeight: 1.7 }}&gt;&#10;                    量化数据把内容深度从 &lt;span style={{ fontWeight: 'bold', color: '#1E4FA8' }}&gt;48 拉到 91&lt;/span&gt;；STAR 结构把结构逻辑从 54 拉到 78；口头禅把语言表达压到 52；防御性表述把抗压表现孤立到 &lt;span style={{ fontWeight: 'bold', color: '#D9534F' }}&gt;43&lt;/span&gt;（其他维度不动）；匹配报告把岗位匹配推到 &lt;span style={{ fontWeight: 'bold', color: '#1E4FA8' }}&gt;92&lt;/span&gt;。&#10;                &lt;/Text&gt;&#10;            &lt;/Box&gt;&#10;            &lt;Box style={{ flex: 1 }} /&gt;&#10;            &lt;Box style={{ background: '#0E3F8C', padding: '12px 16px' }}&gt;&#10;                &lt;Text style={{ fontSize: 13.5, color: '#FFFFFF', lineHeight: 1.6 }}&gt;&#10;                    不变量写成 11 条断言常驻回归：单调性 · 维度分离 · 确定性 · 边界 [30, 96] · 证据链。&#10;                &lt;/Text&gt;&#10;            &lt;/Box&gt;&#10;        &lt;/Box&gt;&#10;    &lt;/Box&gt;&#10;    {/* ===== 母版：页脚 ===== */}&#10;    &lt;Box style={{ position: 'absolute', bottom: 0, left: 0, width: '1280px', height: 64, borderTop: '1px solid #E5E7EB', flexDirection: 'row', alignItems: 'center', justifyContent: 'space-between', padding: '0 40px', boxSizing: 'border-box' }}&gt;&#10;        &lt;Text style={{ fontSize: 13, color: '#8B97A8' }}&gt;&#10;            面镜 FutureMirror · 竞赛演示&#10;        &lt;/Text&gt;&#10;        &lt;Text style={{ fontSize: 14, color: '#1E4FA8', fontWeight: 'bold' }}&gt;&#10;            11 / 16&#10;        &lt;/Text&gt;&#10;    &lt;/Box&gt;&#10;&lt;/Slide&gt;&#10;"/>
+        <p:cNvPr id="64" name="" descr="&lt;Slide style={{&#10;    width: '1280px',&#10;    height: '720px',&#10;    background: '#FFFFFF',&#10;    padding: 0,&#10;    position: 'relative',&#10;    overflow: 'hidden',&#10;    fontFamily: &quot;'Noto Sans SC','Source Han Sans SC','PingFang SC','Microsoft YaHei',sans-serif&quot;,&#10;}}&gt;&#10;    {/* ===== 母版：A3 深蓝顶条 ===== */}&#10;    &lt;Box style={{ position: 'absolute', top: 0, left: 0, width: '1280px', height: 84, background: '#0E3F8C' }}&gt;&#10;        &lt;svg style={{ position: 'absolute', right: 210, top: 18, opacity: 0.16 }} width={150} height={48} viewBox='0 0 150 48'&gt;&#10;            &lt;g stroke='#FFFFFF' strokeWidth='1.2' fill='none'&gt;&#10;                &lt;path d='M2 24 L28 24 L38 10 L74 10 L84 24 L120 24 L130 38 L148 38' /&gt;&#10;                &lt;path d='M38 10 L38 38 L74 38' /&gt;&#10;                &lt;circle cx='28' cy='24' r='3' fill='#FFFFFF' /&gt;&#10;                &lt;circle cx='84' cy='24' r='3' fill='#FFFFFF' /&gt;&#10;            &lt;/g&gt;&#10;        &lt;/svg&gt;&#10;        &lt;Box style={{ position: 'absolute', left: 40, top: 0, height: 84, justifyContent: 'center' }}&gt;&#10;            &lt;Text style={{ fontSize: 26, fontWeight: 'bold', color: '#FFFFFF' }}&gt;&#10;                校准：双引擎对拍，发现一次真实舍入缺陷&#10;            &lt;/Text&gt;&#10;        &lt;/Box&gt;&#10;        &lt;Box style={{ position: 'absolute', right: 40, top: 24, background: '#1E4FA8', padding: '7px 16px', borderRadius: 14 }}&gt;&#10;            &lt;Text style={{ fontSize: 14, color: '#FFFFFF', letterSpacing: 1 }}&gt;&#10;                02 原创性论证&#10;            &lt;/Text&gt;&#10;        &lt;/Box&gt;&#10;    &lt;/Box&gt;&#10;    {/* ===== 内容区 ===== */}&#10;    &lt;Box style={{ position: 'absolute', top: 84, left: 0, width: '1280px', height: 572, padding: '22px 40px', boxSizing: 'border-box', flexDirection: 'row', gap: 28 }}&gt;&#10;        {/* 左 55%：校准总分图 + 四步校准 */}&#10;        &lt;Box style={{ width: 648, flexDirection: 'column' }}&gt;&#10;            &lt;Text style={{ fontSize: 16, fontWeight: 'bold', color: '#0E3F8C', letterSpacing: 1 }}&gt;&#10;                五个标准样本的总分（双引擎一致输出）&#10;            &lt;/Text&gt;&#10;            &lt;Chart&#10;                style={{ height: 268, marginTop: 10 }}&#10;                chartType='barChart'&#10;                colors={['#1E4FA8']}&#10;                background='#FFFFFF'&#10;                showLegend={false}&#10;                showDataLabels={true}&#10;                dataLabelColor='#0E3F8C'&#10;                axisColor='#4A5568'&#10;                data={[&#10;                    ['样本', '总分'],&#10;                    ['C3 短答', 55],&#10;                    ['C4 防御', 56],&#10;                    ['C2 缺量化', 64],&#10;                    ['C1 强答', 77],&#10;                    ['C5 匹配', 82],&#10;                ]}&#10;            /&gt;&#10;            &lt;Text style={{ fontSize: 13, color: '#8B97A8', marginTop: 4 }}&gt;&#10;                总分单调：55 → 56 → 64 → 77 → 82——答题质量提升，总分必须提升（不变量之一）&#10;            &lt;/Text&gt;&#10;            &lt;Box style={{ flexDirection: 'row', gap: 12, marginTop: 16 }}&gt;&#10;                &lt;Box style={{ flex: 1, background: '#F7F9FC', border: '1px solid #D6DCE5', padding: '10px 12px' }}&gt;&#10;                    &lt;Text style={{ fontSize: 15, fontWeight: 'bold', color: '#1E4FA8' }}&gt;① 规则来源&lt;/Text&gt;&#10;                    &lt;Text style={{ fontSize: 12.5, color: '#4A5568', marginTop: 4, lineHeight: 1.5 }}&gt;&#10;                        信号对应面试评估公认维度&#10;                    &lt;/Text&gt;&#10;                &lt;/Box&gt;&#10;                &lt;Box style={{ flex: 1, background: '#F7F9FC', border: '1px solid #D6DCE5', padding: '10px 12px' }}&gt;&#10;                    &lt;Text style={{ fontSize: 15, fontWeight: 'bold', color: '#1E4FA8' }}&gt;② 双引擎对拍&lt;/Text&gt;&#10;                    &lt;Text style={{ fontSize: 12.5, color: '#4A5568', marginTop: 4, lineHeight: 1.5 }}&gt;&#10;                        Python 与 JS 共用 5 个标准样本&#10;                    &lt;/Text&gt;&#10;                &lt;/Box&gt;&#10;                &lt;Box style={{ flex: 1, background: '#F7F9FC', border: '1px solid #D6DCE5', padding: '10px 12px' }}&gt;&#10;                    &lt;Text style={{ fontSize: 15, fontWeight: 'bold', color: '#1E4FA8' }}&gt;③ 缺陷修复&lt;/Text&gt;&#10;                    &lt;Text style={{ fontSize: 12.5, color: '#4A5568', marginTop: 4, lineHeight: 1.5 }}&gt;&#10;                        对拍首跑发现舍入分歧&#10;                    &lt;/Text&gt;&#10;                &lt;/Box&gt;&#10;                &lt;Box style={{ flex: 1, background: '#F7F9FC', border: '1px solid #D6DCE5', padding: '10px 12px' }}&gt;&#10;                    &lt;Text style={{ fontSize: 15, fontWeight: 'bold', color: '#1E4FA8' }}&gt;④ 不变量固化&lt;/Text&gt;&#10;                    &lt;Text style={{ fontSize: 12.5, color: '#4A5568', marginTop: 4, lineHeight: 1.5 }}&gt;&#10;                        11 条断言常驻回归&#10;                    &lt;/Text&gt;&#10;                &lt;/Box&gt;&#10;            &lt;/Box&gt;&#10;        &lt;/Box&gt;&#10;        {/* 右 45%：舍入缺陷 + 区分度 */}&#10;        &lt;Box style={{ flex: 1, flexDirection: 'column' }}&gt;&#10;            &lt;Box style={{ background: '#FFFFFF', border: '1px solid #D6DCE5', borderLeft: '4px solid #D9534F', padding: '14px 18px' }}&gt;&#10;                &lt;Text style={{ fontSize: 16, fontWeight: 'bold', color: '#0E3F8C' }}&gt;&#10;                    对拍发现的真实缺陷（锚点数字）&#10;                &lt;/Text&gt;&#10;                &lt;Box style={{ flexDirection: 'row', alignItems: 'baseline', gap: 12, marginTop: 8 }}&gt;&#10;                    &lt;Text style={{ fontSize: 52, fontWeight: 'bold', color: '#D9534F', lineHeight: 1 }}&gt;&#10;                        90.5&#10;                    &lt;/Text&gt;&#10;                    &lt;Text style={{ fontSize: 26, fontWeight: 'bold', color: '#4A5568' }}&gt;&#10;                        →&#10;                    &lt;/Text&gt;&#10;                    &lt;Text style={{ fontSize: 52, fontWeight: 'bold', color: '#1E4FA8', lineHeight: 1 }}&gt;&#10;                        91&#10;                    &lt;/Text&gt;&#10;                &lt;/Box&gt;&#10;                &lt;Text style={{ fontSize: 13.5, color: '#4A5568', marginTop: 10, lineHeight: 1.65 }}&gt;&#10;                    真值 48 + 22 + 5×2.5 + 8 = 90.5 恰在 .5 边界：Python &lt;span style={{ fontFamily: &quot;'Times New Roman',serif&quot; }}&gt;round()&lt;/span&gt; 银行家舍入得 90，JS &lt;span style={{ fontFamily: &quot;'Times New Roman',serif&quot; }}&gt;Math.round()&lt;/span&gt; 半价向上得 91。肉眼读代码发现不了——修复为 &lt;span style={{ fontFamily: &quot;'Times New Roman',serif&quot; }}&gt;floor(v+0.5)&lt;/span&gt; 后，对拍从 3/5 变为 5/5 完全一致。&#10;                &lt;/Text&gt;&#10;            &lt;/Box&gt;&#10;            &lt;Box style={{ background: '#F7F9FC', border: '1px solid #D6DCE5', padding: '14px 18px', marginTop: 14 }}&gt;&#10;                &lt;Text style={{ fontSize: 16, fontWeight: 'bold', color: '#0E3F8C' }}&gt;&#10;                    区分度即校准证据&#10;                &lt;/Text&gt;&#10;                &lt;Text style={{ fontSize: 13.5, color: '#4A5568', marginTop: 8, lineHeight: 1.7 }}&gt;&#10;                    量化数据把内容深度从 &lt;span style={{ fontWeight: 'bold', color: '#1E4FA8' }}&gt;48 拉到 91&lt;/span&gt;；STAR 结构把结构逻辑从 54 拉到 78；口头禅把语言表达压到 52；防御性表述把抗压表现孤立到 &lt;span style={{ fontWeight: 'bold', color: '#D9534F' }}&gt;43&lt;/span&gt;（其他维度不动）；匹配报告把岗位匹配推到 &lt;span style={{ fontWeight: 'bold', color: '#1E4FA8' }}&gt;92&lt;/span&gt;。&#10;                &lt;/Text&gt;&#10;            &lt;/Box&gt;&#10;            &lt;Box style={{ flex: 1 }} /&gt;&#10;            &lt;Box style={{ background: '#0E3F8C', padding: '12px 16px' }}&gt;&#10;                &lt;Text style={{ fontSize: 13.5, color: '#FFFFFF', lineHeight: 1.6 }}&gt;&#10;                    不变量写成 11 条断言常驻回归：单调性 · 维度分离 · 确定性 · 边界 [30, 96] · 证据链。&#10;                &lt;/Text&gt;&#10;            &lt;/Box&gt;&#10;        &lt;/Box&gt;&#10;    &lt;/Box&gt;&#10;    {/* ===== 母版：页脚 ===== */}&#10;    &lt;Box style={{ position: 'absolute', bottom: 0, left: 0, width: '1280px', height: 64, borderTop: '1px solid #E5E7EB', flexDirection: 'row', alignItems: 'center', justifyContent: 'space-between', padding: '0 40px', boxSizing: 'border-box' }}&gt;&#10;        &lt;Text style={{ fontSize: 13, color: '#8B97A8' }}&gt;&#10;            面镜 FutureMirror · 功能演示&#10;        &lt;/Text&gt;&#10;        &lt;Text style={{ fontSize: 14, color: '#1E4FA8', fontWeight: 'bold' }}&gt;&#10;            11 / 16&#10;        &lt;/Text&gt;&#10;    &lt;/Box&gt;&#10;&lt;/Slide&gt;&#10;"/>
         <p:cNvGrpSpPr/>
         <p:nvPr/>
       </p:nvGrpSpPr>
@@ -6090,7 +6090,7 @@
                 <a:latin typeface="Noto Sans SC"/>
                 <a:ea typeface="Noto Sans SC"/>
               </a:rPr>
-              <a:t>竞赛演示</a:t>
+              <a:t>功能演示</a:t>
             </a:r>
             <a:endParaRPr/>
           </a:p>
@@ -7510,7 +7510,7 @@
   <p:cSld>
     <p:spTree>
       <p:nvGrpSpPr>
-        <p:cNvPr id="140" name="" descr="&lt;Slide style={{&#10;    width: '1280px',&#10;    height: '720px',&#10;    background: '#FFFFFF',&#10;    padding: 0,&#10;    position: 'relative',&#10;    overflow: 'hidden',&#10;    fontFamily: &quot;'Noto Sans SC','Source Han Sans SC','PingFang SC','Microsoft YaHei',sans-serif&quot;,&#10;}}&gt;&#10;    {/* ===== 母版：A3 深蓝顶条 ===== */}&#10;    &lt;Box style={{ position: 'absolute', top: 0, left: 0, width: '1280px', height: 84, background: '#0E3F8C' }}&gt;&#10;        &lt;svg style={{ position: 'absolute', right: 210, top: 18, opacity: 0.16 }} width={150} height={48} viewBox='0 0 150 48'&gt;&#10;            &lt;g stroke='#FFFFFF' strokeWidth='1.2' fill='none'&gt;&#10;                &lt;path d='M2 24 L28 24 L38 10 L74 10 L84 24 L120 24 L130 38 L148 38' /&gt;&#10;                &lt;path d='M38 10 L38 38 L74 38' /&gt;&#10;                &lt;circle cx='28' cy='24' r='3' fill='#FFFFFF' /&gt;&#10;                &lt;circle cx='84' cy='24' r='3' fill='#FFFFFF' /&gt;&#10;            &lt;/g&gt;&#10;        &lt;/svg&gt;&#10;        &lt;Box style={{ position: 'absolute', left: 40, top: 0, height: 84, justifyContent: 'center' }}&gt;&#10;            &lt;Text style={{ fontSize: 26, fontWeight: 'bold', color: '#FFFFFF' }}&gt;&#10;                真实完成度：线上 SSE 流式闭环，不是 Mock 界面&#10;            &lt;/Text&gt;&#10;        &lt;/Box&gt;&#10;        &lt;Box style={{ position: 'absolute', right: 40, top: 24, background: '#1E4FA8', padding: '7px 16px', borderRadius: 14 }}&gt;&#10;            &lt;Text style={{ fontSize: 14, color: '#FFFFFF', letterSpacing: 1 }}&gt;&#10;                03 真实完成度&#10;            &lt;/Text&gt;&#10;        &lt;/Box&gt;&#10;    &lt;/Box&gt;&#10;    {/* ===== 上部：真实 SSE 事件流 + 三项线上验证 ===== */}&#10;    &lt;Box style={{ position: 'absolute', top: 84, left: 0, width: '1280px', height: 318, padding: '20px 40px 0 40px', boxSizing: 'border-box', flexDirection: 'row', gap: 24 }}&gt;&#10;        {/* 左：SSE 事件协议代码块 */}&#10;        &lt;Box style={{ width: 772 }}&gt;&#10;            &lt;Text style={{ fontSize: 15, fontWeight: 'bold', color: '#0E3F8C', letterSpacing: 1 }}&gt;&#10;                /api/chat/stream 事件协议（线上实测节选）&#10;            &lt;/Text&gt;&#10;            &lt;Box style={{ marginTop: 10 }}&gt;&#10;                &lt;CodeBlock&#10;                    code={`event: agent     data: {&quot;id&quot;:&quot;pressure&quot;,&quot;name&quot;:&quot;压力面试官&quot;}&#10;event: thinking  data: {&quot;text&quot;:&quot;正在组织第 3 个问题…&quot;}&#10;event: delta     data: {&quot;text&quot;:&quot;你提到订单服务——&quot;}&#10;event: delta     data: {&quot;text&quot;:&quot;峰值 QPS 是多少？&quot;}&#10;event: observer  data: {&quot;note&quot;:&quot;结构完整但缺量化&quot;}&#10;event: done      data: {&quot;finish_reason&quot;:&quot;stop&quot;,&quot;usage&quot;:true}`}&#10;                    language='javascript'&#10;                    width={772}&#10;                    fontSize={12.5}&#10;                    theme='github-light'&#10;                /&gt;&#10;            &lt;/Box&gt;&#10;            &lt;Text style={{ fontSize: 12.5, color: '#8B97A8', marginTop: 8, lineHeight: 1.5 }}&gt;&#10;                线上镜像实测：真实流式输出含 finish_reason 与 usage；GitHub Pages 跨域通道三头齐全，内容一致。&#10;            &lt;/Text&gt;&#10;        &lt;/Box&gt;&#10;        {/* 右：三项线上验证结果 */}&#10;        &lt;Box style={{ flex: 1, flexDirection: 'column', gap: 12 }}&gt;&#10;            &lt;Box style={{ flex: 1, background: '#E8EFF8', padding: '12px 16px', justifyContent: 'center' }}&gt;&#10;                &lt;Text style={{ fontSize: 22, fontWeight: 'bold', color: '#1E4FA8' }}&gt;&#10;                    llm_ready: true&#10;                &lt;/Text&gt;&#10;                &lt;Text style={{ fontSize: 13, color: '#4A5568', marginTop: 4 }}&gt;&#10;                    /api/health 线上返回 · 模型 glm-4-flash&#10;                &lt;/Text&gt;&#10;            &lt;/Box&gt;&#10;            &lt;Box style={{ flex: 1, background: '#E8EFF8', padding: '12px 16px', justifyContent: 'center' }}&gt;&#10;                &lt;Text style={{ fontSize: 22, fontWeight: 'bold', color: '#1E4FA8' }}&gt;&#10;                    报告总分 78&#10;                &lt;/Text&gt;&#10;                &lt;Text style={{ fontSize: 13, color: '#4A5568', marginTop: 4 }}&gt;&#10;                    登录 → 建会话 → GLM 提问 → sync → 服务端报告&#10;                &lt;/Text&gt;&#10;            &lt;/Box&gt;&#10;            &lt;Box style={{ flex: 1, background: '#E8EFF8', padding: '12px 16px', justifyContent: 'center' }}&gt;&#10;                &lt;Text style={{ fontSize: 22, fontWeight: 'bold', color: '#1E4FA8' }}&gt;&#10;                    Key 零前端接触&#10;                &lt;/Text&gt;&#10;                &lt;Text style={{ fontSize: 13, color: '#4A5568', marginTop: 4 }}&gt;&#10;                    只在服务端环境变量 · X-Auth-Token 双通道&#10;                &lt;/Text&gt;&#10;            &lt;/Box&gt;&#10;        &lt;/Box&gt;&#10;    &lt;/Box&gt;&#10;    {/* ===== 下部：三级降级三卡 ===== */}&#10;    &lt;Box style={{ position: 'absolute', top: 402, left: 0, width: '1280px', height: 254, padding: '0 40px', boxSizing: 'border-box', flexDirection: 'row', gap: 20 }}&gt;&#10;        &lt;Box style={{ flex: 1, background: '#F7F9FC', border: '1px solid #D6DCE5', borderTop: '3px solid #1E4FA8', padding: '14px 18px' }}&gt;&#10;            &lt;Text style={{ fontSize: 17, fontWeight: 'bold', color: '#0E3F8C' }}&gt;三级降级链&lt;/Text&gt;&#10;            &lt;Text style={{ fontSize: 13.5, color: '#4A5568', marginTop: 8, lineHeight: 1.7 }}&gt;&#10;                ① 后端真实模型（GLM SSE 流式）&lt;br /&gt;② 浏览器直连 Key（sessionStorage 逃生通道）&lt;br /&gt;③ 本地 Mock（无网也能完整走完流程）&#10;            &lt;/Text&gt;&#10;        &lt;/Box&gt;&#10;        &lt;Box style={{ flex: 1, background: '#F7F9FC', border: '1px solid #D6DCE5', borderTop: '3px solid #1E4FA8', padding: '14px 18px' }}&gt;&#10;            &lt;Text style={{ fontSize: 17, fontWeight: 'bold', color: '#0E3F8C' }}&gt;回退触发条件&lt;/Text&gt;&#10;            &lt;Text style={{ fontSize: 13.5, color: '#4A5568', marginTop: 8, lineHeight: 1.7 }}&gt;&#10;                后端 5xx / 超时 / 完全无网，均自动向下切换；评分与检索策略三级一致——赛场网络抖动不打断演示。&#10;            &lt;/Text&gt;&#10;        &lt;/Box&gt;&#10;        &lt;Box style={{ width: 380, background: '#0E3F8C', padding: '14px 18px' }}&gt;&#10;            &lt;Text style={{ fontSize: 17, fontWeight: 'bold', color: '#FFFFFF' }}&gt;现场看什么&lt;/Text&gt;&#10;            &lt;Text style={{ fontSize: 13.5, color: '#D7E3F5', marginTop: 8, lineHeight: 1.7 }}&gt;&#10;                演示视频展示的是真实 API 请求与响应、错误处理与降级机制——远比一个完美的 Mock 界面更有说服力。&#10;            &lt;/Text&gt;&#10;        &lt;/Box&gt;&#10;    &lt;/Box&gt;&#10;    {/* ===== 母版：页脚 ===== */}&#10;    &lt;Box style={{ position: 'absolute', bottom: 0, left: 0, width: '1280px', height: 64, borderTop: '1px solid #E5E7EB', flexDirection: 'row', alignItems: 'center', justifyContent: 'space-between', padding: '0 40px', boxSizing: 'border-box' }}&gt;&#10;        &lt;Text style={{ fontSize: 13, color: '#8B97A8' }}&gt;&#10;            面镜 FutureMirror · 竞赛演示&#10;        &lt;/Text&gt;&#10;        &lt;Text style={{ fontSize: 14, color: '#1E4FA8', fontWeight: 'bold' }}&gt;&#10;            13 / 16&#10;        &lt;/Text&gt;&#10;    &lt;/Box&gt;&#10;&lt;/Slide&gt;&#10;"/>
+        <p:cNvPr id="140" name="" descr="&lt;Slide style={{&#10;    width: '1280px',&#10;    height: '720px',&#10;    background: '#FFFFFF',&#10;    padding: 0,&#10;    position: 'relative',&#10;    overflow: 'hidden',&#10;    fontFamily: &quot;'Noto Sans SC','Source Han Sans SC','PingFang SC','Microsoft YaHei',sans-serif&quot;,&#10;}}&gt;&#10;    {/* ===== 母版：A3 深蓝顶条 ===== */}&#10;    &lt;Box style={{ position: 'absolute', top: 0, left: 0, width: '1280px', height: 84, background: '#0E3F8C' }}&gt;&#10;        &lt;svg style={{ position: 'absolute', right: 210, top: 18, opacity: 0.16 }} width={150} height={48} viewBox='0 0 150 48'&gt;&#10;            &lt;g stroke='#FFFFFF' strokeWidth='1.2' fill='none'&gt;&#10;                &lt;path d='M2 24 L28 24 L38 10 L74 10 L84 24 L120 24 L130 38 L148 38' /&gt;&#10;                &lt;path d='M38 10 L38 38 L74 38' /&gt;&#10;                &lt;circle cx='28' cy='24' r='3' fill='#FFFFFF' /&gt;&#10;                &lt;circle cx='84' cy='24' r='3' fill='#FFFFFF' /&gt;&#10;            &lt;/g&gt;&#10;        &lt;/svg&gt;&#10;        &lt;Box style={{ position: 'absolute', left: 40, top: 0, height: 84, justifyContent: 'center' }}&gt;&#10;            &lt;Text style={{ fontSize: 26, fontWeight: 'bold', color: '#FFFFFF' }}&gt;&#10;                真实完成度：线上 SSE 流式闭环，不是 Mock 界面&#10;            &lt;/Text&gt;&#10;        &lt;/Box&gt;&#10;        &lt;Box style={{ position: 'absolute', right: 40, top: 24, background: '#1E4FA8', padding: '7px 16px', borderRadius: 14 }}&gt;&#10;            &lt;Text style={{ fontSize: 14, color: '#FFFFFF', letterSpacing: 1 }}&gt;&#10;                03 真实完成度&#10;            &lt;/Text&gt;&#10;        &lt;/Box&gt;&#10;    &lt;/Box&gt;&#10;    {/* ===== 上部：真实 SSE 事件流 + 三项线上验证 ===== */}&#10;    &lt;Box style={{ position: 'absolute', top: 84, left: 0, width: '1280px', height: 318, padding: '20px 40px 0 40px', boxSizing: 'border-box', flexDirection: 'row', gap: 24 }}&gt;&#10;        {/* 左：SSE 事件协议代码块 */}&#10;        &lt;Box style={{ width: 772 }}&gt;&#10;            &lt;Text style={{ fontSize: 15, fontWeight: 'bold', color: '#0E3F8C', letterSpacing: 1 }}&gt;&#10;                /api/chat/stream 事件协议（线上实测节选）&#10;            &lt;/Text&gt;&#10;            &lt;Box style={{ marginTop: 10 }}&gt;&#10;                &lt;CodeBlock&#10;                    code={`event: agent     data: {&quot;id&quot;:&quot;pressure&quot;,&quot;name&quot;:&quot;压力面试官&quot;}&#10;event: thinking  data: {&quot;text&quot;:&quot;正在组织第 3 个问题…&quot;}&#10;event: delta     data: {&quot;text&quot;:&quot;你提到订单服务——&quot;}&#10;event: delta     data: {&quot;text&quot;:&quot;峰值 QPS 是多少？&quot;}&#10;event: observer  data: {&quot;note&quot;:&quot;结构完整但缺量化&quot;}&#10;event: done      data: {&quot;finish_reason&quot;:&quot;stop&quot;,&quot;usage&quot;:true}`}&#10;                    language='javascript'&#10;                    width={772}&#10;                    fontSize={12.5}&#10;                    theme='github-light'&#10;                /&gt;&#10;            &lt;/Box&gt;&#10;            &lt;Text style={{ fontSize: 12.5, color: '#8B97A8', marginTop: 8, lineHeight: 1.5 }}&gt;&#10;                线上镜像实测：真实流式输出含 finish_reason 与 usage；GitHub Pages 跨域通道三头齐全，内容一致。&#10;            &lt;/Text&gt;&#10;        &lt;/Box&gt;&#10;        {/* 右：三项线上验证结果 */}&#10;        &lt;Box style={{ flex: 1, flexDirection: 'column', gap: 12 }}&gt;&#10;            &lt;Box style={{ flex: 1, background: '#E8EFF8', padding: '12px 16px', justifyContent: 'center' }}&gt;&#10;                &lt;Text style={{ fontSize: 22, fontWeight: 'bold', color: '#1E4FA8' }}&gt;&#10;                    llm_ready: true&#10;                &lt;/Text&gt;&#10;                &lt;Text style={{ fontSize: 13, color: '#4A5568', marginTop: 4 }}&gt;&#10;                    /api/health 线上返回 · 模型 glm-4-flash&#10;                &lt;/Text&gt;&#10;            &lt;/Box&gt;&#10;            &lt;Box style={{ flex: 1, background: '#E8EFF8', padding: '12px 16px', justifyContent: 'center' }}&gt;&#10;                &lt;Text style={{ fontSize: 22, fontWeight: 'bold', color: '#1E4FA8' }}&gt;&#10;                    报告总分 78&#10;                &lt;/Text&gt;&#10;                &lt;Text style={{ fontSize: 13, color: '#4A5568', marginTop: 4 }}&gt;&#10;                    登录 → 建会话 → GLM 提问 → sync → 服务端报告&#10;                &lt;/Text&gt;&#10;            &lt;/Box&gt;&#10;            &lt;Box style={{ flex: 1, background: '#E8EFF8', padding: '12px 16px', justifyContent: 'center' }}&gt;&#10;                &lt;Text style={{ fontSize: 22, fontWeight: 'bold', color: '#1E4FA8' }}&gt;&#10;                    Key 零前端接触&#10;                &lt;/Text&gt;&#10;                &lt;Text style={{ fontSize: 13, color: '#4A5568', marginTop: 4 }}&gt;&#10;                    只在服务端环境变量 · X-Auth-Token 双通道&#10;                &lt;/Text&gt;&#10;            &lt;/Box&gt;&#10;        &lt;/Box&gt;&#10;    &lt;/Box&gt;&#10;    {/* ===== 下部：三级降级三卡 ===== */}&#10;    &lt;Box style={{ position: 'absolute', top: 402, left: 0, width: '1280px', height: 254, padding: '0 40px', boxSizing: 'border-box', flexDirection: 'row', gap: 20 }}&gt;&#10;        &lt;Box style={{ flex: 1, background: '#F7F9FC', border: '1px solid #D6DCE5', borderTop: '3px solid #1E4FA8', padding: '14px 18px' }}&gt;&#10;            &lt;Text style={{ fontSize: 17, fontWeight: 'bold', color: '#0E3F8C' }}&gt;三级降级链&lt;/Text&gt;&#10;            &lt;Text style={{ fontSize: 13.5, color: '#4A5568', marginTop: 8, lineHeight: 1.7 }}&gt;&#10;                ① 后端真实模型（GLM SSE 流式）&lt;br /&gt;② 浏览器直连 Key（sessionStorage 逃生通道）&lt;br /&gt;③ 本地 Mock（无网也能完整走完流程）&#10;            &lt;/Text&gt;&#10;        &lt;/Box&gt;&#10;        &lt;Box style={{ flex: 1, background: '#F7F9FC', border: '1px solid #D6DCE5', borderTop: '3px solid #1E4FA8', padding: '14px 18px' }}&gt;&#10;            &lt;Text style={{ fontSize: 17, fontWeight: 'bold', color: '#0E3F8C' }}&gt;回退触发条件&lt;/Text&gt;&#10;            &lt;Text style={{ fontSize: 13.5, color: '#4A5568', marginTop: 8, lineHeight: 1.7 }}&gt;&#10;                后端 5xx / 超时 / 完全无网，均自动向下切换；评分与检索策略三级一致——赛场网络抖动不打断演示。&#10;            &lt;/Text&gt;&#10;        &lt;/Box&gt;&#10;        &lt;Box style={{ width: 380, background: '#0E3F8C', padding: '14px 18px' }}&gt;&#10;            &lt;Text style={{ fontSize: 17, fontWeight: 'bold', color: '#FFFFFF' }}&gt;现场看什么&lt;/Text&gt;&#10;            &lt;Text style={{ fontSize: 13.5, color: '#D7E3F5', marginTop: 8, lineHeight: 1.7 }}&gt;&#10;                演示视频展示的是真实 API 请求与响应、错误处理与降级机制——远比一个完美的 Mock 界面更有说服力。&#10;            &lt;/Text&gt;&#10;        &lt;/Box&gt;&#10;    &lt;/Box&gt;&#10;    {/* ===== 母版：页脚 ===== */}&#10;    &lt;Box style={{ position: 'absolute', bottom: 0, left: 0, width: '1280px', height: 64, borderTop: '1px solid #E5E7EB', flexDirection: 'row', alignItems: 'center', justifyContent: 'space-between', padding: '0 40px', boxSizing: 'border-box' }}&gt;&#10;        &lt;Text style={{ fontSize: 13, color: '#8B97A8' }}&gt;&#10;            面镜 FutureMirror · 功能演示&#10;        &lt;/Text&gt;&#10;        &lt;Text style={{ fontSize: 14, color: '#1E4FA8', fontWeight: 'bold' }}&gt;&#10;            13 / 16&#10;        &lt;/Text&gt;&#10;    &lt;/Box&gt;&#10;&lt;/Slide&gt;&#10;"/>
         <p:cNvGrpSpPr/>
         <p:nvPr/>
       </p:nvGrpSpPr>
@@ -9644,7 +9644,7 @@
                 <a:latin typeface="Noto Sans SC"/>
                 <a:ea typeface="Noto Sans SC"/>
               </a:rPr>
-              <a:t>竞赛演示</a:t>
+              <a:t>功能演示</a:t>
             </a:r>
             <a:endParaRPr/>
           </a:p>
@@ -9695,7 +9695,7 @@
   <p:cSld>
     <p:spTree>
       <p:nvGrpSpPr>
-        <p:cNvPr id="174" name="" descr="&lt;Slide style={{&#10;    width: '1280px',&#10;    height: '720px',&#10;    background: '#FFFFFF',&#10;    padding: 0,&#10;    position: 'relative',&#10;    overflow: 'hidden',&#10;    fontFamily: &quot;'Noto Sans SC','Source Han Sans SC','PingFang SC','Microsoft YaHei',sans-serif&quot;,&#10;}}&gt;&#10;    {/* ===== 母版：A3 深蓝顶条 ===== */}&#10;    &lt;Box style={{ position: 'absolute', top: 0, left: 0, width: '1280px', height: 84, background: '#0E3F8C' }}&gt;&#10;        &lt;svg style={{ position: 'absolute', right: 210, top: 18, opacity: 0.16 }} width={150} height={48} viewBox='0 0 150 48'&gt;&#10;            &lt;g stroke='#FFFFFF' strokeWidth='1.2' fill='none'&gt;&#10;                &lt;path d='M2 24 L28 24 L38 10 L74 10 L84 24 L120 24 L130 38 L148 38' /&gt;&#10;                &lt;path d='M38 10 L38 38 L74 38' /&gt;&#10;                &lt;circle cx='28' cy='24' r='3' fill='#FFFFFF' /&gt;&#10;                &lt;circle cx='84' cy='24' r='3' fill='#FFFFFF' /&gt;&#10;            &lt;/g&gt;&#10;        &lt;/svg&gt;&#10;        &lt;Box style={{ position: 'absolute', left: 40, top: 0, height: 84, justifyContent: 'center' }}&gt;&#10;            &lt;Text style={{ fontSize: 26, fontWeight: 'bold', color: '#FFFFFF' }}&gt;&#10;                工程质量：全量回归 + 四渠道发布流水线&#10;            &lt;/Text&gt;&#10;        &lt;/Box&gt;&#10;        &lt;Box style={{ position: 'absolute', right: 40, top: 24, background: '#1E4FA8', padding: '7px 16px', borderRadius: 14 }}&gt;&#10;            &lt;Text style={{ fontSize: 14, color: '#FFFFFF', letterSpacing: 1 }}&gt;&#10;                03 真实完成度&#10;            &lt;/Text&gt;&#10;        &lt;/Box&gt;&#10;    &lt;/Box&gt;&#10;    {/* ===== 左侧标题栏 ===== */}&#10;    &lt;Box style={{ position: 'absolute', top: 84, left: 0, width: 356, height: 572, background: '#0E3F8C', padding: '30px 32px 26px 40px', boxSizing: 'border-box', flexDirection: 'column' }}&gt;&#10;        &lt;Text style={{ fontSize: 14, color: '#9FB9E4', letterSpacing: 4 }}&gt;&#10;            测试与发布&#10;        &lt;/Text&gt;&#10;        &lt;Text style={{ fontSize: 30, fontWeight: 'bold', color: '#FFFFFF', marginTop: 14, lineHeight: 1.35 }}&gt;&#10;            全量回归纪律&#10;        &lt;/Text&gt;&#10;        &lt;Box style={{ width: 48, height: 4, background: '#FFC107', marginTop: 18 }} /&gt;&#10;        &lt;Text style={{ fontSize: 15, color: '#D7E3F5', lineHeight: 1.85, marginTop: 18 }}&gt;&#10;            每次改动必须全绿才提交——测试不是演示后的补丁，而是改动发生时的第一道闸门。能复现的工程纪律，是「团队可完整解释全部代码」的底座。&#10;        &lt;/Text&gt;&#10;        &lt;Box style={{ flex: 1 }} /&gt;&#10;        &lt;Box style={{ background: '#1E4FA8', padding: '14px 16px' }}&gt;&#10;            &lt;Text style={{ fontSize: 15, fontWeight: 'bold', color: '#FFFFFF' }}&gt;&#10;                发布链&#10;            &lt;/Text&gt;&#10;            &lt;Text style={{ fontSize: 14, color: '#D7E3F5', marginTop: 6, lineHeight: 1.6 }}&gt;&#10;                repo → Pages → 镜像 → Release&lt;br /&gt;每次变更后逐一核验&#10;            &lt;/Text&gt;&#10;        &lt;/Box&gt;&#10;    &lt;/Box&gt;&#10;    {/* ===== 右侧测试矩阵 + 发布链 ===== */}&#10;    &lt;Box style={{ position: 'absolute', top: 84, left: 356, width: 924, height: 572, padding: '24px 36px', boxSizing: 'border-box' }}&gt;&#10;        &lt;Text style={{ fontSize: 16, fontWeight: 'bold', color: '#0E3F8C', letterSpacing: 1 }}&gt;&#10;            测试矩阵（全部可当场重跑）&#10;        &lt;/Text&gt;&#10;        &lt;Box style={{ marginTop: 12, height: 252 }}&gt;&#10;            &lt;Table&#10;                style={{ width: '100%', height: 252 }}&#10;                defaultTextStyle={{ fontSize: 13.5, textAlign: 'center', color: '#1A2230' }}&#10;                defaultCellStyle={{&#10;                    border: {&#10;                        left: { width: 1, color: '#D6DCE5' },&#10;                        right: { width: 1, color: '#D6DCE5' },&#10;                        top: { width: 1, color: '#D6DCE5' },&#10;                        bottom: { width: 1, color: '#D6DCE5' },&#10;                    },&#10;                }}&#10;                cells={[&#10;                    [&#10;                        { text: '层', textStyle: { bold: true, color: '#FFFFFF' }, cellStyle: { background: { color: '#0E3F8C' } } },&#10;                        { text: '规模', textStyle: { bold: true, color: '#FFFFFF' }, cellStyle: { background: { color: '#0E3F8C' } } },&#10;                        { text: '覆盖内容', textStyle: { bold: true, color: '#FFFFFF' }, cellStyle: { background: { color: '#0E3F8C' } } },&#10;                    ],&#10;                    [&#10;                        { text: '前端', textStyle: { bold: true, color: '#0E3F8C' } },&#10;                        { text: '22 套 · 1513 断言', textStyle: { bold: true, color: '#1E4FA8' } },&#10;                        { text: 'jsdom 端到端（含 RAG 重排专项 9 条）' },&#10;                    ],&#10;                    [&#10;                        { text: '后端', textStyle: { bold: true, color: '#0E3F8C' }, cellStyle: { background: { color: '#F7F9FC' } } },&#10;                        { text: '37 项 pytest', textStyle: { bold: true, color: '#1E4FA8' }, cellStyle: { background: { color: '#F7F9FC' } } },&#10;                        { text: '含评分校准不变量 11 条（单调性 / 维度分离 / 确定性）', cellStyle: { background: { color: '#F7F9FC' } } },&#10;                    ],&#10;                    [&#10;                        { text: '单元', textStyle: { bold: true, color: '#0E3F8C' } },&#10;                        { text: '217 项 Node', textStyle: { bold: true, color: '#1E4FA8' } },&#10;                        { text: 'store / 用户系统 / 简历 / 报告逻辑' },&#10;                    ],&#10;                    [&#10;                        { text: '对拍', textStyle: { bold: true, color: '#0E3F8C' }, cellStyle: { background: { color: '#F7F9FC' } } },&#10;                        { text: '5/5 一致', textStyle: { bold: true, color: '#1E4FA8' }, cellStyle: { background: { color: '#F7F9FC' } } },&#10;                        { text: '双引擎评分共用同一份标准样本逐维度比对', cellStyle: { background: { color: '#F7F9FC' } } },&#10;                    ],&#10;                    [&#10;                        { text: '规范', textStyle: { bold: true, color: '#0E3F8C' } },&#10;                        { text: 'lint + 类型', textStyle: { bold: true, color: '#1E4FA8' } },&#10;                        { text: 'ESLint 0 error · Prettier 全绿 · JSDoc' },&#10;                    ],&#10;                ]}&#10;            /&gt;&#10;        &lt;/Box&gt;&#10;        {/* 发布链节点串 */}&#10;        &lt;Text style={{ fontSize: 16, fontWeight: 'bold', color: '#0E3F8C', letterSpacing: 1, marginTop: 20 }}&gt;&#10;            四渠道发布流水线&#10;        &lt;/Text&gt;&#10;        &lt;Box style={{ flexDirection: 'row', alignItems: 'center', gap: 10, marginTop: 12 }}&gt;&#10;            &lt;Box style={{ flex: 1, background: '#E8EFF8', border: '1px solid #C9D8F0', padding: '12px 8px', alignItems: 'center' }}&gt;&#10;                &lt;Text style={{ fontSize: 15, fontWeight: 'bold', color: '#0E3F8C' }}&gt;repo (main)&lt;/Text&gt;&#10;                &lt;Text style={{ fontSize: 12, color: '#4A5568', marginTop: 3 }}&gt;代码与文档单一事实源&lt;/Text&gt;&#10;            &lt;/Box&gt;&#10;            &lt;FAIcon name='arrow-right' style={{ fill: '#1E4FA8', width: 20, height: 20 }} /&gt;&#10;            &lt;Box style={{ flex: 1, background: '#E8EFF8', border: '1px solid #C9D8F0', padding: '12px 8px', alignItems: 'center' }}&gt;&#10;                &lt;Text style={{ fontSize: 15, fontWeight: 'bold', color: '#0E3F8C' }}&gt;GitHub Pages&lt;/Text&gt;&#10;                &lt;Text style={{ fontSize: 12, color: '#4A5568', marginTop: 3 }}&gt;海外演示入口&lt;/Text&gt;&#10;            &lt;/Box&gt;&#10;            &lt;FAIcon name='arrow-right' style={{ fill: '#1E4FA8', width: 20, height: 20 }} /&gt;&#10;            &lt;Box style={{ flex: 1, background: '#E8EFF8', border: '1px solid #C9D8F0', padding: '12px 8px', alignItems: 'center' }}&gt;&#10;                &lt;Text style={{ fontSize: 15, fontWeight: 'bold', color: '#0E3F8C' }}&gt;国内镜像&lt;/Text&gt;&#10;                &lt;Text style={{ fontSize: 12, color: '#4A5568', marginTop: 3 }}&gt;同源后端 · 赛场直连&lt;/Text&gt;&#10;            &lt;/Box&gt;&#10;            &lt;FAIcon name='arrow-right' style={{ fill: '#1E4FA8', width: 20, height: 20 }} /&gt;&#10;            &lt;Box style={{ flex: 1, background: '#E8EFF8', border: '1px solid #C9D8F0', padding: '12px 8px', alignItems: 'center' }}&gt;&#10;                &lt;Text style={{ fontSize: 15, fontWeight: 'bold', color: '#0E3F8C' }}&gt;Release 附件&lt;/Text&gt;&#10;                &lt;Text style={{ fontSize: 12, color: '#4A5568', marginTop: 3 }}&gt;demo / 文档 / PDF / 日志&lt;/Text&gt;&#10;            &lt;/Box&gt;&#10;        &lt;/Box&gt;&#10;    &lt;/Box&gt;&#10;    {/* ===== 母版：页脚 ===== */}&#10;    &lt;Box style={{ position: 'absolute', bottom: 0, left: 0, width: '1280px', height: 64, borderTop: '1px solid #E5E7EB', flexDirection: 'row', alignItems: 'center', justifyContent: 'space-between', padding: '0 40px', boxSizing: 'border-box' }}&gt;&#10;        &lt;Text style={{ fontSize: 13, color: '#8B97A8' }}&gt;&#10;            面镜 FutureMirror · 竞赛演示&#10;        &lt;/Text&gt;&#10;        &lt;Text style={{ fontSize: 14, color: '#1E4FA8', fontWeight: 'bold' }}&gt;&#10;            14 / 16&#10;        &lt;/Text&gt;&#10;    &lt;/Box&gt;&#10;&lt;/Slide&gt;&#10;"/>
+        <p:cNvPr id="174" name="" descr="&lt;Slide style={{&#10;    width: '1280px',&#10;    height: '720px',&#10;    background: '#FFFFFF',&#10;    padding: 0,&#10;    position: 'relative',&#10;    overflow: 'hidden',&#10;    fontFamily: &quot;'Noto Sans SC','Source Han Sans SC','PingFang SC','Microsoft YaHei',sans-serif&quot;,&#10;}}&gt;&#10;    {/* ===== 母版：A3 深蓝顶条 ===== */}&#10;    &lt;Box style={{ position: 'absolute', top: 0, left: 0, width: '1280px', height: 84, background: '#0E3F8C' }}&gt;&#10;        &lt;svg style={{ position: 'absolute', right: 210, top: 18, opacity: 0.16 }} width={150} height={48} viewBox='0 0 150 48'&gt;&#10;            &lt;g stroke='#FFFFFF' strokeWidth='1.2' fill='none'&gt;&#10;                &lt;path d='M2 24 L28 24 L38 10 L74 10 L84 24 L120 24 L130 38 L148 38' /&gt;&#10;                &lt;path d='M38 10 L38 38 L74 38' /&gt;&#10;                &lt;circle cx='28' cy='24' r='3' fill='#FFFFFF' /&gt;&#10;                &lt;circle cx='84' cy='24' r='3' fill='#FFFFFF' /&gt;&#10;            &lt;/g&gt;&#10;        &lt;/svg&gt;&#10;        &lt;Box style={{ position: 'absolute', left: 40, top: 0, height: 84, justifyContent: 'center' }}&gt;&#10;            &lt;Text style={{ fontSize: 26, fontWeight: 'bold', color: '#FFFFFF' }}&gt;&#10;                工程质量：全量回归 + 四渠道发布流水线&#10;            &lt;/Text&gt;&#10;        &lt;/Box&gt;&#10;        &lt;Box style={{ position: 'absolute', right: 40, top: 24, background: '#1E4FA8', padding: '7px 16px', borderRadius: 14 }}&gt;&#10;            &lt;Text style={{ fontSize: 14, color: '#FFFFFF', letterSpacing: 1 }}&gt;&#10;                03 真实完成度&#10;            &lt;/Text&gt;&#10;        &lt;/Box&gt;&#10;    &lt;/Box&gt;&#10;    {/* ===== 左侧标题栏 ===== */}&#10;    &lt;Box style={{ position: 'absolute', top: 84, left: 0, width: 356, height: 572, background: '#0E3F8C', padding: '30px 32px 26px 40px', boxSizing: 'border-box', flexDirection: 'column' }}&gt;&#10;        &lt;Text style={{ fontSize: 14, color: '#9FB9E4', letterSpacing: 4 }}&gt;&#10;            测试与发布&#10;        &lt;/Text&gt;&#10;        &lt;Text style={{ fontSize: 30, fontWeight: 'bold', color: '#FFFFFF', marginTop: 14, lineHeight: 1.35 }}&gt;&#10;            全量回归纪律&#10;        &lt;/Text&gt;&#10;        &lt;Box style={{ width: 48, height: 4, background: '#FFC107', marginTop: 18 }} /&gt;&#10;        &lt;Text style={{ fontSize: 15, color: '#D7E3F5', lineHeight: 1.85, marginTop: 18 }}&gt;&#10;            每次改动必须全绿才提交——测试不是演示后的补丁，而是改动发生时的第一道闸门。能复现的工程纪律，是「团队可完整解释全部代码」的底座。&#10;        &lt;/Text&gt;&#10;        &lt;Box style={{ flex: 1 }} /&gt;&#10;        &lt;Box style={{ background: '#1E4FA8', padding: '14px 16px' }}&gt;&#10;            &lt;Text style={{ fontSize: 15, fontWeight: 'bold', color: '#FFFFFF' }}&gt;&#10;                发布链&#10;            &lt;/Text&gt;&#10;            &lt;Text style={{ fontSize: 14, color: '#D7E3F5', marginTop: 6, lineHeight: 1.6 }}&gt;&#10;                repo → Pages → 镜像 → Release&lt;br /&gt;每次变更后逐一核验&#10;            &lt;/Text&gt;&#10;        &lt;/Box&gt;&#10;    &lt;/Box&gt;&#10;    {/* ===== 右侧测试矩阵 + 发布链 ===== */}&#10;    &lt;Box style={{ position: 'absolute', top: 84, left: 356, width: 924, height: 572, padding: '24px 36px', boxSizing: 'border-box' }}&gt;&#10;        &lt;Text style={{ fontSize: 16, fontWeight: 'bold', color: '#0E3F8C', letterSpacing: 1 }}&gt;&#10;            测试矩阵（全部可当场重跑）&#10;        &lt;/Text&gt;&#10;        &lt;Box style={{ marginTop: 12, height: 252 }}&gt;&#10;            &lt;Table&#10;                style={{ width: '100%', height: 252 }}&#10;                defaultTextStyle={{ fontSize: 13.5, textAlign: 'center', color: '#1A2230' }}&#10;                defaultCellStyle={{&#10;                    border: {&#10;                        left: { width: 1, color: '#D6DCE5' },&#10;                        right: { width: 1, color: '#D6DCE5' },&#10;                        top: { width: 1, color: '#D6DCE5' },&#10;                        bottom: { width: 1, color: '#D6DCE5' },&#10;                    },&#10;                }}&#10;                cells={[&#10;                    [&#10;                        { text: '层', textStyle: { bold: true, color: '#FFFFFF' }, cellStyle: { background: { color: '#0E3F8C' } } },&#10;                        { text: '规模', textStyle: { bold: true, color: '#FFFFFF' }, cellStyle: { background: { color: '#0E3F8C' } } },&#10;                        { text: '覆盖内容', textStyle: { bold: true, color: '#FFFFFF' }, cellStyle: { background: { color: '#0E3F8C' } } },&#10;                    ],&#10;                    [&#10;                        { text: '前端', textStyle: { bold: true, color: '#0E3F8C' } },&#10;                        { text: '22 套 · 1513 断言', textStyle: { bold: true, color: '#1E4FA8' } },&#10;                        { text: 'jsdom 端到端（含 RAG 重排专项 9 条）' },&#10;                    ],&#10;                    [&#10;                        { text: '后端', textStyle: { bold: true, color: '#0E3F8C' }, cellStyle: { background: { color: '#F7F9FC' } } },&#10;                        { text: '37 项 pytest', textStyle: { bold: true, color: '#1E4FA8' }, cellStyle: { background: { color: '#F7F9FC' } } },&#10;                        { text: '含评分校准不变量 11 条（单调性 / 维度分离 / 确定性）', cellStyle: { background: { color: '#F7F9FC' } } },&#10;                    ],&#10;                    [&#10;                        { text: '单元', textStyle: { bold: true, color: '#0E3F8C' } },&#10;                        { text: '217 项 Node', textStyle: { bold: true, color: '#1E4FA8' } },&#10;                        { text: 'store / 用户系统 / 简历 / 报告逻辑' },&#10;                    ],&#10;                    [&#10;                        { text: '对拍', textStyle: { bold: true, color: '#0E3F8C' }, cellStyle: { background: { color: '#F7F9FC' } } },&#10;                        { text: '5/5 一致', textStyle: { bold: true, color: '#1E4FA8' }, cellStyle: { background: { color: '#F7F9FC' } } },&#10;                        { text: '双引擎评分共用同一份标准样本逐维度比对', cellStyle: { background: { color: '#F7F9FC' } } },&#10;                    ],&#10;                    [&#10;                        { text: '规范', textStyle: { bold: true, color: '#0E3F8C' } },&#10;                        { text: 'lint + 类型', textStyle: { bold: true, color: '#1E4FA8' } },&#10;                        { text: 'ESLint 0 error · Prettier 全绿 · JSDoc' },&#10;                    ],&#10;                ]}&#10;            /&gt;&#10;        &lt;/Box&gt;&#10;        {/* 发布链节点串 */}&#10;        &lt;Text style={{ fontSize: 16, fontWeight: 'bold', color: '#0E3F8C', letterSpacing: 1, marginTop: 20 }}&gt;&#10;            四渠道发布流水线&#10;        &lt;/Text&gt;&#10;        &lt;Box style={{ flexDirection: 'row', alignItems: 'center', gap: 10, marginTop: 12 }}&gt;&#10;            &lt;Box style={{ flex: 1, background: '#E8EFF8', border: '1px solid #C9D8F0', padding: '12px 8px', alignItems: 'center' }}&gt;&#10;                &lt;Text style={{ fontSize: 15, fontWeight: 'bold', color: '#0E3F8C' }}&gt;repo (main)&lt;/Text&gt;&#10;                &lt;Text style={{ fontSize: 12, color: '#4A5568', marginTop: 3 }}&gt;代码与文档单一事实源&lt;/Text&gt;&#10;            &lt;/Box&gt;&#10;            &lt;FAIcon name='arrow-right' style={{ fill: '#1E4FA8', width: 20, height: 20 }} /&gt;&#10;            &lt;Box style={{ flex: 1, background: '#E8EFF8', border: '1px solid #C9D8F0', padding: '12px 8px', alignItems: 'center' }}&gt;&#10;                &lt;Text style={{ fontSize: 15, fontWeight: 'bold', color: '#0E3F8C' }}&gt;GitHub Pages&lt;/Text&gt;&#10;                &lt;Text style={{ fontSize: 12, color: '#4A5568', marginTop: 3 }}&gt;海外演示入口&lt;/Text&gt;&#10;            &lt;/Box&gt;&#10;            &lt;FAIcon name='arrow-right' style={{ fill: '#1E4FA8', width: 20, height: 20 }} /&gt;&#10;            &lt;Box style={{ flex: 1, background: '#E8EFF8', border: '1px solid #C9D8F0', padding: '12px 8px', alignItems: 'center' }}&gt;&#10;                &lt;Text style={{ fontSize: 15, fontWeight: 'bold', color: '#0E3F8C' }}&gt;国内镜像&lt;/Text&gt;&#10;                &lt;Text style={{ fontSize: 12, color: '#4A5568', marginTop: 3 }}&gt;同源后端 · 赛场直连&lt;/Text&gt;&#10;            &lt;/Box&gt;&#10;            &lt;FAIcon name='arrow-right' style={{ fill: '#1E4FA8', width: 20, height: 20 }} /&gt;&#10;            &lt;Box style={{ flex: 1, background: '#E8EFF8', border: '1px solid #C9D8F0', padding: '12px 8px', alignItems: 'center' }}&gt;&#10;                &lt;Text style={{ fontSize: 15, fontWeight: 'bold', color: '#0E3F8C' }}&gt;Release 附件&lt;/Text&gt;&#10;                &lt;Text style={{ fontSize: 12, color: '#4A5568', marginTop: 3 }}&gt;demo / 文档 / PDF / 日志&lt;/Text&gt;&#10;            &lt;/Box&gt;&#10;        &lt;/Box&gt;&#10;    &lt;/Box&gt;&#10;    {/* ===== 母版：页脚 ===== */}&#10;    &lt;Box style={{ position: 'absolute', bottom: 0, left: 0, width: '1280px', height: 64, borderTop: '1px solid #E5E7EB', flexDirection: 'row', alignItems: 'center', justifyContent: 'space-between', padding: '0 40px', boxSizing: 'border-box' }}&gt;&#10;        &lt;Text style={{ fontSize: 13, color: '#8B97A8' }}&gt;&#10;            面镜 FutureMirror · 功能演示&#10;        &lt;/Text&gt;&#10;        &lt;Text style={{ fontSize: 14, color: '#1E4FA8', fontWeight: 'bold' }}&gt;&#10;            14 / 16&#10;        &lt;/Text&gt;&#10;    &lt;/Box&gt;&#10;&lt;/Slide&gt;&#10;"/>
         <p:cNvGrpSpPr/>
         <p:nvPr/>
       </p:nvGrpSpPr>
@@ -11719,7 +11719,7 @@
                 <a:latin typeface="Noto Sans SC"/>
                 <a:ea typeface="Noto Sans SC"/>
               </a:rPr>
-              <a:t>竞赛演示</a:t>
+              <a:t>功能演示</a:t>
             </a:r>
             <a:endParaRPr/>
           </a:p>
@@ -14810,7 +14810,7 @@
                 <a:latin typeface="Noto Sans SC"/>
                 <a:ea typeface="Noto Sans SC"/>
               </a:rPr>
-              <a:t>竞赛演示</a:t>
+              <a:t>功能演示</a:t>
             </a:r>
             <a:endParaRPr/>
           </a:p>
@@ -19129,7 +19129,7 @@
                 <a:latin typeface="Noto Sans SC"/>
                 <a:ea typeface="Noto Sans SC"/>
               </a:rPr>
-              <a:t>竞赛演示</a:t>
+              <a:t>功能演示</a:t>
             </a:r>
             <a:endParaRPr/>
           </a:p>
@@ -19180,7 +19180,7 @@
   <p:cSld>
     <p:spTree>
       <p:nvGrpSpPr>
-        <p:cNvPr id="407" name="" descr="&lt;Slide style={{&#10;    width: '1280px',&#10;    height: '720px',&#10;    background: '#FFFFFF',&#10;    padding: 0,&#10;    position: 'relative',&#10;    overflow: 'hidden',&#10;    fontFamily: &quot;'Noto Sans SC','Source Han Sans SC','PingFang SC','Microsoft YaHei',sans-serif&quot;,&#10;}}&gt;&#10;    {/* ===== 母版：A3 深蓝顶条 ===== */}&#10;    &lt;Box style={{ position: 'absolute', top: 0, left: 0, width: '1280px', height: 84, background: '#0E3F8C' }}&gt;&#10;        &lt;svg style={{ position: 'absolute', right: 210, top: 18, opacity: 0.16 }} width={150} height={48} viewBox='0 0 150 48'&gt;&#10;            &lt;g stroke='#FFFFFF' strokeWidth='1.2' fill='none'&gt;&#10;                &lt;path d='M2 24 L28 24 L38 10 L74 10 L84 24 L120 24 L130 38 L148 38' /&gt;&#10;                &lt;path d='M38 10 L38 38 L74 38' /&gt;&#10;                &lt;circle cx='28' cy='24' r='3' fill='#FFFFFF' /&gt;&#10;                &lt;circle cx='84' cy='24' r='3' fill='#FFFFFF' /&gt;&#10;            &lt;/g&gt;&#10;        &lt;/svg&gt;&#10;        &lt;Box style={{ position: 'absolute', left: 40, top: 0, height: 84, justifyContent: 'center' }}&gt;&#10;            &lt;Text style={{ fontSize: 26, fontWeight: 'bold', color: '#FFFFFF' }}&gt;&#10;                一套业务逻辑，三种部署形态&#10;            &lt;/Text&gt;&#10;        &lt;/Box&gt;&#10;        &lt;Box style={{ position: 'absolute', right: 40, top: 24, background: '#1E4FA8', padding: '7px 16px', borderRadius: 14 }}&gt;&#10;            &lt;Text style={{ fontSize: 14, color: '#FFFFFF', letterSpacing: 1 }}&gt;&#10;                01 问题与方案&#10;            &lt;/Text&gt;&#10;        &lt;/Box&gt;&#10;    &lt;/Box&gt;&#10;    {/* ===== 左侧标题栏 ===== */}&#10;    &lt;Box style={{ position: 'absolute', top: 84, left: 0, width: 356, height: 572, background: '#0E3F8C', padding: '30px 30px 26px 40px', boxSizing: 'border-box', flexDirection: 'column' }}&gt;&#10;        &lt;Text style={{ fontSize: 14, color: '#9FB9E4', letterSpacing: 4 }}&gt;&#10;            系统架构总览&#10;        &lt;/Text&gt;&#10;        &lt;Text style={{ fontSize: 27, fontWeight: 'bold', color: '#FFFFFF', marginTop: 14, lineHeight: 1.35 }}&gt;&#10;            一套业务逻辑&lt;br /&gt;三种部署形态&#10;        &lt;/Text&gt;&#10;        &lt;Box style={{ width: 48, height: 4, background: '#FFC107', marginTop: 18 }} /&gt;&#10;        &lt;Text style={{ fontSize: 15, color: '#D7E3F5', lineHeight: 1.85, marginTop: 18 }}&gt;&#10;            前端三种形态经适配层统一走「后端优先」策略：在线走服务端，离线自动回退本地引擎，业务逻辑零分叉。&#10;        &lt;/Text&gt;&#10;        &lt;Box style={{ flex: 1 }} /&gt;&#10;        &lt;Box style={{ background: '#1E4FA8', padding: '14px 16px' }}&gt;&#10;            &lt;Text style={{ fontSize: 15, fontWeight: 'bold', color: '#FFFFFF' }}&gt;&#10;                架构目标&#10;            &lt;/Text&gt;&#10;            &lt;Text style={{ fontSize: 14, color: '#D7E3F5', marginTop: 6, lineHeight: 1.6 }}&gt;&#10;                ① 密钥零前端接触&lt;br /&gt;② 赛场无网也能跑完&#10;            &lt;/Text&gt;&#10;        &lt;/Box&gt;&#10;    &lt;/Box&gt;&#10;    {/* ===== 右侧架构图 ===== */}&#10;    &lt;Box style={{ position: 'absolute', top: 84, left: 356, width: 924, height: 572, padding: '22px 36px', boxSizing: 'border-box' }}&gt;&#10;        &lt;svg width={852} height='520' viewBox='0 0 852 520' style={{ fontFamily: &quot;'Noto Sans SC','PingFang SC','Microsoft YaHei',sans-serif&quot; }}&gt;&#10;            {/* 第 1 层：前端三形态 */}&#10;            &lt;text x='0' y='26' fill='#0E3F8C' fontSize='16' fontWeight='bold'&gt;前端三形态&lt;/text&gt;&#10;            &lt;rect x='120' y='8' width='224' height='72' rx='4' fill='#FFFFFF' stroke='#1E4FA8' strokeWidth='1.5' /&gt;&#10;            &lt;text x='232' y='36' fill='#0E3F8C' fontSize='16' fontWeight='bold' textAnchor='middle'&gt;单文件演示版&lt;/text&gt;&#10;            &lt;text x='232' y='60' fill='#4A5568' fontSize='13' textAnchor='middle'&gt;零依赖 · 浏览器直接打开&lt;/text&gt;&#10;            &lt;rect x='360' y='8' width='224' height='72' rx='4' fill='#FFFFFF' stroke='#1E4FA8' strokeWidth='1.5' /&gt;&#10;            &lt;text x='472' y='36' fill='#0E3F8C' fontSize='16' fontWeight='bold' textAnchor='middle'&gt;模块版前端&lt;/text&gt;&#10;            &lt;text x='472' y='60' fill='#4A5568' fontSize='13' textAnchor='middle'&gt;ES Module · 工程化开发&lt;/text&gt;&#10;            &lt;rect x='600' y='8' width='224' height='72' rx='4' fill='#FFFFFF' stroke='#1E4FA8' strokeWidth='1.5' /&gt;&#10;            &lt;text x='712' y='36' fill='#0E3F8C' fontSize='16' fontWeight='bold' textAnchor='middle'&gt;同源托管版&lt;/text&gt;&#10;            &lt;text x='712' y='60' fill='#4A5568' fontSize='13' textAnchor='middle'&gt;演示页 + API 同域&lt;/text&gt;&#10;            {/* 连接箭头 1→2 */}&#10;            &lt;path d='M426 82 L426 104' stroke='#1E4FA8' strokeWidth='2' /&gt;&#10;            &lt;path d='M418 98 L426 110 L434 98 Z' fill='#1E4FA8' /&gt;&#10;            {/* 第 2 层：适配层 */}&#10;            &lt;text x='0' y='146' fill='#0E3F8C' fontSize='16' fontWeight='bold'&gt;适配层&lt;/text&gt;&#10;            &lt;rect x='120' y='124' width='704' height='48' rx='4' fill='#F0F5FC' stroke='#C9D8F0' strokeWidth='1.5' /&gt;&#10;            &lt;text x='472' y='153' fill='#0E3F8C' fontSize='15' fontWeight='bold' textAnchor='middle'&gt;后端优先适配：在线走服务端，失败自动回退本地引擎&lt;/text&gt;&#10;            {/* 连接箭头 2→3 */}&#10;            &lt;path d='M426 176 L426 198' stroke='#1E4FA8' strokeWidth='2' /&gt;&#10;            &lt;path d='M418 192 L426 204 L434 192 Z' fill='#1E4FA8' /&gt;&#10;            {/* 第 3 层：服务端 */}&#10;            &lt;text x='0' y='240' fill='#0E3F8C' fontSize='16' fontWeight='bold'&gt;服务端&lt;/text&gt;&#10;            &lt;rect x='120' y='218' width='704' height='120' rx='4' fill='#E8EFF8' stroke='#1E4FA8' strokeWidth='1.5' /&gt;&#10;            &lt;text x='136' y='244' fill='#0E3F8C' fontSize='15' fontWeight='bold'&gt;FastAPI&lt;/text&gt;&#10;            &lt;rect x='220' y='226' width='188' height='40' rx='3' fill='#FFFFFF' stroke='#C9D8F0' strokeWidth='1' /&gt;&#10;            &lt;text x='314' y='251' fill='#1A2230' fontSize='13' textAnchor='middle'&gt;JWT 鉴权（12h）&lt;/text&gt;&#10;            &lt;rect x='420' y='226' width='188' height='40' rx='3' fill='#FFFFFF' stroke='#C9D8F0' strokeWidth='1' /&gt;&#10;            &lt;text x='514' y='251' fill='#1A2230' fontSize='13' textAnchor='middle'&gt;scrypt 密码哈希&lt;/text&gt;&#10;            &lt;rect x='620' y='226' width='188' height='40' rx='3' fill='#FFFFFF' stroke='#C9D8F0' strokeWidth='1' /&gt;&#10;            &lt;text x='714' y='251' fill='#1A2230' fontSize='13' textAnchor='middle'&gt;SQLite 持久化&lt;/text&gt;&#10;            &lt;rect x='220' y='278' width='288' height='44' rx='3' fill='#FFFFFF' stroke='#C9D8F0' strokeWidth='1' /&gt;&#10;            &lt;text x='364' y='298' fill='#1A2230' fontSize='13' textAnchor='middle'&gt;GLM SSE 流式代理&lt;/text&gt;&#10;            &lt;text x='364' y='316' fill='#D9534F' fontSize='12' textAnchor='middle'&gt;Key 只在服务端环境变量&lt;/text&gt;&#10;            &lt;rect x='520' y='278' width='288' height='44' rx='3' fill='#FFFFFF' stroke='#C9D8F0' strokeWidth='1' /&gt;&#10;            &lt;text x='664' y='298' fill='#1A2230' fontSize='13' textAnchor='middle'&gt;评分引擎 Python 同构&lt;/text&gt;&#10;            &lt;text x='664' y='316' fill='#4A5568' fontSize='12' textAnchor='middle'&gt;与前端逐位一致（对拍 5/5）&lt;/text&gt;&#10;            {/* 连接箭头 3→4 */}&#10;            &lt;path d='M426 342 L426 364' stroke='#1E4FA8' strokeWidth='2' /&gt;&#10;            &lt;path d='M418 358 L426 370 L434 358 Z' fill='#1E4FA8' /&gt;&#10;            {/* 第 4 层：三级降级 */}&#10;            &lt;text x='0' y='406' fill='#0E3F8C' fontSize='16' fontWeight='bold'&gt;三级降级&lt;/text&gt;&#10;            &lt;rect x='120' y='384' width='204' height='60' rx='4' fill='#FFFFFF' stroke='#1E4FA8' strokeWidth='1.5' /&gt;&#10;            &lt;text x='222' y='409' fill='#0E3F8C' fontSize='14' fontWeight='bold' textAnchor='middle'&gt;① 后端真实模型&lt;/text&gt;&#10;            &lt;text x='222' y='430' fill='#4A5568' fontSize='12' textAnchor='middle'&gt;GLM-4-Flash 流式&lt;/text&gt;&#10;            &lt;path d='M328 414 L360 414' stroke='#1E4FA8' strokeWidth='2' /&gt;&#10;            &lt;path d='M352 407 L364 414 L352 421 Z' fill='#1E4FA8' /&gt;&#10;            &lt;rect x='368' y='384' width='204' height='60' rx='4' fill='#FFFFFF' stroke='#1E4FA8' strokeWidth='1.5' /&gt;&#10;            &lt;text x='470' y='409' fill='#0E3F8C' fontSize='14' fontWeight='bold' textAnchor='middle'&gt;② 浏览器直连 Key&lt;/text&gt;&#10;            &lt;text x='470' y='430' fill='#4A5568' fontSize='12' textAnchor='middle'&gt;sessionStorage 逃生通道&lt;/text&gt;&#10;            &lt;path d='M576 414 L608 414' stroke='#1E4FA8' strokeWidth='2' /&gt;&#10;            &lt;path d='M600 407 L612 414 L600 421 Z' fill='#1E4FA8' /&gt;&#10;            &lt;rect x='616' y='384' width='204' height='60' rx='4' fill='#FFFFFF' stroke='#1E4FA8' strokeWidth='1.5' /&gt;&#10;            &lt;text x='718' y='409' fill='#0E3F8C' fontSize='14' fontWeight='bold' textAnchor='middle'&gt;③ 本地 Mock&lt;/text&gt;&#10;            &lt;text x='718' y='430' fill='#4A5568' fontSize='12' textAnchor='middle'&gt;无网完整走完流程&lt;/text&gt;&#10;            {/* 降级注释 */}&#10;            &lt;rect x='120' y='458' width='704' height='44' rx='4' fill='#F7F9FC' stroke='#D6DCE5' strokeWidth='1' /&gt;&#10;            &lt;text x='472' y='485' fill='#4A5568' fontSize='13' textAnchor='middle'&gt;后端 5xx / 超时同样回退——赛场网络抖动不打断演示，评分与检索策略三级一致&lt;/text&gt;&#10;        &lt;/svg&gt;&#10;    &lt;/Box&gt;&#10;    {/* ===== 母版：页脚 ===== */}&#10;    &lt;Box style={{ position: 'absolute', bottom: 0, left: 0, width: '1280px', height: 64, borderTop: '1px solid #E5E7EB', flexDirection: 'row', alignItems: 'center', justifyContent: 'space-between', padding: '0 40px', boxSizing: 'border-box' }}&gt;&#10;        &lt;Text style={{ fontSize: 13, color: '#8B97A8' }}&gt;&#10;            面镜 FutureMirror · 竞赛演示&#10;        &lt;/Text&gt;&#10;        &lt;Text style={{ fontSize: 14, color: '#1E4FA8', fontWeight: 'bold' }}&gt;&#10;            05 / 16&#10;        &lt;/Text&gt;&#10;    &lt;/Box&gt;&#10;&lt;/Slide&gt;&#10;"/>
+        <p:cNvPr id="407" name="" descr="&lt;Slide style={{&#10;    width: '1280px',&#10;    height: '720px',&#10;    background: '#FFFFFF',&#10;    padding: 0,&#10;    position: 'relative',&#10;    overflow: 'hidden',&#10;    fontFamily: &quot;'Noto Sans SC','Source Han Sans SC','PingFang SC','Microsoft YaHei',sans-serif&quot;,&#10;}}&gt;&#10;    {/* ===== 母版：A3 深蓝顶条 ===== */}&#10;    &lt;Box style={{ position: 'absolute', top: 0, left: 0, width: '1280px', height: 84, background: '#0E3F8C' }}&gt;&#10;        &lt;svg style={{ position: 'absolute', right: 210, top: 18, opacity: 0.16 }} width={150} height={48} viewBox='0 0 150 48'&gt;&#10;            &lt;g stroke='#FFFFFF' strokeWidth='1.2' fill='none'&gt;&#10;                &lt;path d='M2 24 L28 24 L38 10 L74 10 L84 24 L120 24 L130 38 L148 38' /&gt;&#10;                &lt;path d='M38 10 L38 38 L74 38' /&gt;&#10;                &lt;circle cx='28' cy='24' r='3' fill='#FFFFFF' /&gt;&#10;                &lt;circle cx='84' cy='24' r='3' fill='#FFFFFF' /&gt;&#10;            &lt;/g&gt;&#10;        &lt;/svg&gt;&#10;        &lt;Box style={{ position: 'absolute', left: 40, top: 0, height: 84, justifyContent: 'center' }}&gt;&#10;            &lt;Text style={{ fontSize: 26, fontWeight: 'bold', color: '#FFFFFF' }}&gt;&#10;                一套业务逻辑，三种部署形态&#10;            &lt;/Text&gt;&#10;        &lt;/Box&gt;&#10;        &lt;Box style={{ position: 'absolute', right: 40, top: 24, background: '#1E4FA8', padding: '7px 16px', borderRadius: 14 }}&gt;&#10;            &lt;Text style={{ fontSize: 14, color: '#FFFFFF', letterSpacing: 1 }}&gt;&#10;                01 问题与方案&#10;            &lt;/Text&gt;&#10;        &lt;/Box&gt;&#10;    &lt;/Box&gt;&#10;    {/* ===== 左侧标题栏 ===== */}&#10;    &lt;Box style={{ position: 'absolute', top: 84, left: 0, width: 356, height: 572, background: '#0E3F8C', padding: '30px 30px 26px 40px', boxSizing: 'border-box', flexDirection: 'column' }}&gt;&#10;        &lt;Text style={{ fontSize: 14, color: '#9FB9E4', letterSpacing: 4 }}&gt;&#10;            系统架构总览&#10;        &lt;/Text&gt;&#10;        &lt;Text style={{ fontSize: 27, fontWeight: 'bold', color: '#FFFFFF', marginTop: 14, lineHeight: 1.35 }}&gt;&#10;            一套业务逻辑&lt;br /&gt;三种部署形态&#10;        &lt;/Text&gt;&#10;        &lt;Box style={{ width: 48, height: 4, background: '#FFC107', marginTop: 18 }} /&gt;&#10;        &lt;Text style={{ fontSize: 15, color: '#D7E3F5', lineHeight: 1.85, marginTop: 18 }}&gt;&#10;            前端三种形态经适配层统一走「后端优先」策略：在线走服务端，离线自动回退本地引擎，业务逻辑零分叉。&#10;        &lt;/Text&gt;&#10;        &lt;Box style={{ flex: 1 }} /&gt;&#10;        &lt;Box style={{ background: '#1E4FA8', padding: '14px 16px' }}&gt;&#10;            &lt;Text style={{ fontSize: 15, fontWeight: 'bold', color: '#FFFFFF' }}&gt;&#10;                架构目标&#10;            &lt;/Text&gt;&#10;            &lt;Text style={{ fontSize: 14, color: '#D7E3F5', marginTop: 6, lineHeight: 1.6 }}&gt;&#10;                ① 密钥零前端接触&lt;br /&gt;② 赛场无网也能跑完&#10;            &lt;/Text&gt;&#10;        &lt;/Box&gt;&#10;    &lt;/Box&gt;&#10;    {/* ===== 右侧架构图 ===== */}&#10;    &lt;Box style={{ position: 'absolute', top: 84, left: 356, width: 924, height: 572, padding: '22px 36px', boxSizing: 'border-box' }}&gt;&#10;        &lt;svg width={852} height='520' viewBox='0 0 852 520' style={{ fontFamily: &quot;'Noto Sans SC','PingFang SC','Microsoft YaHei',sans-serif&quot; }}&gt;&#10;            {/* 第 1 层：前端三形态 */}&#10;            &lt;text x='0' y='26' fill='#0E3F8C' fontSize='16' fontWeight='bold'&gt;前端三形态&lt;/text&gt;&#10;            &lt;rect x='120' y='8' width='224' height='72' rx='4' fill='#FFFFFF' stroke='#1E4FA8' strokeWidth='1.5' /&gt;&#10;            &lt;text x='232' y='36' fill='#0E3F8C' fontSize='16' fontWeight='bold' textAnchor='middle'&gt;单文件演示版&lt;/text&gt;&#10;            &lt;text x='232' y='60' fill='#4A5568' fontSize='13' textAnchor='middle'&gt;零依赖 · 浏览器直接打开&lt;/text&gt;&#10;            &lt;rect x='360' y='8' width='224' height='72' rx='4' fill='#FFFFFF' stroke='#1E4FA8' strokeWidth='1.5' /&gt;&#10;            &lt;text x='472' y='36' fill='#0E3F8C' fontSize='16' fontWeight='bold' textAnchor='middle'&gt;模块版前端&lt;/text&gt;&#10;            &lt;text x='472' y='60' fill='#4A5568' fontSize='13' textAnchor='middle'&gt;ES Module · 工程化开发&lt;/text&gt;&#10;            &lt;rect x='600' y='8' width='224' height='72' rx='4' fill='#FFFFFF' stroke='#1E4FA8' strokeWidth='1.5' /&gt;&#10;            &lt;text x='712' y='36' fill='#0E3F8C' fontSize='16' fontWeight='bold' textAnchor='middle'&gt;同源托管版&lt;/text&gt;&#10;            &lt;text x='712' y='60' fill='#4A5568' fontSize='13' textAnchor='middle'&gt;演示页 + API 同域&lt;/text&gt;&#10;            {/* 连接箭头 1→2 */}&#10;            &lt;path d='M426 82 L426 104' stroke='#1E4FA8' strokeWidth='2' /&gt;&#10;            &lt;path d='M418 98 L426 110 L434 98 Z' fill='#1E4FA8' /&gt;&#10;            {/* 第 2 层：适配层 */}&#10;            &lt;text x='0' y='146' fill='#0E3F8C' fontSize='16' fontWeight='bold'&gt;适配层&lt;/text&gt;&#10;            &lt;rect x='120' y='124' width='704' height='48' rx='4' fill='#F0F5FC' stroke='#C9D8F0' strokeWidth='1.5' /&gt;&#10;            &lt;text x='472' y='153' fill='#0E3F8C' fontSize='15' fontWeight='bold' textAnchor='middle'&gt;后端优先适配：在线走服务端，失败自动回退本地引擎&lt;/text&gt;&#10;            {/* 连接箭头 2→3 */}&#10;            &lt;path d='M426 176 L426 198' stroke='#1E4FA8' strokeWidth='2' /&gt;&#10;            &lt;path d='M418 192 L426 204 L434 192 Z' fill='#1E4FA8' /&gt;&#10;            {/* 第 3 层：服务端 */}&#10;            &lt;text x='0' y='240' fill='#0E3F8C' fontSize='16' fontWeight='bold'&gt;服务端&lt;/text&gt;&#10;            &lt;rect x='120' y='218' width='704' height='120' rx='4' fill='#E8EFF8' stroke='#1E4FA8' strokeWidth='1.5' /&gt;&#10;            &lt;text x='136' y='244' fill='#0E3F8C' fontSize='15' fontWeight='bold'&gt;FastAPI&lt;/text&gt;&#10;            &lt;rect x='220' y='226' width='188' height='40' rx='3' fill='#FFFFFF' stroke='#C9D8F0' strokeWidth='1' /&gt;&#10;            &lt;text x='314' y='251' fill='#1A2230' fontSize='13' textAnchor='middle'&gt;JWT 鉴权（12h）&lt;/text&gt;&#10;            &lt;rect x='420' y='226' width='188' height='40' rx='3' fill='#FFFFFF' stroke='#C9D8F0' strokeWidth='1' /&gt;&#10;            &lt;text x='514' y='251' fill='#1A2230' fontSize='13' textAnchor='middle'&gt;scrypt 密码哈希&lt;/text&gt;&#10;            &lt;rect x='620' y='226' width='188' height='40' rx='3' fill='#FFFFFF' stroke='#C9D8F0' strokeWidth='1' /&gt;&#10;            &lt;text x='714' y='251' fill='#1A2230' fontSize='13' textAnchor='middle'&gt;SQLite 持久化&lt;/text&gt;&#10;            &lt;rect x='220' y='278' width='288' height='44' rx='3' fill='#FFFFFF' stroke='#C9D8F0' strokeWidth='1' /&gt;&#10;            &lt;text x='364' y='298' fill='#1A2230' fontSize='13' textAnchor='middle'&gt;GLM SSE 流式代理&lt;/text&gt;&#10;            &lt;text x='364' y='316' fill='#D9534F' fontSize='12' textAnchor='middle'&gt;Key 只在服务端环境变量&lt;/text&gt;&#10;            &lt;rect x='520' y='278' width='288' height='44' rx='3' fill='#FFFFFF' stroke='#C9D8F0' strokeWidth='1' /&gt;&#10;            &lt;text x='664' y='298' fill='#1A2230' fontSize='13' textAnchor='middle'&gt;评分引擎 Python 同构&lt;/text&gt;&#10;            &lt;text x='664' y='316' fill='#4A5568' fontSize='12' textAnchor='middle'&gt;与前端逐位一致（对拍 5/5）&lt;/text&gt;&#10;            {/* 连接箭头 3→4 */}&#10;            &lt;path d='M426 342 L426 364' stroke='#1E4FA8' strokeWidth='2' /&gt;&#10;            &lt;path d='M418 358 L426 370 L434 358 Z' fill='#1E4FA8' /&gt;&#10;            {/* 第 4 层：三级降级 */}&#10;            &lt;text x='0' y='406' fill='#0E3F8C' fontSize='16' fontWeight='bold'&gt;三级降级&lt;/text&gt;&#10;            &lt;rect x='120' y='384' width='204' height='60' rx='4' fill='#FFFFFF' stroke='#1E4FA8' strokeWidth='1.5' /&gt;&#10;            &lt;text x='222' y='409' fill='#0E3F8C' fontSize='14' fontWeight='bold' textAnchor='middle'&gt;① 后端真实模型&lt;/text&gt;&#10;            &lt;text x='222' y='430' fill='#4A5568' fontSize='12' textAnchor='middle'&gt;GLM-4-Flash 流式&lt;/text&gt;&#10;            &lt;path d='M328 414 L360 414' stroke='#1E4FA8' strokeWidth='2' /&gt;&#10;            &lt;path d='M352 407 L364 414 L352 421 Z' fill='#1E4FA8' /&gt;&#10;            &lt;rect x='368' y='384' width='204' height='60' rx='4' fill='#FFFFFF' stroke='#1E4FA8' strokeWidth='1.5' /&gt;&#10;            &lt;text x='470' y='409' fill='#0E3F8C' fontSize='14' fontWeight='bold' textAnchor='middle'&gt;② 浏览器直连 Key&lt;/text&gt;&#10;            &lt;text x='470' y='430' fill='#4A5568' fontSize='12' textAnchor='middle'&gt;sessionStorage 逃生通道&lt;/text&gt;&#10;            &lt;path d='M576 414 L608 414' stroke='#1E4FA8' strokeWidth='2' /&gt;&#10;            &lt;path d='M600 407 L612 414 L600 421 Z' fill='#1E4FA8' /&gt;&#10;            &lt;rect x='616' y='384' width='204' height='60' rx='4' fill='#FFFFFF' stroke='#1E4FA8' strokeWidth='1.5' /&gt;&#10;            &lt;text x='718' y='409' fill='#0E3F8C' fontSize='14' fontWeight='bold' textAnchor='middle'&gt;③ 本地 Mock&lt;/text&gt;&#10;            &lt;text x='718' y='430' fill='#4A5568' fontSize='12' textAnchor='middle'&gt;无网完整走完流程&lt;/text&gt;&#10;            {/* 降级注释 */}&#10;            &lt;rect x='120' y='458' width='704' height='44' rx='4' fill='#F7F9FC' stroke='#D6DCE5' strokeWidth='1' /&gt;&#10;            &lt;text x='472' y='485' fill='#4A5568' fontSize='13' textAnchor='middle'&gt;后端 5xx / 超时同样回退——赛场网络抖动不打断演示，评分与检索策略三级一致&lt;/text&gt;&#10;        &lt;/svg&gt;&#10;    &lt;/Box&gt;&#10;    {/* ===== 母版：页脚 ===== */}&#10;    &lt;Box style={{ position: 'absolute', bottom: 0, left: 0, width: '1280px', height: 64, borderTop: '1px solid #E5E7EB', flexDirection: 'row', alignItems: 'center', justifyContent: 'space-between', padding: '0 40px', boxSizing: 'border-box' }}&gt;&#10;        &lt;Text style={{ fontSize: 13, color: '#8B97A8' }}&gt;&#10;            面镜 FutureMirror · 功能演示&#10;        &lt;/Text&gt;&#10;        &lt;Text style={{ fontSize: 14, color: '#1E4FA8', fontWeight: 'bold' }}&gt;&#10;            05 / 16&#10;        &lt;/Text&gt;&#10;    &lt;/Box&gt;&#10;&lt;/Slide&gt;&#10;"/>
         <p:cNvGrpSpPr/>
         <p:nvPr/>
       </p:nvGrpSpPr>
@@ -19803,7 +19803,7 @@
                 <a:latin typeface="Noto Sans SC"/>
                 <a:ea typeface="Noto Sans SC"/>
               </a:rPr>
-              <a:t>竞赛演示</a:t>
+              <a:t>功能演示</a:t>
             </a:r>
             <a:endParaRPr/>
           </a:p>
@@ -21263,7 +21263,7 @@
   <p:cSld>
     <p:spTree>
       <p:nvGrpSpPr>
-        <p:cNvPr id="465" name="" descr="&lt;Slide style={{&#10;    width: '1280px',&#10;    height: '720px',&#10;    background: '#FFFFFF',&#10;    padding: 0,&#10;    position: 'relative',&#10;    overflow: 'hidden',&#10;    fontFamily: &quot;'Noto Sans SC','Source Han Sans SC','PingFang SC','Microsoft YaHei',sans-serif&quot;,&#10;}}&gt;&#10;    {/* ===== 母版：A3 深蓝顶条 ===== */}&#10;    &lt;Box style={{ position: 'absolute', top: 0, left: 0, width: '1280px', height: 84, background: '#0E3F8C' }}&gt;&#10;        &lt;svg style={{ position: 'absolute', right: 210, top: 18, opacity: 0.16 }} width={150} height={48} viewBox='0 0 150 48'&gt;&#10;            &lt;g stroke='#FFFFFF' strokeWidth='1.2' fill='none'&gt;&#10;                &lt;path d='M2 24 L28 24 L38 10 L74 10 L84 24 L120 24 L130 38 L148 38' /&gt;&#10;                &lt;path d='M38 10 L38 38 L74 38' /&gt;&#10;                &lt;circle cx='28' cy='24' r='3' fill='#FFFFFF' /&gt;&#10;                &lt;circle cx='84' cy='24' r='3' fill='#FFFFFF' /&gt;&#10;            &lt;/g&gt;&#10;        &lt;/svg&gt;&#10;        &lt;Box style={{ position: 'absolute', left: 40, top: 0, height: 84, justifyContent: 'center' }}&gt;&#10;            &lt;Text style={{ fontSize: 26, fontWeight: 'bold', color: '#FFFFFF' }}&gt;&#10;                多 Agent 协作：两层调度，每次换人都有据可查&#10;            &lt;/Text&gt;&#10;        &lt;/Box&gt;&#10;        &lt;Box style={{ position: 'absolute', right: 40, top: 24, background: '#1E4FA8', padding: '7px 16px', borderRadius: 14 }}&gt;&#10;            &lt;Text style={{ fontSize: 14, color: '#FFFFFF', letterSpacing: 1 }}&gt;&#10;                02 原创性论证&#10;            &lt;/Text&gt;&#10;        &lt;/Box&gt;&#10;    &lt;/Box&gt;&#10;    {/* ===== 上部：两层调度流程图（L1 主视觉） ===== */}&#10;    &lt;Box style={{ position: 'absolute', top: 84, left: 0, width: '1280px', height: 316, padding: '20px 40px 0 40px', boxSizing: 'border-box' }}&gt;&#10;        &lt;svg width={1200} height='290' viewBox='0 0 1200 290' style={{ fontFamily: &quot;'Noto Sans SC','PingFang SC','Microsoft YaHei',sans-serif&quot; }}&gt;&#10;            {/* 阶段 1：候选人回答 */}&#10;            &lt;rect x='20' y='20' width='200' height='90' rx='4' fill='#FFFFFF' stroke='#1E4FA8' strokeWidth='1.5' /&gt;&#10;            &lt;text x='120' y='52' fill='#0E3F8C' fontSize='16' fontWeight='bold' textAnchor='middle'&gt;候选人回答&lt;/text&gt;&#10;            &lt;text x='120' y='78' fill='#4A5568' fontSize='12.5' textAnchor='middle'&gt;最近一轮回答内容&lt;/text&gt;&#10;            &lt;text x='120' y='96' fill='#8B97A8' fontSize='12' textAnchor='middle'&gt;+ 观察员标注&lt;/text&gt;&#10;            {/* 箭头 1→2 */}&#10;            &lt;path d='M224 65 L256 65' stroke='#1E4FA8' strokeWidth='2' /&gt;&#10;            &lt;path d='M248 58 L260 65 L248 72 Z' fill='#1E4FA8' /&gt;&#10;            {/* 阶段 2：模式层 */}&#10;            &lt;rect x='264' y='8' width='290' height='114' rx='4' fill='#E8EFF8' stroke='#1E4FA8' strokeWidth='1.5' /&gt;&#10;            &lt;text x='409' y='34' fill='#0E3F8C' fontSize='16' fontWeight='bold' textAnchor='middle'&gt;模式层 pickSpeaker&lt;/text&gt;&#10;            &lt;text x='409' y='58' fill='#1A2230' fontSize='12.5' textAnchor='middle'&gt;O(1) 查表定轮转骨架&lt;/text&gt;&#10;            &lt;text x='409' y='78' fill='#4A5568' fontSize='12' textAnchor='middle'&gt;comprehensive：[hr, tech, pressure]&lt;/text&gt;&#10;            &lt;text x='409' y='98' fill='#4A5568' fontSize='12' textAnchor='middle'&gt;tech 每 3 轮插 HR · pressure 每 4 轮插技术&lt;/text&gt;&#10;            {/* 箭头 2→3 */}&#10;            &lt;path d='M558 65 L590 65' stroke='#1E4FA8' strokeWidth='2' /&gt;&#10;            &lt;path d='M582 58 L594 65 L582 72 Z' fill='#1E4FA8' /&gt;&#10;            {/* 阶段 3：内容层 */}&#10;            &lt;rect x='598' y='8' width='290' height='114' rx='4' fill='#E8EFF8' stroke='#1E4FA8' strokeWidth='1.5' /&gt;&#10;            &lt;text x='743' y='34' fill='#0E3F8C' fontSize='16' fontWeight='bold' textAnchor='middle'&gt;内容层 planReason&lt;/text&gt;&#10;            &lt;text x='743' y='58' fill='#1A2230' fontSize='12.5' textAnchor='middle'&gt;按关键词 + 观察员标注派发&lt;/text&gt;&#10;            &lt;text x='743' y='78' fill='#4A5568' fontSize='12' textAnchor='middle'&gt;技术词命中 → 技术面试官深挖原理&lt;/text&gt;&#10;            &lt;text x='743' y='98' fill='#4A5568' fontSize='12' textAnchor='middle'&gt;结构完整缺量化 → 压力追问 · 否则 → HR&lt;/text&gt;&#10;            {/* 箭头 3→4 */}&#10;            &lt;path d='M892 65 L924 65' stroke='#1E4FA8' strokeWidth='2' /&gt;&#10;            &lt;path d='M916 58 L928 65 L916 72 Z' fill='#1E4FA8' /&gt;&#10;            {/* 阶段 4：实际发言者 */}&#10;            &lt;rect x='932' y='20' width='200' height='90' rx='4' fill='#FFFFFF' stroke='#1E4FA8' strokeWidth='1.5' /&gt;&#10;            &lt;text x='1032' y='52' fill='#0E3F8C' fontSize='16' fontWeight='bold' textAnchor='middle'&gt;实际发言者&lt;/text&gt;&#10;            &lt;text x='1032' y='78' fill='#4A5568' fontSize='12.5' textAnchor='middle'&gt;单一 Agent 发言&lt;/text&gt;&#10;            &lt;text x='1032' y='96' fill='#8B97A8' fontSize='12' textAnchor='middle'&gt;其余 Agent 静默观察&lt;/text&gt;&#10;            {/* 分流线：内容层 → 两个产出 */}&#10;            &lt;path d='M743 122 L743 150' stroke='#1E4FA8' strokeWidth='2' /&gt;&#10;            &lt;path d='M470 150 L1010 150' stroke='#1E4FA8' strokeWidth='2' /&gt;&#10;            &lt;path d='M470 150 L470 172' stroke='#1E4FA8' strokeWidth='2' /&gt;&#10;            &lt;path d='M1010 150 L1010 172' stroke='#1E4FA8' strokeWidth='2' /&gt;&#10;            &lt;path d='M462 164 L470 178 L478 164 Z' fill='#1E4FA8' /&gt;&#10;            &lt;path d='M1002 164 L1010 178 L1018 164 Z' fill='#1E4FA8' /&gt;&#10;            {/* 产出 1：决策留痕 */}&#10;            &lt;rect x='270' y='180' width='400' height='100' rx='4' fill='#FFFFFF' stroke='#1E4FA8' strokeWidth='1.5' /&gt;&#10;            &lt;text x='290' y='208' fill='#0E3F8C' fontSize='15' fontWeight='bold'&gt;产出 ① 决策留痕&lt;/text&gt;&#10;            &lt;text x='290' y='232' fill='#1A2230' fontSize='12.5'&gt;理由 + 置信度 min(95, 60 + turn×6)&lt;/text&gt;&#10;            &lt;text x='290' y='252' fill='#4A5568' fontSize='12' textAnchor='start'&gt;「技术关键词『Redis 缓存一致』+ 缺量化&lt;/text&gt;&#10;            &lt;text x='290' y='270' fill='#4A5568' fontSize='12'&gt;→ 技术面试官深挖原理（置信度 78%）」&lt;/text&gt;&#10;            {/* 产出 2：连环追问 */}&#10;            &lt;rect x='810' y='180' width='400' height='100' rx='4' fill='#FFFFFF' stroke='#1E4FA8' strokeWidth='1.5' /&gt;&#10;            &lt;text x='830' y='208' fill='#0E3F8C' fontSize='15' fontWeight='bold'&gt;产出 ② 连环追问状态机&lt;/text&gt;&#10;            &lt;text x='830' y='232' fill='#1A2230' fontSize='12.5'&gt;技术关键词 × 35% 概率触发&lt;/text&gt;&#10;            &lt;text x='830' y='252' fill='#4A5568' fontSize='12'&gt;锁定同一主题，连续深挖 2 轮，&lt;/text&gt;&#10;            &lt;text x='830' y='270' fill='#4A5568' fontSize='12'&gt;模拟真实技术面试官的追击&lt;/text&gt;&#10;        &lt;/svg&gt;&#10;    &lt;/Box&gt;&#10;    {/* ===== 下部：三张说明卡 ===== */}&#10;    &lt;Box style={{ position: 'absolute', top: 400, left: 0, width: '1280px', height: 256, padding: '0 40px', boxSizing: 'border-box', flexDirection: 'row', gap: 20 }}&gt;&#10;        &lt;Box style={{ flex: 1, background: '#F7F9FC', border: '1px solid #D6DCE5', borderTop: '3px solid #1E4FA8', padding: '16px 18px', boxSizing: 'border-box' }}&gt;&#10;            &lt;Text style={{ fontSize: 18, fontWeight: 'bold', color: '#0E3F8C' }}&gt;Agent 注册表：纯数据，双端共用&lt;/Text&gt;&#10;            &lt;Text style={{ fontSize: 14.5, color: '#4A5568', marginTop: 8, lineHeight: 1.65 }}&gt;&#10;                5 个 Agent 的人设与温度集中在 personas.ts 纯数据模块，无副作用，客户端与服务端安全共用——HR / 技术 / 压力面 / 观察员 / 教练，各自独立人设。&#10;            &lt;/Text&gt;&#10;        &lt;/Box&gt;&#10;        &lt;Box style={{ flex: 1, background: '#F7F9FC', border: '1px solid #D6DCE5', borderTop: '3px solid #1E4FA8', padding: '16px 18px', boxSizing: 'border-box' }}&gt;&#10;            &lt;Text style={{ fontSize: 18, fontWeight: 'bold', color: '#0E3F8C' }}&gt;可解释派发：不是黑箱换人&lt;/Text&gt;&#10;            &lt;Text style={{ fontSize: 14.5, color: '#4A5568', marginTop: 8, lineHeight: 1.65 }}&gt;&#10;                每次派发输出理由与置信度，写入面试间右侧时间线——Agent 的每一次「换人」都有据可查，这是决策过程的透明化，不是装饰。&#10;            &lt;/Text&gt;&#10;        &lt;/Box&gt;&#10;        &lt;Box style={{ flex: 1, background: '#F7F9FC', border: '1px solid #D6DCE5', borderTop: '3px solid #1E4FA8', padding: '16px 18px', boxSizing: 'border-box' }}&gt;&#10;            &lt;Text style={{ fontSize: 18, fontWeight: 'bold', color: '#0E3F8C' }}&gt;与固定轮转的本质差异&lt;/Text&gt;&#10;            &lt;Text style={{ fontSize: 14.5, color: '#4A5568', marginTop: 8, lineHeight: 1.65 }}&gt;&#10;                固定题库轮转是「套壳」的典型特征；两层调度 + 连环追问体现的是 Agent 根据上下文做连续决策的能力。&#10;            &lt;/Text&gt;&#10;        &lt;/Box&gt;&#10;    &lt;/Box&gt;&#10;    {/* ===== 母版：页脚 ===== */}&#10;    &lt;Box style={{ position: 'absolute', bottom: 0, left: 0, width: '1280px', height: 64, borderTop: '1px solid #E5E7EB', flexDirection: 'row', alignItems: 'center', justifyContent: 'space-between', padding: '0 40px', boxSizing: 'border-box' }}&gt;&#10;        &lt;Text style={{ fontSize: 13, color: '#8B97A8' }}&gt;&#10;            面镜 FutureMirror · 竞赛演示&#10;        &lt;/Text&gt;&#10;        &lt;Text style={{ fontSize: 14, color: '#1E4FA8', fontWeight: 'bold' }}&gt;&#10;            07 / 16&#10;        &lt;/Text&gt;&#10;    &lt;/Box&gt;&#10;&lt;/Slide&gt;&#10;"/>
+        <p:cNvPr id="465" name="" descr="&lt;Slide style={{&#10;    width: '1280px',&#10;    height: '720px',&#10;    background: '#FFFFFF',&#10;    padding: 0,&#10;    position: 'relative',&#10;    overflow: 'hidden',&#10;    fontFamily: &quot;'Noto Sans SC','Source Han Sans SC','PingFang SC','Microsoft YaHei',sans-serif&quot;,&#10;}}&gt;&#10;    {/* ===== 母版：A3 深蓝顶条 ===== */}&#10;    &lt;Box style={{ position: 'absolute', top: 0, left: 0, width: '1280px', height: 84, background: '#0E3F8C' }}&gt;&#10;        &lt;svg style={{ position: 'absolute', right: 210, top: 18, opacity: 0.16 }} width={150} height={48} viewBox='0 0 150 48'&gt;&#10;            &lt;g stroke='#FFFFFF' strokeWidth='1.2' fill='none'&gt;&#10;                &lt;path d='M2 24 L28 24 L38 10 L74 10 L84 24 L120 24 L130 38 L148 38' /&gt;&#10;                &lt;path d='M38 10 L38 38 L74 38' /&gt;&#10;                &lt;circle cx='28' cy='24' r='3' fill='#FFFFFF' /&gt;&#10;                &lt;circle cx='84' cy='24' r='3' fill='#FFFFFF' /&gt;&#10;            &lt;/g&gt;&#10;        &lt;/svg&gt;&#10;        &lt;Box style={{ position: 'absolute', left: 40, top: 0, height: 84, justifyContent: 'center' }}&gt;&#10;            &lt;Text style={{ fontSize: 26, fontWeight: 'bold', color: '#FFFFFF' }}&gt;&#10;                多 Agent 协作：两层调度，每次换人都有据可查&#10;            &lt;/Text&gt;&#10;        &lt;/Box&gt;&#10;        &lt;Box style={{ position: 'absolute', right: 40, top: 24, background: '#1E4FA8', padding: '7px 16px', borderRadius: 14 }}&gt;&#10;            &lt;Text style={{ fontSize: 14, color: '#FFFFFF', letterSpacing: 1 }}&gt;&#10;                02 原创性论证&#10;            &lt;/Text&gt;&#10;        &lt;/Box&gt;&#10;    &lt;/Box&gt;&#10;    {/* ===== 上部：两层调度流程图（L1 主视觉） ===== */}&#10;    &lt;Box style={{ position: 'absolute', top: 84, left: 0, width: '1280px', height: 316, padding: '20px 40px 0 40px', boxSizing: 'border-box' }}&gt;&#10;        &lt;svg width={1200} height='290' viewBox='0 0 1200 290' style={{ fontFamily: &quot;'Noto Sans SC','PingFang SC','Microsoft YaHei',sans-serif&quot; }}&gt;&#10;            {/* 阶段 1：候选人回答 */}&#10;            &lt;rect x='20' y='20' width='200' height='90' rx='4' fill='#FFFFFF' stroke='#1E4FA8' strokeWidth='1.5' /&gt;&#10;            &lt;text x='120' y='52' fill='#0E3F8C' fontSize='16' fontWeight='bold' textAnchor='middle'&gt;候选人回答&lt;/text&gt;&#10;            &lt;text x='120' y='78' fill='#4A5568' fontSize='12.5' textAnchor='middle'&gt;最近一轮回答内容&lt;/text&gt;&#10;            &lt;text x='120' y='96' fill='#8B97A8' fontSize='12' textAnchor='middle'&gt;+ 观察员标注&lt;/text&gt;&#10;            {/* 箭头 1→2 */}&#10;            &lt;path d='M224 65 L256 65' stroke='#1E4FA8' strokeWidth='2' /&gt;&#10;            &lt;path d='M248 58 L260 65 L248 72 Z' fill='#1E4FA8' /&gt;&#10;            {/* 阶段 2：模式层 */}&#10;            &lt;rect x='264' y='8' width='290' height='114' rx='4' fill='#E8EFF8' stroke='#1E4FA8' strokeWidth='1.5' /&gt;&#10;            &lt;text x='409' y='34' fill='#0E3F8C' fontSize='16' fontWeight='bold' textAnchor='middle'&gt;模式层 pickSpeaker&lt;/text&gt;&#10;            &lt;text x='409' y='58' fill='#1A2230' fontSize='12.5' textAnchor='middle'&gt;O(1) 查表定轮转骨架&lt;/text&gt;&#10;            &lt;text x='409' y='78' fill='#4A5568' fontSize='12' textAnchor='middle'&gt;comprehensive：[hr, tech, pressure]&lt;/text&gt;&#10;            &lt;text x='409' y='98' fill='#4A5568' fontSize='12' textAnchor='middle'&gt;tech 每 3 轮插 HR · pressure 每 4 轮插技术&lt;/text&gt;&#10;            {/* 箭头 2→3 */}&#10;            &lt;path d='M558 65 L590 65' stroke='#1E4FA8' strokeWidth='2' /&gt;&#10;            &lt;path d='M582 58 L594 65 L582 72 Z' fill='#1E4FA8' /&gt;&#10;            {/* 阶段 3：内容层 */}&#10;            &lt;rect x='598' y='8' width='290' height='114' rx='4' fill='#E8EFF8' stroke='#1E4FA8' strokeWidth='1.5' /&gt;&#10;            &lt;text x='743' y='34' fill='#0E3F8C' fontSize='16' fontWeight='bold' textAnchor='middle'&gt;内容层 planReason&lt;/text&gt;&#10;            &lt;text x='743' y='58' fill='#1A2230' fontSize='12.5' textAnchor='middle'&gt;按关键词 + 观察员标注派发&lt;/text&gt;&#10;            &lt;text x='743' y='78' fill='#4A5568' fontSize='12' textAnchor='middle'&gt;技术词命中 → 技术面试官深挖原理&lt;/text&gt;&#10;            &lt;text x='743' y='98' fill='#4A5568' fontSize='12' textAnchor='middle'&gt;结构完整缺量化 → 压力追问 · 否则 → HR&lt;/text&gt;&#10;            {/* 箭头 3→4 */}&#10;            &lt;path d='M892 65 L924 65' stroke='#1E4FA8' strokeWidth='2' /&gt;&#10;            &lt;path d='M916 58 L928 65 L916 72 Z' fill='#1E4FA8' /&gt;&#10;            {/* 阶段 4：实际发言者 */}&#10;            &lt;rect x='932' y='20' width='200' height='90' rx='4' fill='#FFFFFF' stroke='#1E4FA8' strokeWidth='1.5' /&gt;&#10;            &lt;text x='1032' y='52' fill='#0E3F8C' fontSize='16' fontWeight='bold' textAnchor='middle'&gt;实际发言者&lt;/text&gt;&#10;            &lt;text x='1032' y='78' fill='#4A5568' fontSize='12.5' textAnchor='middle'&gt;单一 Agent 发言&lt;/text&gt;&#10;            &lt;text x='1032' y='96' fill='#8B97A8' fontSize='12' textAnchor='middle'&gt;其余 Agent 静默观察&lt;/text&gt;&#10;            {/* 分流线：内容层 → 两个产出 */}&#10;            &lt;path d='M743 122 L743 150' stroke='#1E4FA8' strokeWidth='2' /&gt;&#10;            &lt;path d='M470 150 L1010 150' stroke='#1E4FA8' strokeWidth='2' /&gt;&#10;            &lt;path d='M470 150 L470 172' stroke='#1E4FA8' strokeWidth='2' /&gt;&#10;            &lt;path d='M1010 150 L1010 172' stroke='#1E4FA8' strokeWidth='2' /&gt;&#10;            &lt;path d='M462 164 L470 178 L478 164 Z' fill='#1E4FA8' /&gt;&#10;            &lt;path d='M1002 164 L1010 178 L1018 164 Z' fill='#1E4FA8' /&gt;&#10;            {/* 产出 1：决策留痕 */}&#10;            &lt;rect x='270' y='180' width='400' height='100' rx='4' fill='#FFFFFF' stroke='#1E4FA8' strokeWidth='1.5' /&gt;&#10;            &lt;text x='290' y='208' fill='#0E3F8C' fontSize='15' fontWeight='bold'&gt;产出 ① 决策留痕&lt;/text&gt;&#10;            &lt;text x='290' y='232' fill='#1A2230' fontSize='12.5'&gt;理由 + 置信度 min(95, 60 + turn×6)&lt;/text&gt;&#10;            &lt;text x='290' y='252' fill='#4A5568' fontSize='12' textAnchor='start'&gt;「技术关键词『Redis 缓存一致』+ 缺量化&lt;/text&gt;&#10;            &lt;text x='290' y='270' fill='#4A5568' fontSize='12'&gt;→ 技术面试官深挖原理（置信度 78%）」&lt;/text&gt;&#10;            {/* 产出 2：连环追问 */}&#10;            &lt;rect x='810' y='180' width='400' height='100' rx='4' fill='#FFFFFF' stroke='#1E4FA8' strokeWidth='1.5' /&gt;&#10;            &lt;text x='830' y='208' fill='#0E3F8C' fontSize='15' fontWeight='bold'&gt;产出 ② 连环追问状态机&lt;/text&gt;&#10;            &lt;text x='830' y='232' fill='#1A2230' fontSize='12.5'&gt;技术关键词 × 35% 概率触发&lt;/text&gt;&#10;            &lt;text x='830' y='252' fill='#4A5568' fontSize='12'&gt;锁定同一主题，连续深挖 2 轮，&lt;/text&gt;&#10;            &lt;text x='830' y='270' fill='#4A5568' fontSize='12'&gt;模拟真实技术面试官的追击&lt;/text&gt;&#10;        &lt;/svg&gt;&#10;    &lt;/Box&gt;&#10;    {/* ===== 下部：三张说明卡 ===== */}&#10;    &lt;Box style={{ position: 'absolute', top: 400, left: 0, width: '1280px', height: 256, padding: '0 40px', boxSizing: 'border-box', flexDirection: 'row', gap: 20 }}&gt;&#10;        &lt;Box style={{ flex: 1, background: '#F7F9FC', border: '1px solid #D6DCE5', borderTop: '3px solid #1E4FA8', padding: '16px 18px', boxSizing: 'border-box' }}&gt;&#10;            &lt;Text style={{ fontSize: 18, fontWeight: 'bold', color: '#0E3F8C' }}&gt;Agent 注册表：纯数据，双端共用&lt;/Text&gt;&#10;            &lt;Text style={{ fontSize: 14.5, color: '#4A5568', marginTop: 8, lineHeight: 1.65 }}&gt;&#10;                5 个 Agent 的人设与温度集中在 personas.ts 纯数据模块，无副作用，客户端与服务端安全共用——HR / 技术 / 压力面 / 观察员 / 教练，各自独立人设。&#10;            &lt;/Text&gt;&#10;        &lt;/Box&gt;&#10;        &lt;Box style={{ flex: 1, background: '#F7F9FC', border: '1px solid #D6DCE5', borderTop: '3px solid #1E4FA8', padding: '16px 18px', boxSizing: 'border-box' }}&gt;&#10;            &lt;Text style={{ fontSize: 18, fontWeight: 'bold', color: '#0E3F8C' }}&gt;可解释派发：不是黑箱换人&lt;/Text&gt;&#10;            &lt;Text style={{ fontSize: 14.5, color: '#4A5568', marginTop: 8, lineHeight: 1.65 }}&gt;&#10;                每次派发输出理由与置信度，写入面试间右侧时间线——Agent 的每一次「换人」都有据可查，这是决策过程的透明化，不是装饰。&#10;            &lt;/Text&gt;&#10;        &lt;/Box&gt;&#10;        &lt;Box style={{ flex: 1, background: '#F7F9FC', border: '1px solid #D6DCE5', borderTop: '3px solid #1E4FA8', padding: '16px 18px', boxSizing: 'border-box' }}&gt;&#10;            &lt;Text style={{ fontSize: 18, fontWeight: 'bold', color: '#0E3F8C' }}&gt;与固定轮转的本质差异&lt;/Text&gt;&#10;            &lt;Text style={{ fontSize: 14.5, color: '#4A5568', marginTop: 8, lineHeight: 1.65 }}&gt;&#10;                固定题库轮转是「套壳」的典型特征；两层调度 + 连环追问体现的是 Agent 根据上下文做连续决策的能力。&#10;            &lt;/Text&gt;&#10;        &lt;/Box&gt;&#10;    &lt;/Box&gt;&#10;    {/* ===== 母版：页脚 ===== */}&#10;    &lt;Box style={{ position: 'absolute', bottom: 0, left: 0, width: '1280px', height: 64, borderTop: '1px solid #E5E7EB', flexDirection: 'row', alignItems: 'center', justifyContent: 'space-between', padding: '0 40px', boxSizing: 'border-box' }}&gt;&#10;        &lt;Text style={{ fontSize: 13, color: '#8B97A8' }}&gt;&#10;            面镜 FutureMirror · 功能演示&#10;        &lt;/Text&gt;&#10;        &lt;Text style={{ fontSize: 14, color: '#1E4FA8', fontWeight: 'bold' }}&gt;&#10;            07 / 16&#10;        &lt;/Text&gt;&#10;    &lt;/Box&gt;&#10;&lt;/Slide&gt;&#10;"/>
         <p:cNvGrpSpPr/>
         <p:nvPr/>
       </p:nvGrpSpPr>
@@ -22209,7 +22209,7 @@
                 <a:latin typeface="Noto Sans SC"/>
                 <a:ea typeface="Noto Sans SC"/>
               </a:rPr>
-              <a:t>竞赛演示</a:t>
+              <a:t>功能演示</a:t>
             </a:r>
             <a:endParaRPr/>
           </a:p>
@@ -22260,7 +22260,7 @@
   <p:cSld>
     <p:spTree>
       <p:nvGrpSpPr>
-        <p:cNvPr id="488" name="" descr="&lt;Slide style={{&#10;    width: '1280px',&#10;    height: '720px',&#10;    background: '#FFFFFF',&#10;    padding: 0,&#10;    position: 'relative',&#10;    overflow: 'hidden',&#10;    fontFamily: &quot;'Noto Sans SC','Source Han Sans SC','PingFang SC','Microsoft YaHei',sans-serif&quot;,&#10;}}&gt;&#10;    {/* ===== 母版：A3 深蓝顶条 ===== */}&#10;    &lt;Box style={{ position: 'absolute', top: 0, left: 0, width: '1280px', height: 84, background: '#0E3F8C' }}&gt;&#10;        &lt;svg style={{ position: 'absolute', right: 210, top: 18, opacity: 0.16 }} width={150} height={48} viewBox='0 0 150 48'&gt;&#10;            &lt;g stroke='#FFFFFF' strokeWidth='1.2' fill='none'&gt;&#10;                &lt;path d='M2 24 L28 24 L38 10 L74 10 L84 24 L120 24 L130 38 L148 38' /&gt;&#10;                &lt;path d='M38 10 L38 38 L74 38' /&gt;&#10;                &lt;circle cx='28' cy='24' r='3' fill='#FFFFFF' /&gt;&#10;                &lt;circle cx='84' cy='24' r='3' fill='#FFFFFF' /&gt;&#10;            &lt;/g&gt;&#10;        &lt;/svg&gt;&#10;        &lt;Box style={{ position: 'absolute', left: 40, top: 0, height: 84, justifyContent: 'center' }}&gt;&#10;            &lt;Text style={{ fontSize: 26, fontWeight: 'bold', color: '#FFFFFF' }}&gt;&#10;                RAG：六阶段管线，每一阶段解决一个具体工程问题&#10;            &lt;/Text&gt;&#10;        &lt;/Box&gt;&#10;        &lt;Box style={{ position: 'absolute', right: 40, top: 24, background: '#1E4FA8', padding: '7px 16px', borderRadius: 14 }}&gt;&#10;            &lt;Text style={{ fontSize: 14, color: '#FFFFFF', letterSpacing: 1 }}&gt;&#10;                02 原创性论证&#10;            &lt;/Text&gt;&#10;        &lt;/Box&gt;&#10;    &lt;/Box&gt;&#10;    {/* ===== 左侧标题栏 ===== */}&#10;    &lt;Box style={{ position: 'absolute', top: 84, left: 0, width: 356, height: 572, background: '#0E3F8C', padding: '30px 32px 26px 40px', boxSizing: 'border-box', flexDirection: 'column' }}&gt;&#10;        &lt;Text style={{ fontSize: 14, color: '#9FB9E4', letterSpacing: 4 }}&gt;&#10;            RAG 检索策略&#10;        &lt;/Text&gt;&#10;        &lt;Text style={{ fontSize: 30, fontWeight: 'bold', color: '#FFFFFF', marginTop: 14, lineHeight: 1.35 }}&gt;&#10;            六阶段管线&#10;        &lt;/Text&gt;&#10;        &lt;Box style={{ width: 48, height: 4, background: '#FFC107', marginTop: 18 }} /&gt;&#10;        &lt;Text style={{ fontSize: 15, color: '#D7E3F5', lineHeight: 1.85, marginTop: 18 }}&gt;&#10;            选型全部由工程问题倒逼，不是教程默认值：中文无空格 → bigram；国内网络 → 四级权重源；结果不可解释 → 三阶段得分逐条展示。&#10;        &lt;/Text&gt;&#10;        &lt;Box style={{ flex: 1 }} /&gt;&#10;        &lt;Box style={{ background: '#1E4FA8', padding: '14px 16px' }}&gt;&#10;            &lt;Text style={{ fontSize: 15, fontWeight: 'bold', color: '#FFFFFF' }}&gt;&#10;                运行形态&#10;            &lt;/Text&gt;&#10;            &lt;Text style={{ fontSize: 14, color: '#D7E3F5', marginTop: 6, lineHeight: 1.6 }}&gt;&#10;                40 条合成面经&lt;br /&gt;全部浏览器内完成 · 零后端零 API&#10;            &lt;/Text&gt;&#10;        &lt;/Box&gt;&#10;    &lt;/Box&gt;&#10;    {/* ===== 右侧六阶段管线 ===== */}&#10;    &lt;Box style={{ position: 'absolute', top: 84, left: 356, width: 924, height: 572, padding: '20px 36px', boxSizing: 'border-box' }}&gt;&#10;        &lt;svg width={852} height='520' viewBox='0 0 852 520' style={{ fontFamily: &quot;'Noto Sans SC','PingFang SC','Microsoft YaHei',sans-serif&quot; }}&gt;&#10;            {/* 阶段 1 */}&#10;            &lt;rect x='0' y='4' width='852' height='76' rx='4' fill='#FFFFFF' stroke='#D6DCE5' strokeWidth='1.2' /&gt;&#10;            &lt;rect x='0' y='4' width='5' height='76' fill='#1E4FA8' /&gt;&#10;            &lt;rect x='20' y='22' width='40' height='40' rx='3' fill='#1E4FA8' /&gt;&#10;            &lt;text x='40' y='48' fill='#FFFFFF' fontSize='19' fontWeight='bold' textAnchor='middle'&gt;1&lt;/text&gt;&#10;            &lt;text x='80' y='47' fill='#0E3F8C' fontSize='17' fontWeight='bold'&gt;分词&lt;/text&gt;&#10;            &lt;text x='265' y='47' fill='#4A5568' fontSize='13.5'&gt;CJK bigram 切分，不接外部分词器——中文查询无空格&lt;/text&gt;&#10;            &lt;rect x='700' y='27' width='136' height='30' rx='3' fill='#E8EFF8' /&gt;&#10;            &lt;text x='768' y='47' fill='#1E4FA8' fontSize='12.5' fontWeight='bold' textAnchor='middle'&gt;中文无空格&lt;/text&gt;&#10;            {/* 阶段 2 */}&#10;            &lt;rect x='0' y='92' width='852' height='76' rx='4' fill='#FFFFFF' stroke='#D6DCE5' strokeWidth='1.2' /&gt;&#10;            &lt;rect x='0' y='92' width='5' height='76' fill='#1E4FA8' /&gt;&#10;            &lt;rect x='20' y='110' width='40' height='40' rx='3' fill='#1E4FA8' /&gt;&#10;            &lt;text x='40' y='136' fill='#FFFFFF' fontSize='19' fontWeight='bold' textAnchor='middle'&gt;2&lt;/text&gt;&#10;            &lt;text x='80' y='135' fill='#0E3F8C' fontSize='17' fontWeight='bold'&gt;BM25 词面通道&lt;/text&gt;&#10;            &lt;text x='265' y='135' fill='#4A5568' fontSize='13.5'&gt;k1=1.5 / b=0.75，标题重复计入 ×2，IDF 恒正&lt;/text&gt;&#10;            &lt;rect x='700' y='115' width='136' height='30' rx='3' fill='#E8EFF8' /&gt;&#10;            &lt;text x='768' y='135' fill='#1E4FA8' fontSize='12.5' fontWeight='bold' textAnchor='middle'&gt;精确命中&lt;/text&gt;&#10;            {/* 阶段 3 */}&#10;            &lt;rect x='0' y='180' width='852' height='76' rx='4' fill='#FFFFFF' stroke='#D6DCE5' strokeWidth='1.2' /&gt;&#10;            &lt;rect x='0' y='180' width='5' height='76' fill='#1E4FA8' /&gt;&#10;            &lt;rect x='20' y='198' width='40' height='40' rx='3' fill='#1E4FA8' /&gt;&#10;            &lt;text x='40' y='224' fill='#FFFFFF' fontSize='19' fontWeight='bold' textAnchor='middle'&gt;3&lt;/text&gt;&#10;            &lt;text x='80' y='223' fill='#0E3F8C' fontSize='17' fontWeight='bold'&gt;双向量通道&lt;/text&gt;&#10;            &lt;text x='265' y='223' fill='#4A5568' fontSize='13.5'&gt;MiniLM 384d 真实语义；hashing 256d 兜底，门槛抬高到 0.32&lt;/text&gt;&#10;            &lt;rect x='700' y='203' width='136' height='30' rx='3' fill='#E8EFF8' /&gt;&#10;            &lt;text x='768' y='223' fill='#1E4FA8' fontSize='12.5' fontWeight='bold' textAnchor='middle'&gt;语义泛化&lt;/text&gt;&#10;            {/* 阶段 4 */}&#10;            &lt;rect x='0' y='268' width='852' height='76' rx='4' fill='#FFFFFF' stroke='#D6DCE5' strokeWidth='1.2' /&gt;&#10;            &lt;rect x='0' y='268' width='5' height='76' fill='#1E4FA8' /&gt;&#10;            &lt;rect x='20' y='286' width='40' height='40' rx='3' fill='#1E4FA8' /&gt;&#10;            &lt;text x='40' y='312' fill='#FFFFFF' fontSize='19' fontWeight='bold' textAnchor='middle'&gt;4&lt;/text&gt;&#10;            &lt;text x='80' y='311' fill='#0E3F8C' fontSize='17' fontWeight='bold'&gt;加权融合&lt;/text&gt;&#10;            &lt;text x='265' y='311' fill='#4A5568' fontSize='13.5'&gt;0.6×cos + 0.4×bm25Norm，两路 min-max 归一后加权&lt;/text&gt;&#10;            &lt;rect x='700' y='291' width='136' height='30' rx='3' fill='#E8EFF8' /&gt;&#10;            &lt;text x='768' y='311' fill='#1E4FA8' fontSize='12.5' fontWeight='bold' textAnchor='middle'&gt;两路互补&lt;/text&gt;&#10;            {/* 阶段 5 */}&#10;            &lt;rect x='0' y='356' width='852' height='76' rx='4' fill='#F0F5FC' stroke='#1E4FA8' strokeWidth='1.5' /&gt;&#10;            &lt;rect x='0' y='356' width='5' height='76' fill='#0E3F8C' /&gt;&#10;            &lt;rect x='20' y='374' width='40' height='40' rx='3' fill='#0E3F8C' /&gt;&#10;            &lt;text x='40' y='400' fill='#FFFFFF' fontSize='19' fontWeight='bold' textAnchor='middle'&gt;5&lt;/text&gt;&#10;            &lt;text x='80' y='399' fill='#0E3F8C' fontSize='17' fontWeight='bold'&gt;五特征重排&lt;/text&gt;&#10;            &lt;text x='265' y='399' fill='#1A2230' fontSize='13.5'&gt;Top-8 候选池内精排：final = 0.55×hybridNorm + 0.45×featScore&lt;/text&gt;&#10;            &lt;rect x='700' y='379' width='136' height='30' rx='3' fill='#0E3F8C' /&gt;&#10;            &lt;text x='768' y='399' fill='#FFFFFF' fontSize='12.5' fontWeight='bold' textAnchor='middle'&gt;排序可解释&lt;/text&gt;&#10;            {/* 阶段 6 */}&#10;            &lt;rect x='0' y='444' width='852' height='76' rx='4' fill='#FFFFFF' stroke='#D6DCE5' strokeWidth='1.2' /&gt;&#10;            &lt;rect x='0' y='444' width='5' height='76' fill='#1E4FA8' /&gt;&#10;            &lt;rect x='20' y='462' width='40' height='40' rx='3' fill='#1E4FA8' /&gt;&#10;            &lt;text x='40' y='488' fill='#FFFFFF' fontSize='19' fontWeight='bold' textAnchor='middle'&gt;6&lt;/text&gt;&#10;            &lt;text x='80' y='487' fill='#0E3F8C' fontSize='17' fontWeight='bold'&gt;引用构建&lt;/text&gt;&#10;            &lt;text x='265' y='487' fill='#4A5568' fontSize='13.5'&gt;逐条附引用来源；资料不足明确说「暂无相关资料」&lt;/text&gt;&#10;            &lt;rect x='700' y='467' width='136' height='30' rx='3' fill='#E8EFF8' /&gt;&#10;            &lt;text x='768' y='487' fill='#1E4FA8' fontSize='12.5' fontWeight='bold' textAnchor='middle'&gt;答案可核对&lt;/text&gt;&#10;        &lt;/svg&gt;&#10;    &lt;/Box&gt;&#10;    {/* ===== 母版：页脚 ===== */}&#10;    &lt;Box style={{ position: 'absolute', bottom: 0, left: 0, width: '1280px', height: 64, borderTop: '1px solid #E5E7EB', flexDirection: 'row', alignItems: 'center', justifyContent: 'space-between', padding: '0 40px', boxSizing: 'border-box' }}&gt;&#10;        &lt;Text style={{ fontSize: 13, color: '#8B97A8' }}&gt;&#10;            面镜 FutureMirror · 竞赛演示&#10;        &lt;/Text&gt;&#10;        &lt;Text style={{ fontSize: 14, color: '#1E4FA8', fontWeight: 'bold' }}&gt;&#10;            08 / 16&#10;        &lt;/Text&gt;&#10;    &lt;/Box&gt;&#10;&lt;/Slide&gt;&#10;"/>
+        <p:cNvPr id="488" name="" descr="&lt;Slide style={{&#10;    width: '1280px',&#10;    height: '720px',&#10;    background: '#FFFFFF',&#10;    padding: 0,&#10;    position: 'relative',&#10;    overflow: 'hidden',&#10;    fontFamily: &quot;'Noto Sans SC','Source Han Sans SC','PingFang SC','Microsoft YaHei',sans-serif&quot;,&#10;}}&gt;&#10;    {/* ===== 母版：A3 深蓝顶条 ===== */}&#10;    &lt;Box style={{ position: 'absolute', top: 0, left: 0, width: '1280px', height: 84, background: '#0E3F8C' }}&gt;&#10;        &lt;svg style={{ position: 'absolute', right: 210, top: 18, opacity: 0.16 }} width={150} height={48} viewBox='0 0 150 48'&gt;&#10;            &lt;g stroke='#FFFFFF' strokeWidth='1.2' fill='none'&gt;&#10;                &lt;path d='M2 24 L28 24 L38 10 L74 10 L84 24 L120 24 L130 38 L148 38' /&gt;&#10;                &lt;path d='M38 10 L38 38 L74 38' /&gt;&#10;                &lt;circle cx='28' cy='24' r='3' fill='#FFFFFF' /&gt;&#10;                &lt;circle cx='84' cy='24' r='3' fill='#FFFFFF' /&gt;&#10;            &lt;/g&gt;&#10;        &lt;/svg&gt;&#10;        &lt;Box style={{ position: 'absolute', left: 40, top: 0, height: 84, justifyContent: 'center' }}&gt;&#10;            &lt;Text style={{ fontSize: 26, fontWeight: 'bold', color: '#FFFFFF' }}&gt;&#10;                RAG：六阶段管线，每一阶段解决一个具体工程问题&#10;            &lt;/Text&gt;&#10;        &lt;/Box&gt;&#10;        &lt;Box style={{ position: 'absolute', right: 40, top: 24, background: '#1E4FA8', padding: '7px 16px', borderRadius: 14 }}&gt;&#10;            &lt;Text style={{ fontSize: 14, color: '#FFFFFF', letterSpacing: 1 }}&gt;&#10;                02 原创性论证&#10;            &lt;/Text&gt;&#10;        &lt;/Box&gt;&#10;    &lt;/Box&gt;&#10;    {/* ===== 左侧标题栏 ===== */}&#10;    &lt;Box style={{ position: 'absolute', top: 84, left: 0, width: 356, height: 572, background: '#0E3F8C', padding: '30px 32px 26px 40px', boxSizing: 'border-box', flexDirection: 'column' }}&gt;&#10;        &lt;Text style={{ fontSize: 14, color: '#9FB9E4', letterSpacing: 4 }}&gt;&#10;            RAG 检索策略&#10;        &lt;/Text&gt;&#10;        &lt;Text style={{ fontSize: 30, fontWeight: 'bold', color: '#FFFFFF', marginTop: 14, lineHeight: 1.35 }}&gt;&#10;            六阶段管线&#10;        &lt;/Text&gt;&#10;        &lt;Box style={{ width: 48, height: 4, background: '#FFC107', marginTop: 18 }} /&gt;&#10;        &lt;Text style={{ fontSize: 15, color: '#D7E3F5', lineHeight: 1.85, marginTop: 18 }}&gt;&#10;            选型全部由工程问题倒逼，不是教程默认值：中文无空格 → bigram；国内网络 → 四级权重源；结果不可解释 → 三阶段得分逐条展示。&#10;        &lt;/Text&gt;&#10;        &lt;Box style={{ flex: 1 }} /&gt;&#10;        &lt;Box style={{ background: '#1E4FA8', padding: '14px 16px' }}&gt;&#10;            &lt;Text style={{ fontSize: 15, fontWeight: 'bold', color: '#FFFFFF' }}&gt;&#10;                运行形态&#10;            &lt;/Text&gt;&#10;            &lt;Text style={{ fontSize: 14, color: '#D7E3F5', marginTop: 6, lineHeight: 1.6 }}&gt;&#10;                40 条合成面经&lt;br /&gt;全部浏览器内完成 · 零后端零 API&#10;            &lt;/Text&gt;&#10;        &lt;/Box&gt;&#10;    &lt;/Box&gt;&#10;    {/* ===== 右侧六阶段管线 ===== */}&#10;    &lt;Box style={{ position: 'absolute', top: 84, left: 356, width: 924, height: 572, padding: '20px 36px', boxSizing: 'border-box' }}&gt;&#10;        &lt;svg width={852} height='520' viewBox='0 0 852 520' style={{ fontFamily: &quot;'Noto Sans SC','PingFang SC','Microsoft YaHei',sans-serif&quot; }}&gt;&#10;            {/* 阶段 1 */}&#10;            &lt;rect x='0' y='4' width='852' height='76' rx='4' fill='#FFFFFF' stroke='#D6DCE5' strokeWidth='1.2' /&gt;&#10;            &lt;rect x='0' y='4' width='5' height='76' fill='#1E4FA8' /&gt;&#10;            &lt;rect x='20' y='22' width='40' height='40' rx='3' fill='#1E4FA8' /&gt;&#10;            &lt;text x='40' y='48' fill='#FFFFFF' fontSize='19' fontWeight='bold' textAnchor='middle'&gt;1&lt;/text&gt;&#10;            &lt;text x='80' y='47' fill='#0E3F8C' fontSize='17' fontWeight='bold'&gt;分词&lt;/text&gt;&#10;            &lt;text x='265' y='47' fill='#4A5568' fontSize='13.5'&gt;CJK bigram 切分，不接外部分词器——中文查询无空格&lt;/text&gt;&#10;            &lt;rect x='700' y='27' width='136' height='30' rx='3' fill='#E8EFF8' /&gt;&#10;            &lt;text x='768' y='47' fill='#1E4FA8' fontSize='12.5' fontWeight='bold' textAnchor='middle'&gt;中文无空格&lt;/text&gt;&#10;            {/* 阶段 2 */}&#10;            &lt;rect x='0' y='92' width='852' height='76' rx='4' fill='#FFFFFF' stroke='#D6DCE5' strokeWidth='1.2' /&gt;&#10;            &lt;rect x='0' y='92' width='5' height='76' fill='#1E4FA8' /&gt;&#10;            &lt;rect x='20' y='110' width='40' height='40' rx='3' fill='#1E4FA8' /&gt;&#10;            &lt;text x='40' y='136' fill='#FFFFFF' fontSize='19' fontWeight='bold' textAnchor='middle'&gt;2&lt;/text&gt;&#10;            &lt;text x='80' y='135' fill='#0E3F8C' fontSize='17' fontWeight='bold'&gt;BM25 词面通道&lt;/text&gt;&#10;            &lt;text x='265' y='135' fill='#4A5568' fontSize='13.5'&gt;k1=1.5 / b=0.75，标题重复计入 ×2，IDF 恒正&lt;/text&gt;&#10;            &lt;rect x='700' y='115' width='136' height='30' rx='3' fill='#E8EFF8' /&gt;&#10;            &lt;text x='768' y='135' fill='#1E4FA8' fontSize='12.5' fontWeight='bold' textAnchor='middle'&gt;精确命中&lt;/text&gt;&#10;            {/* 阶段 3 */}&#10;            &lt;rect x='0' y='180' width='852' height='76' rx='4' fill='#FFFFFF' stroke='#D6DCE5' strokeWidth='1.2' /&gt;&#10;            &lt;rect x='0' y='180' width='5' height='76' fill='#1E4FA8' /&gt;&#10;            &lt;rect x='20' y='198' width='40' height='40' rx='3' fill='#1E4FA8' /&gt;&#10;            &lt;text x='40' y='224' fill='#FFFFFF' fontSize='19' fontWeight='bold' textAnchor='middle'&gt;3&lt;/text&gt;&#10;            &lt;text x='80' y='223' fill='#0E3F8C' fontSize='17' fontWeight='bold'&gt;双向量通道&lt;/text&gt;&#10;            &lt;text x='265' y='223' fill='#4A5568' fontSize='13.5'&gt;MiniLM 384d 真实语义；hashing 256d 兜底，门槛抬高到 0.32&lt;/text&gt;&#10;            &lt;rect x='700' y='203' width='136' height='30' rx='3' fill='#E8EFF8' /&gt;&#10;            &lt;text x='768' y='223' fill='#1E4FA8' fontSize='12.5' fontWeight='bold' textAnchor='middle'&gt;语义泛化&lt;/text&gt;&#10;            {/* 阶段 4 */}&#10;            &lt;rect x='0' y='268' width='852' height='76' rx='4' fill='#FFFFFF' stroke='#D6DCE5' strokeWidth='1.2' /&gt;&#10;            &lt;rect x='0' y='268' width='5' height='76' fill='#1E4FA8' /&gt;&#10;            &lt;rect x='20' y='286' width='40' height='40' rx='3' fill='#1E4FA8' /&gt;&#10;            &lt;text x='40' y='312' fill='#FFFFFF' fontSize='19' fontWeight='bold' textAnchor='middle'&gt;4&lt;/text&gt;&#10;            &lt;text x='80' y='311' fill='#0E3F8C' fontSize='17' fontWeight='bold'&gt;加权融合&lt;/text&gt;&#10;            &lt;text x='265' y='311' fill='#4A5568' fontSize='13.5'&gt;0.6×cos + 0.4×bm25Norm，两路 min-max 归一后加权&lt;/text&gt;&#10;            &lt;rect x='700' y='291' width='136' height='30' rx='3' fill='#E8EFF8' /&gt;&#10;            &lt;text x='768' y='311' fill='#1E4FA8' fontSize='12.5' fontWeight='bold' textAnchor='middle'&gt;两路互补&lt;/text&gt;&#10;            {/* 阶段 5 */}&#10;            &lt;rect x='0' y='356' width='852' height='76' rx='4' fill='#F0F5FC' stroke='#1E4FA8' strokeWidth='1.5' /&gt;&#10;            &lt;rect x='0' y='356' width='5' height='76' fill='#0E3F8C' /&gt;&#10;            &lt;rect x='20' y='374' width='40' height='40' rx='3' fill='#0E3F8C' /&gt;&#10;            &lt;text x='40' y='400' fill='#FFFFFF' fontSize='19' fontWeight='bold' textAnchor='middle'&gt;5&lt;/text&gt;&#10;            &lt;text x='80' y='399' fill='#0E3F8C' fontSize='17' fontWeight='bold'&gt;五特征重排&lt;/text&gt;&#10;            &lt;text x='265' y='399' fill='#1A2230' fontSize='13.5'&gt;Top-8 候选池内精排：final = 0.55×hybridNorm + 0.45×featScore&lt;/text&gt;&#10;            &lt;rect x='700' y='379' width='136' height='30' rx='3' fill='#0E3F8C' /&gt;&#10;            &lt;text x='768' y='399' fill='#FFFFFF' fontSize='12.5' fontWeight='bold' textAnchor='middle'&gt;排序可解释&lt;/text&gt;&#10;            {/* 阶段 6 */}&#10;            &lt;rect x='0' y='444' width='852' height='76' rx='4' fill='#FFFFFF' stroke='#D6DCE5' strokeWidth='1.2' /&gt;&#10;            &lt;rect x='0' y='444' width='5' height='76' fill='#1E4FA8' /&gt;&#10;            &lt;rect x='20' y='462' width='40' height='40' rx='3' fill='#1E4FA8' /&gt;&#10;            &lt;text x='40' y='488' fill='#FFFFFF' fontSize='19' fontWeight='bold' textAnchor='middle'&gt;6&lt;/text&gt;&#10;            &lt;text x='80' y='487' fill='#0E3F8C' fontSize='17' fontWeight='bold'&gt;引用构建&lt;/text&gt;&#10;            &lt;text x='265' y='487' fill='#4A5568' fontSize='13.5'&gt;逐条附引用来源；资料不足明确说「暂无相关资料」&lt;/text&gt;&#10;            &lt;rect x='700' y='467' width='136' height='30' rx='3' fill='#E8EFF8' /&gt;&#10;            &lt;text x='768' y='487' fill='#1E4FA8' fontSize='12.5' fontWeight='bold' textAnchor='middle'&gt;答案可核对&lt;/text&gt;&#10;        &lt;/svg&gt;&#10;    &lt;/Box&gt;&#10;    {/* ===== 母版：页脚 ===== */}&#10;    &lt;Box style={{ position: 'absolute', bottom: 0, left: 0, width: '1280px', height: 64, borderTop: '1px solid #E5E7EB', flexDirection: 'row', alignItems: 'center', justifyContent: 'space-between', padding: '0 40px', boxSizing: 'border-box' }}&gt;&#10;        &lt;Text style={{ fontSize: 13, color: '#8B97A8' }}&gt;&#10;            面镜 FutureMirror · 功能演示&#10;        &lt;/Text&gt;&#10;        &lt;Text style={{ fontSize: 14, color: '#1E4FA8', fontWeight: 'bold' }}&gt;&#10;            08 / 16&#10;        &lt;/Text&gt;&#10;    &lt;/Box&gt;&#10;&lt;/Slide&gt;&#10;"/>
         <p:cNvGrpSpPr/>
         <p:nvPr/>
       </p:nvGrpSpPr>
@@ -22965,7 +22965,7 @@
                 <a:latin typeface="Noto Sans SC"/>
                 <a:ea typeface="Noto Sans SC"/>
               </a:rPr>
-              <a:t>竞赛演示</a:t>
+              <a:t>功能演示</a:t>
             </a:r>
             <a:endParaRPr/>
           </a:p>
@@ -23016,7 +23016,7 @@
   <p:cSld>
     <p:spTree>
       <p:nvGrpSpPr>
-        <p:cNvPr id="507" name="" descr="&lt;Slide style={{&#10;    width: '1280px',&#10;    height: '720px',&#10;    background: '#FFFFFF',&#10;    padding: 0,&#10;    position: 'relative',&#10;    overflow: 'hidden',&#10;    fontFamily: &quot;'Noto Sans SC','Source Han Sans SC','PingFang SC','Microsoft YaHei',sans-serif&quot;,&#10;}}&gt;&#10;    {/* ===== 母版：A3 深蓝顶条 ===== */}&#10;    &lt;Box style={{ position: 'absolute', top: 0, left: 0, width: '1280px', height: 84, background: '#0E3F8C' }}&gt;&#10;        &lt;svg style={{ position: 'absolute', right: 210, top: 18, opacity: 0.16 }} width={150} height={48} viewBox='0 0 150 48'&gt;&#10;            &lt;g stroke='#FFFFFF' strokeWidth='1.2' fill='none'&gt;&#10;                &lt;path d='M2 24 L28 24 L38 10 L74 10 L84 24 L120 24 L130 38 L148 38' /&gt;&#10;                &lt;path d='M38 10 L38 38 L74 38' /&gt;&#10;                &lt;circle cx='28' cy='24' r='3' fill='#FFFFFF' /&gt;&#10;                &lt;circle cx='84' cy='24' r='3' fill='#FFFFFF' /&gt;&#10;            &lt;/g&gt;&#10;        &lt;/svg&gt;&#10;        &lt;Box style={{ position: 'absolute', left: 40, top: 0, height: 84, justifyContent: 'center' }}&gt;&#10;            &lt;Text style={{ fontSize: 26, fontWeight: 'bold', color: '#FFFFFF' }}&gt;&#10;                五特征重排：召回管「相关」，重排管「排序」&#10;            &lt;/Text&gt;&#10;        &lt;/Box&gt;&#10;        &lt;Box style={{ position: 'absolute', right: 40, top: 24, background: '#1E4FA8', padding: '7px 16px', borderRadius: 14 }}&gt;&#10;            &lt;Text style={{ fontSize: 14, color: '#FFFFFF', letterSpacing: 1 }}&gt;&#10;                02 原创性论证&#10;            &lt;/Text&gt;&#10;        &lt;/Box&gt;&#10;    &lt;/Box&gt;&#10;    {/* ===== 内容区 ===== */}&#10;    &lt;Box style={{ position: 'absolute', top: 84, left: 0, width: '1280px', height: 572, padding: '24px 40px', boxSizing: 'border-box', flexDirection: 'row', gap: 28 }}&gt;&#10;        {/* 左：公式与五特征权重 */}&#10;        &lt;Box style={{ width: 500, flexDirection: 'column' }}&gt;&#10;            &lt;Text style={{ fontSize: 16, fontWeight: 'bold', color: '#0E3F8C', letterSpacing: 1 }}&gt;&#10;                重排公式（巨型锚点）&#10;            &lt;/Text&gt;&#10;            &lt;Box style={{ background: '#0E3F8C', padding: '22px 24px', marginTop: 12 }}&gt;&#10;                &lt;Text style={{ fontSize: 23, fontWeight: 'bold', color: '#FFFFFF', lineHeight: 1.5 }}&gt;&#10;                    final = 0.55 × hybridNorm&lt;br /&gt;+ 0.45 × featScore&#10;                &lt;/Text&gt;&#10;                &lt;Text style={{ fontSize: 13, color: '#9FB9E4', marginTop: 10 }}&gt;&#10;                    Top-8 候选池召回后精排 · 权重和 = 1&#10;                &lt;/Text&gt;&#10;            &lt;/Box&gt;&#10;            &lt;Text style={{ fontSize: 16, fontWeight: 'bold', color: '#0E3F8C', marginTop: 22, letterSpacing: 1 }}&gt;&#10;                五特征与权重&#10;            &lt;/Text&gt;&#10;            &lt;Box style={{ flexDirection: 'column', gap: 14, marginTop: 14 }}&gt;&#10;                &lt;Box style={{ flexDirection: 'row', alignItems: 'center', gap: 10 }}&gt;&#10;                    &lt;Text style={{ width: 62, fontSize: 15, fontWeight: 'bold', color: '#1A2230' }}&gt;title&lt;/Text&gt;&#10;                    &lt;Text style={{ width: 148, fontSize: 12, color: '#4A5568' }}&gt;标题覆盖率&lt;/Text&gt;&#10;                    &lt;Box style={{ width: 190, height: 16, background: '#E8EFF8' }}&gt;&#10;                        &lt;Box style={{ width: 190, height: 16, background: '#1E4FA8' }} /&gt;&#10;                    &lt;/Box&gt;&#10;                    &lt;Text style={{ width: 36, fontSize: 15, fontWeight: 'bold', color: '#1E4FA8' }}&gt;0.34&lt;/Text&gt;&#10;                &lt;/Box&gt;&#10;                &lt;Box style={{ flexDirection: 'row', alignItems: 'center', gap: 10 }}&gt;&#10;                    &lt;Text style={{ width: 62, fontSize: 15, fontWeight: 'bold', color: '#1A2230' }}&gt;phrase&lt;/Text&gt;&#10;                    &lt;Text style={{ width: 148, fontSize: 12, color: '#4A5568' }}&gt;最长公共子串占比&lt;/Text&gt;&#10;                    &lt;Box style={{ width: 190, height: 16, background: '#E8EFF8' }}&gt;&#10;                        &lt;Box style={{ width: 134, height: 16, background: '#1E4FA8' }} /&gt;&#10;                    &lt;/Box&gt;&#10;                    &lt;Text style={{ width: 36, fontSize: 15, fontWeight: 'bold', color: '#1E4FA8' }}&gt;0.24&lt;/Text&gt;&#10;                &lt;/Box&gt;&#10;                &lt;Box style={{ flexDirection: 'row', alignItems: 'center', gap: 10 }}&gt;&#10;                    &lt;Text style={{ width: 62, fontSize: 15, fontWeight: 'bold', color: '#1A2230' }}&gt;tag&lt;/Text&gt;&#10;                    &lt;Text style={{ width: 148, fontSize: 12, color: '#4A5568' }}&gt;标签覆盖率&lt;/Text&gt;&#10;                    &lt;Box style={{ width: 190, height: 16, background: '#E8EFF8' }}&gt;&#10;                        &lt;Box style={{ width: 123, height: 16, background: '#1E4FA8' }} /&gt;&#10;                    &lt;/Box&gt;&#10;                    &lt;Text style={{ width: 36, fontSize: 15, fontWeight: 'bold', color: '#1E4FA8' }}&gt;0.22&lt;/Text&gt;&#10;                &lt;/Box&gt;&#10;                &lt;Box style={{ flexDirection: 'row', alignItems: 'center', gap: 10 }}&gt;&#10;                    &lt;Text style={{ width: 62, fontSize: 15, fontWeight: 'bold', color: '#1A2230' }}&gt;type&lt;/Text&gt;&#10;                    &lt;Text style={{ width: 148, fontSize: 12, color: '#4A5568' }}&gt;类型先验（面经最高）&lt;/Text&gt;&#10;                    &lt;Box style={{ width: 190, height: 16, background: '#E8EFF8' }}&gt;&#10;                        &lt;Box style={{ width: 67, height: 16, background: '#1E4FA8' }} /&gt;&#10;                    &lt;/Box&gt;&#10;                    &lt;Text style={{ width: 36, fontSize: 15, fontWeight: 'bold', color: '#1E4FA8' }}&gt;0.12&lt;/Text&gt;&#10;                &lt;/Box&gt;&#10;                &lt;Box style={{ flexDirection: 'row', alignItems: 'center', gap: 10 }}&gt;&#10;                    &lt;Text style={{ width: 62, fontSize: 15, fontWeight: 'bold', color: '#1A2230' }}&gt;len&lt;/Text&gt;&#10;                    &lt;Text style={{ width: 148, fontSize: 12, color: '#4A5568' }}&gt;长度先验（理想 170 字）&lt;/Text&gt;&#10;                    &lt;Box style={{ width: 190, height: 16, background: '#E8EFF8' }}&gt;&#10;                        &lt;Box style={{ width: 45, height: 16, background: '#1E4FA8' }} /&gt;&#10;                    &lt;/Box&gt;&#10;                    &lt;Text style={{ width: 36, fontSize: 15, fontWeight: 'bold', color: '#1E4FA8' }}&gt;0.08&lt;/Text&gt;&#10;                &lt;/Box&gt;&#10;            &lt;/Box&gt;&#10;            &lt;Box style={{ flex: 1 }} /&gt;&#10;            &lt;Box style={{ background: '#F7F9FC', border: '1px solid #D6DCE5', padding: '12px 16px' }}&gt;&#10;                &lt;Text style={{ fontSize: 13.5, color: '#4A5568', lineHeight: 1.6 }}&gt;&#10;                    phrase 用 LCS 计算（标题 ×1.0，正文 ×0.6）——完整短语 = 强意图信号。&#10;                &lt;/Text&gt;&#10;            &lt;/Box&gt;&#10;        &lt;/Box&gt;&#10;        {/* 右：真实效果表 + 为什么不用 LLM rerank */}&#10;        &lt;Box style={{ flex: 1, flexDirection: 'column' }}&gt;&#10;            &lt;Text style={{ fontSize: 16, fontWeight: 'bold', color: '#0E3F8C', letterSpacing: 1 }}&gt;&#10;                重排真实效果（线上知识库实测）&#10;            &lt;/Text&gt;&#10;            &lt;Box style={{ marginTop: 12, height: 236 }}&gt;&#10;                &lt;Table&#10;                    style={{ width: '100%', height: 236 }}&#10;                    defaultTextStyle={{ fontSize: 13, textAlign: 'center', color: '#1A2230' }}&#10;                    defaultCellStyle={{&#10;                        border: {&#10;                            left: { width: 1, color: '#D6DCE5' },&#10;                            right: { width: 1, color: '#D6DCE5' },&#10;                            top: { width: 1, color: '#D6DCE5' },&#10;                            bottom: { width: 1, color: '#D6DCE5' },&#10;                        },&#10;                    }}&#10;                    cells={[&#10;                        [&#10;                            { text: '查询', textStyle: { bold: true, color: '#FFFFFF' }, cellStyle: { background: { color: '#0E3F8C' } } },&#10;                            { text: '混合召回 Top-3', textStyle: { bold: true, color: '#FFFFFF' }, cellStyle: { background: { color: '#0E3F8C' } } },&#10;                            { text: '重排后 Top-3（变化）', textStyle: { bold: true, color: '#FFFFFF' }, cellStyle: { background: { color: '#0E3F8C' } } },&#10;                        ],&#10;                        [&#10;                            { text: 'MySQL 索引', textStyle: { bold: true, color: '#0E3F8C' } },&#10;                            { text: 'B+ 树 / 后端 JD / 事务隔离级别', cellStyle: { background: { color: '#FFFFFF' } } },&#10;                            { text: 'B+ 树 / 事务隔离 ↑ / 后端 JD ↓', cellStyle: { background: { color: '#F0F5FC' } } },&#10;                        ],&#10;                        [&#10;                            { text: 'Redis 持久化', textStyle: { bold: true, color: '#0E3F8C' }, cellStyle: { background: { color: '#F7F9FC' } } },&#10;                            { text: 'RDB 与 AOF / 分布式锁 / 缓存三兄弟', cellStyle: { background: { color: '#F7F9FC' } } },&#10;                            { text: 'RDB 与 AOF / 缓存三兄弟 ↑ / 分布式锁 ↓', cellStyle: { background: { color: '#F0F5FC' } } },&#10;                        ],&#10;                        [&#10;                            { text: '后端 开发 工程师', textStyle: { bold: true, color: '#0E3F8C' } },&#10;                            { text: '后端 JD / AI 求职趋势 / 腾讯一面' },&#10;                            { text: '后端 JD / 腾讯一面 ↑ / 字节二面 ↑ / AI 趋势 ↓', cellStyle: { background: { color: '#F0F5FC' } } },&#10;                        ],&#10;                    ]}&#10;                /&gt;&#10;            &lt;/Box&gt;&#10;            &lt;Text style={{ fontSize: 13, color: '#8B97A8', marginTop: 8 }}&gt;&#10;                ↑ 重排提升 · ↓ 重排压下；「后端 JD」标题零命中，phrase 0.60 也救不回&#10;            &lt;/Text&gt;&#10;            &lt;Box style={{ background: '#F7F9FC', border: '1px solid #D6DCE5', borderLeft: '4px solid #0E3F8C', padding: '16px 18px', marginTop: 16, flex: 1 }}&gt;&#10;                &lt;Text style={{ fontSize: 16, fontWeight: 'bold', color: '#0E3F8C' }}&gt;&#10;                    为什么不用 LLM rerank&#10;                &lt;/Text&gt;&#10;                &lt;Box style={{ flexDirection: 'row', gap: 10, marginTop: 10 }}&gt;&#10;                    &lt;Box style={{ background: '#E8EFF8', padding: '5px 12px' }}&gt;&#10;                        &lt;Text style={{ fontSize: 13, color: '#1E4FA8', fontWeight: 'bold' }}&gt;延迟&lt;/Text&gt;&#10;                    &lt;/Box&gt;&#10;                    &lt;Box style={{ background: '#E8EFF8', padding: '5px 12px' }}&gt;&#10;                        &lt;Text style={{ fontSize: 13, color: '#1E4FA8', fontWeight: 'bold' }}&gt;成本&lt;/Text&gt;&#10;                    &lt;/Box&gt;&#10;                    &lt;Box style={{ background: '#E8EFF8', padding: '5px 12px' }}&gt;&#10;                        &lt;Text style={{ fontSize: 13, color: '#1E4FA8', fontWeight: 'bold' }}&gt;确定性&lt;/Text&gt;&#10;                    &lt;/Box&gt;&#10;                &lt;/Box&gt;&#10;                &lt;Text style={{ fontSize: 14, color: '#4A5568', marginTop: 10, lineHeight: 1.65 }}&gt;&#10;                    规则重排对同一查询永远给出同一结果，特征分可逐项展示给用户核对；LLM 重排三者皆无。40 条规模的知识库，规则重排的区分度已经够用。&#10;                &lt;/Text&gt;&#10;            &lt;/Box&gt;&#10;        &lt;/Box&gt;&#10;    &lt;/Box&gt;&#10;    {/* ===== 母版：页脚 ===== */}&#10;    &lt;Box style={{ position: 'absolute', bottom: 0, left: 0, width: '1280px', height: 64, borderTop: '1px solid #E5E7EB', flexDirection: 'row', alignItems: 'center', justifyContent: 'space-between', padding: '0 40px', boxSizing: 'border-box' }}&gt;&#10;        &lt;Text style={{ fontSize: 13, color: '#8B97A8' }}&gt;&#10;            面镜 FutureMirror · 竞赛演示&#10;        &lt;/Text&gt;&#10;        &lt;Text style={{ fontSize: 14, color: '#1E4FA8', fontWeight: 'bold' }}&gt;&#10;            09 / 16&#10;        &lt;/Text&gt;&#10;    &lt;/Box&gt;&#10;&lt;/Slide&gt;&#10;"/>
+        <p:cNvPr id="507" name="" descr="&lt;Slide style={{&#10;    width: '1280px',&#10;    height: '720px',&#10;    background: '#FFFFFF',&#10;    padding: 0,&#10;    position: 'relative',&#10;    overflow: 'hidden',&#10;    fontFamily: &quot;'Noto Sans SC','Source Han Sans SC','PingFang SC','Microsoft YaHei',sans-serif&quot;,&#10;}}&gt;&#10;    {/* ===== 母版：A3 深蓝顶条 ===== */}&#10;    &lt;Box style={{ position: 'absolute', top: 0, left: 0, width: '1280px', height: 84, background: '#0E3F8C' }}&gt;&#10;        &lt;svg style={{ position: 'absolute', right: 210, top: 18, opacity: 0.16 }} width={150} height={48} viewBox='0 0 150 48'&gt;&#10;            &lt;g stroke='#FFFFFF' strokeWidth='1.2' fill='none'&gt;&#10;                &lt;path d='M2 24 L28 24 L38 10 L74 10 L84 24 L120 24 L130 38 L148 38' /&gt;&#10;                &lt;path d='M38 10 L38 38 L74 38' /&gt;&#10;                &lt;circle cx='28' cy='24' r='3' fill='#FFFFFF' /&gt;&#10;                &lt;circle cx='84' cy='24' r='3' fill='#FFFFFF' /&gt;&#10;            &lt;/g&gt;&#10;        &lt;/svg&gt;&#10;        &lt;Box style={{ position: 'absolute', left: 40, top: 0, height: 84, justifyContent: 'center' }}&gt;&#10;            &lt;Text style={{ fontSize: 26, fontWeight: 'bold', color: '#FFFFFF' }}&gt;&#10;                五特征重排：召回管「相关」，重排管「排序」&#10;            &lt;/Text&gt;&#10;        &lt;/Box&gt;&#10;        &lt;Box style={{ position: 'absolute', right: 40, top: 24, background: '#1E4FA8', padding: '7px 16px', borderRadius: 14 }}&gt;&#10;            &lt;Text style={{ fontSize: 14, color: '#FFFFFF', letterSpacing: 1 }}&gt;&#10;                02 原创性论证&#10;            &lt;/Text&gt;&#10;        &lt;/Box&gt;&#10;    &lt;/Box&gt;&#10;    {/* ===== 内容区 ===== */}&#10;    &lt;Box style={{ position: 'absolute', top: 84, left: 0, width: '1280px', height: 572, padding: '24px 40px', boxSizing: 'border-box', flexDirection: 'row', gap: 28 }}&gt;&#10;        {/* 左：公式与五特征权重 */}&#10;        &lt;Box style={{ width: 500, flexDirection: 'column' }}&gt;&#10;            &lt;Text style={{ fontSize: 16, fontWeight: 'bold', color: '#0E3F8C', letterSpacing: 1 }}&gt;&#10;                重排公式（巨型锚点）&#10;            &lt;/Text&gt;&#10;            &lt;Box style={{ background: '#0E3F8C', padding: '22px 24px', marginTop: 12 }}&gt;&#10;                &lt;Text style={{ fontSize: 23, fontWeight: 'bold', color: '#FFFFFF', lineHeight: 1.5 }}&gt;&#10;                    final = 0.55 × hybridNorm&lt;br /&gt;+ 0.45 × featScore&#10;                &lt;/Text&gt;&#10;                &lt;Text style={{ fontSize: 13, color: '#9FB9E4', marginTop: 10 }}&gt;&#10;                    Top-8 候选池召回后精排 · 权重和 = 1&#10;                &lt;/Text&gt;&#10;            &lt;/Box&gt;&#10;            &lt;Text style={{ fontSize: 16, fontWeight: 'bold', color: '#0E3F8C', marginTop: 22, letterSpacing: 1 }}&gt;&#10;                五特征与权重&#10;            &lt;/Text&gt;&#10;            &lt;Box style={{ flexDirection: 'column', gap: 14, marginTop: 14 }}&gt;&#10;                &lt;Box style={{ flexDirection: 'row', alignItems: 'center', gap: 10 }}&gt;&#10;                    &lt;Text style={{ width: 62, fontSize: 15, fontWeight: 'bold', color: '#1A2230' }}&gt;title&lt;/Text&gt;&#10;                    &lt;Text style={{ width: 148, fontSize: 12, color: '#4A5568' }}&gt;标题覆盖率&lt;/Text&gt;&#10;                    &lt;Box style={{ width: 190, height: 16, background: '#E8EFF8' }}&gt;&#10;                        &lt;Box style={{ width: 190, height: 16, background: '#1E4FA8' }} /&gt;&#10;                    &lt;/Box&gt;&#10;                    &lt;Text style={{ width: 36, fontSize: 15, fontWeight: 'bold', color: '#1E4FA8' }}&gt;0.34&lt;/Text&gt;&#10;                &lt;/Box&gt;&#10;                &lt;Box style={{ flexDirection: 'row', alignItems: 'center', gap: 10 }}&gt;&#10;                    &lt;Text style={{ width: 62, fontSize: 15, fontWeight: 'bold', color: '#1A2230' }}&gt;phrase&lt;/Text&gt;&#10;                    &lt;Text style={{ width: 148, fontSize: 12, color: '#4A5568' }}&gt;最长公共子串占比&lt;/Text&gt;&#10;                    &lt;Box style={{ width: 190, height: 16, background: '#E8EFF8' }}&gt;&#10;                        &lt;Box style={{ width: 134, height: 16, background: '#1E4FA8' }} /&gt;&#10;                    &lt;/Box&gt;&#10;                    &lt;Text style={{ width: 36, fontSize: 15, fontWeight: 'bold', color: '#1E4FA8' }}&gt;0.24&lt;/Text&gt;&#10;                &lt;/Box&gt;&#10;                &lt;Box style={{ flexDirection: 'row', alignItems: 'center', gap: 10 }}&gt;&#10;                    &lt;Text style={{ width: 62, fontSize: 15, fontWeight: 'bold', color: '#1A2230' }}&gt;tag&lt;/Text&gt;&#10;                    &lt;Text style={{ width: 148, fontSize: 12, color: '#4A5568' }}&gt;标签覆盖率&lt;/Text&gt;&#10;                    &lt;Box style={{ width: 190, height: 16, background: '#E8EFF8' }}&gt;&#10;                        &lt;Box style={{ width: 123, height: 16, background: '#1E4FA8' }} /&gt;&#10;                    &lt;/Box&gt;&#10;                    &lt;Text style={{ width: 36, fontSize: 15, fontWeight: 'bold', color: '#1E4FA8' }}&gt;0.22&lt;/Text&gt;&#10;                &lt;/Box&gt;&#10;                &lt;Box style={{ flexDirection: 'row', alignItems: 'center', gap: 10 }}&gt;&#10;                    &lt;Text style={{ width: 62, fontSize: 15, fontWeight: 'bold', color: '#1A2230' }}&gt;type&lt;/Text&gt;&#10;                    &lt;Text style={{ width: 148, fontSize: 12, color: '#4A5568' }}&gt;类型先验（面经最高）&lt;/Text&gt;&#10;                    &lt;Box style={{ width: 190, height: 16, background: '#E8EFF8' }}&gt;&#10;                        &lt;Box style={{ width: 67, height: 16, background: '#1E4FA8' }} /&gt;&#10;                    &lt;/Box&gt;&#10;                    &lt;Text style={{ width: 36, fontSize: 15, fontWeight: 'bold', color: '#1E4FA8' }}&gt;0.12&lt;/Text&gt;&#10;                &lt;/Box&gt;&#10;                &lt;Box style={{ flexDirection: 'row', alignItems: 'center', gap: 10 }}&gt;&#10;                    &lt;Text style={{ width: 62, fontSize: 15, fontWeight: 'bold', color: '#1A2230' }}&gt;len&lt;/Text&gt;&#10;                    &lt;Text style={{ width: 148, fontSize: 12, color: '#4A5568' }}&gt;长度先验（理想 170 字）&lt;/Text&gt;&#10;                    &lt;Box style={{ width: 190, height: 16, background: '#E8EFF8' }}&gt;&#10;                        &lt;Box style={{ width: 45, height: 16, background: '#1E4FA8' }} /&gt;&#10;                    &lt;/Box&gt;&#10;                    &lt;Text style={{ width: 36, fontSize: 15, fontWeight: 'bold', color: '#1E4FA8' }}&gt;0.08&lt;/Text&gt;&#10;                &lt;/Box&gt;&#10;            &lt;/Box&gt;&#10;            &lt;Box style={{ flex: 1 }} /&gt;&#10;            &lt;Box style={{ background: '#F7F9FC', border: '1px solid #D6DCE5', padding: '12px 16px' }}&gt;&#10;                &lt;Text style={{ fontSize: 13.5, color: '#4A5568', lineHeight: 1.6 }}&gt;&#10;                    phrase 用 LCS 计算（标题 ×1.0，正文 ×0.6）——完整短语 = 强意图信号。&#10;                &lt;/Text&gt;&#10;            &lt;/Box&gt;&#10;        &lt;/Box&gt;&#10;        {/* 右：真实效果表 + 为什么不用 LLM rerank */}&#10;        &lt;Box style={{ flex: 1, flexDirection: 'column' }}&gt;&#10;            &lt;Text style={{ fontSize: 16, fontWeight: 'bold', color: '#0E3F8C', letterSpacing: 1 }}&gt;&#10;                重排真实效果（线上知识库实测）&#10;            &lt;/Text&gt;&#10;            &lt;Box style={{ marginTop: 12, height: 236 }}&gt;&#10;                &lt;Table&#10;                    style={{ width: '100%', height: 236 }}&#10;                    defaultTextStyle={{ fontSize: 13, textAlign: 'center', color: '#1A2230' }}&#10;                    defaultCellStyle={{&#10;                        border: {&#10;                            left: { width: 1, color: '#D6DCE5' },&#10;                            right: { width: 1, color: '#D6DCE5' },&#10;                            top: { width: 1, color: '#D6DCE5' },&#10;                            bottom: { width: 1, color: '#D6DCE5' },&#10;                        },&#10;                    }}&#10;                    cells={[&#10;                        [&#10;                            { text: '查询', textStyle: { bold: true, color: '#FFFFFF' }, cellStyle: { background: { color: '#0E3F8C' } } },&#10;                            { text: '混合召回 Top-3', textStyle: { bold: true, color: '#FFFFFF' }, cellStyle: { background: { color: '#0E3F8C' } } },&#10;                            { text: '重排后 Top-3（变化）', textStyle: { bold: true, color: '#FFFFFF' }, cellStyle: { background: { color: '#0E3F8C' } } },&#10;                        ],&#10;                        [&#10;                            { text: 'MySQL 索引', textStyle: { bold: true, color: '#0E3F8C' } },&#10;                            { text: 'B+ 树 / 后端 JD / 事务隔离级别', cellStyle: { background: { color: '#FFFFFF' } } },&#10;                            { text: 'B+ 树 / 事务隔离 ↑ / 后端 JD ↓', cellStyle: { background: { color: '#F0F5FC' } } },&#10;                        ],&#10;                        [&#10;                            { text: 'Redis 持久化', textStyle: { bold: true, color: '#0E3F8C' }, cellStyle: { background: { color: '#F7F9FC' } } },&#10;                            { text: 'RDB 与 AOF / 分布式锁 / 缓存三兄弟', cellStyle: { background: { color: '#F7F9FC' } } },&#10;                            { text: 'RDB 与 AOF / 缓存三兄弟 ↑ / 分布式锁 ↓', cellStyle: { background: { color: '#F0F5FC' } } },&#10;                        ],&#10;                        [&#10;                            { text: '后端 开发 工程师', textStyle: { bold: true, color: '#0E3F8C' } },&#10;                            { text: '后端 JD / AI 求职趋势 / 腾讯一面' },&#10;                            { text: '后端 JD / 腾讯一面 ↑ / 字节二面 ↑ / AI 趋势 ↓', cellStyle: { background: { color: '#F0F5FC' } } },&#10;                        ],&#10;                    ]}&#10;                /&gt;&#10;            &lt;/Box&gt;&#10;            &lt;Text style={{ fontSize: 13, color: '#8B97A8', marginTop: 8 }}&gt;&#10;                ↑ 重排提升 · ↓ 重排压下；「后端 JD」标题零命中，phrase 0.60 也救不回&#10;            &lt;/Text&gt;&#10;            &lt;Box style={{ background: '#F7F9FC', border: '1px solid #D6DCE5', borderLeft: '4px solid #0E3F8C', padding: '16px 18px', marginTop: 16, flex: 1 }}&gt;&#10;                &lt;Text style={{ fontSize: 16, fontWeight: 'bold', color: '#0E3F8C' }}&gt;&#10;                    为什么不用 LLM rerank&#10;                &lt;/Text&gt;&#10;                &lt;Box style={{ flexDirection: 'row', gap: 10, marginTop: 10 }}&gt;&#10;                    &lt;Box style={{ background: '#E8EFF8', padding: '5px 12px' }}&gt;&#10;                        &lt;Text style={{ fontSize: 13, color: '#1E4FA8', fontWeight: 'bold' }}&gt;延迟&lt;/Text&gt;&#10;                    &lt;/Box&gt;&#10;                    &lt;Box style={{ background: '#E8EFF8', padding: '5px 12px' }}&gt;&#10;                        &lt;Text style={{ fontSize: 13, color: '#1E4FA8', fontWeight: 'bold' }}&gt;成本&lt;/Text&gt;&#10;                    &lt;/Box&gt;&#10;                    &lt;Box style={{ background: '#E8EFF8', padding: '5px 12px' }}&gt;&#10;                        &lt;Text style={{ fontSize: 13, color: '#1E4FA8', fontWeight: 'bold' }}&gt;确定性&lt;/Text&gt;&#10;                    &lt;/Box&gt;&#10;                &lt;/Box&gt;&#10;                &lt;Text style={{ fontSize: 14, color: '#4A5568', marginTop: 10, lineHeight: 1.65 }}&gt;&#10;                    规则重排对同一查询永远给出同一结果，特征分可逐项展示给用户核对；LLM 重排三者皆无。40 条规模的知识库，规则重排的区分度已经够用。&#10;                &lt;/Text&gt;&#10;            &lt;/Box&gt;&#10;        &lt;/Box&gt;&#10;    &lt;/Box&gt;&#10;    {/* ===== 母版：页脚 ===== */}&#10;    &lt;Box style={{ position: 'absolute', bottom: 0, left: 0, width: '1280px', height: 64, borderTop: '1px solid #E5E7EB', flexDirection: 'row', alignItems: 'center', justifyContent: 'space-between', padding: '0 40px', boxSizing: 'border-box' }}&gt;&#10;        &lt;Text style={{ fontSize: 13, color: '#8B97A8' }}&gt;&#10;            面镜 FutureMirror · 功能演示&#10;        &lt;/Text&gt;&#10;        &lt;Text style={{ fontSize: 14, color: '#1E4FA8', fontWeight: 'bold' }}&gt;&#10;            09 / 16&#10;        &lt;/Text&gt;&#10;    &lt;/Box&gt;&#10;&lt;/Slide&gt;&#10;"/>
         <p:cNvGrpSpPr/>
         <p:nvPr/>
       </p:nvGrpSpPr>
@@ -25530,7 +25530,7 @@
                 <a:latin typeface="Noto Sans SC"/>
                 <a:ea typeface="Noto Sans SC"/>
               </a:rPr>
-              <a:t>竞赛演示</a:t>
+              <a:t>功能演示</a:t>
             </a:r>
             <a:endParaRPr/>
           </a:p>

--- a/docs/FutureMirror.Deck.pptx
+++ b/docs/FutureMirror.Deck.pptx
@@ -7510,7 +7510,7 @@
   <p:cSld>
     <p:spTree>
       <p:nvGrpSpPr>
-        <p:cNvPr id="140" name="" descr="&lt;Slide style={{&#10;    width: '1280px',&#10;    height: '720px',&#10;    background: '#FFFFFF',&#10;    padding: 0,&#10;    position: 'relative',&#10;    overflow: 'hidden',&#10;    fontFamily: &quot;'Noto Sans SC','Source Han Sans SC','PingFang SC','Microsoft YaHei',sans-serif&quot;,&#10;}}&gt;&#10;    {/* ===== 母版：A3 深蓝顶条 ===== */}&#10;    &lt;Box style={{ position: 'absolute', top: 0, left: 0, width: '1280px', height: 84, background: '#0E3F8C' }}&gt;&#10;        &lt;svg style={{ position: 'absolute', right: 210, top: 18, opacity: 0.16 }} width={150} height={48} viewBox='0 0 150 48'&gt;&#10;            &lt;g stroke='#FFFFFF' strokeWidth='1.2' fill='none'&gt;&#10;                &lt;path d='M2 24 L28 24 L38 10 L74 10 L84 24 L120 24 L130 38 L148 38' /&gt;&#10;                &lt;path d='M38 10 L38 38 L74 38' /&gt;&#10;                &lt;circle cx='28' cy='24' r='3' fill='#FFFFFF' /&gt;&#10;                &lt;circle cx='84' cy='24' r='3' fill='#FFFFFF' /&gt;&#10;            &lt;/g&gt;&#10;        &lt;/svg&gt;&#10;        &lt;Box style={{ position: 'absolute', left: 40, top: 0, height: 84, justifyContent: 'center' }}&gt;&#10;            &lt;Text style={{ fontSize: 26, fontWeight: 'bold', color: '#FFFFFF' }}&gt;&#10;                真实完成度：线上 SSE 流式闭环，不是 Mock 界面&#10;            &lt;/Text&gt;&#10;        &lt;/Box&gt;&#10;        &lt;Box style={{ position: 'absolute', right: 40, top: 24, background: '#1E4FA8', padding: '7px 16px', borderRadius: 14 }}&gt;&#10;            &lt;Text style={{ fontSize: 14, color: '#FFFFFF', letterSpacing: 1 }}&gt;&#10;                03 真实完成度&#10;            &lt;/Text&gt;&#10;        &lt;/Box&gt;&#10;    &lt;/Box&gt;&#10;    {/* ===== 上部：真实 SSE 事件流 + 三项线上验证 ===== */}&#10;    &lt;Box style={{ position: 'absolute', top: 84, left: 0, width: '1280px', height: 318, padding: '20px 40px 0 40px', boxSizing: 'border-box', flexDirection: 'row', gap: 24 }}&gt;&#10;        {/* 左：SSE 事件协议代码块 */}&#10;        &lt;Box style={{ width: 772 }}&gt;&#10;            &lt;Text style={{ fontSize: 15, fontWeight: 'bold', color: '#0E3F8C', letterSpacing: 1 }}&gt;&#10;                /api/chat/stream 事件协议（线上实测节选）&#10;            &lt;/Text&gt;&#10;            &lt;Box style={{ marginTop: 10 }}&gt;&#10;                &lt;CodeBlock&#10;                    code={`event: agent     data: {&quot;id&quot;:&quot;pressure&quot;,&quot;name&quot;:&quot;压力面试官&quot;}&#10;event: thinking  data: {&quot;text&quot;:&quot;正在组织第 3 个问题…&quot;}&#10;event: delta     data: {&quot;text&quot;:&quot;你提到订单服务——&quot;}&#10;event: delta     data: {&quot;text&quot;:&quot;峰值 QPS 是多少？&quot;}&#10;event: observer  data: {&quot;note&quot;:&quot;结构完整但缺量化&quot;}&#10;event: done      data: {&quot;finish_reason&quot;:&quot;stop&quot;,&quot;usage&quot;:true}`}&#10;                    language='javascript'&#10;                    width={772}&#10;                    fontSize={12.5}&#10;                    theme='github-light'&#10;                /&gt;&#10;            &lt;/Box&gt;&#10;            &lt;Text style={{ fontSize: 12.5, color: '#8B97A8', marginTop: 8, lineHeight: 1.5 }}&gt;&#10;                线上镜像实测：真实流式输出含 finish_reason 与 usage；GitHub Pages 跨域通道三头齐全，内容一致。&#10;            &lt;/Text&gt;&#10;        &lt;/Box&gt;&#10;        {/* 右：三项线上验证结果 */}&#10;        &lt;Box style={{ flex: 1, flexDirection: 'column', gap: 12 }}&gt;&#10;            &lt;Box style={{ flex: 1, background: '#E8EFF8', padding: '12px 16px', justifyContent: 'center' }}&gt;&#10;                &lt;Text style={{ fontSize: 22, fontWeight: 'bold', color: '#1E4FA8' }}&gt;&#10;                    llm_ready: true&#10;                &lt;/Text&gt;&#10;                &lt;Text style={{ fontSize: 13, color: '#4A5568', marginTop: 4 }}&gt;&#10;                    /api/health 线上返回 · 模型 glm-4-flash&#10;                &lt;/Text&gt;&#10;            &lt;/Box&gt;&#10;            &lt;Box style={{ flex: 1, background: '#E8EFF8', padding: '12px 16px', justifyContent: 'center' }}&gt;&#10;                &lt;Text style={{ fontSize: 22, fontWeight: 'bold', color: '#1E4FA8' }}&gt;&#10;                    报告总分 78&#10;                &lt;/Text&gt;&#10;                &lt;Text style={{ fontSize: 13, color: '#4A5568', marginTop: 4 }}&gt;&#10;                    登录 → 建会话 → GLM 提问 → sync → 服务端报告&#10;                &lt;/Text&gt;&#10;            &lt;/Box&gt;&#10;            &lt;Box style={{ flex: 1, background: '#E8EFF8', padding: '12px 16px', justifyContent: 'center' }}&gt;&#10;                &lt;Text style={{ fontSize: 22, fontWeight: 'bold', color: '#1E4FA8' }}&gt;&#10;                    Key 零前端接触&#10;                &lt;/Text&gt;&#10;                &lt;Text style={{ fontSize: 13, color: '#4A5568', marginTop: 4 }}&gt;&#10;                    只在服务端环境变量 · X-Auth-Token 双通道&#10;                &lt;/Text&gt;&#10;            &lt;/Box&gt;&#10;        &lt;/Box&gt;&#10;    &lt;/Box&gt;&#10;    {/* ===== 下部：三级降级三卡 ===== */}&#10;    &lt;Box style={{ position: 'absolute', top: 402, left: 0, width: '1280px', height: 254, padding: '0 40px', boxSizing: 'border-box', flexDirection: 'row', gap: 20 }}&gt;&#10;        &lt;Box style={{ flex: 1, background: '#F7F9FC', border: '1px solid #D6DCE5', borderTop: '3px solid #1E4FA8', padding: '14px 18px' }}&gt;&#10;            &lt;Text style={{ fontSize: 17, fontWeight: 'bold', color: '#0E3F8C' }}&gt;三级降级链&lt;/Text&gt;&#10;            &lt;Text style={{ fontSize: 13.5, color: '#4A5568', marginTop: 8, lineHeight: 1.7 }}&gt;&#10;                ① 后端真实模型（GLM SSE 流式）&lt;br /&gt;② 浏览器直连 Key（sessionStorage 逃生通道）&lt;br /&gt;③ 本地 Mock（无网也能完整走完流程）&#10;            &lt;/Text&gt;&#10;        &lt;/Box&gt;&#10;        &lt;Box style={{ flex: 1, background: '#F7F9FC', border: '1px solid #D6DCE5', borderTop: '3px solid #1E4FA8', padding: '14px 18px' }}&gt;&#10;            &lt;Text style={{ fontSize: 17, fontWeight: 'bold', color: '#0E3F8C' }}&gt;回退触发条件&lt;/Text&gt;&#10;            &lt;Text style={{ fontSize: 13.5, color: '#4A5568', marginTop: 8, lineHeight: 1.7 }}&gt;&#10;                后端 5xx / 超时 / 完全无网，均自动向下切换；评分与检索策略三级一致——赛场网络抖动不打断演示。&#10;            &lt;/Text&gt;&#10;        &lt;/Box&gt;&#10;        &lt;Box style={{ width: 380, background: '#0E3F8C', padding: '14px 18px' }}&gt;&#10;            &lt;Text style={{ fontSize: 17, fontWeight: 'bold', color: '#FFFFFF' }}&gt;现场看什么&lt;/Text&gt;&#10;            &lt;Text style={{ fontSize: 13.5, color: '#D7E3F5', marginTop: 8, lineHeight: 1.7 }}&gt;&#10;                演示视频展示的是真实 API 请求与响应、错误处理与降级机制——远比一个完美的 Mock 界面更有说服力。&#10;            &lt;/Text&gt;&#10;        &lt;/Box&gt;&#10;    &lt;/Box&gt;&#10;    {/* ===== 母版：页脚 ===== */}&#10;    &lt;Box style={{ position: 'absolute', bottom: 0, left: 0, width: '1280px', height: 64, borderTop: '1px solid #E5E7EB', flexDirection: 'row', alignItems: 'center', justifyContent: 'space-between', padding: '0 40px', boxSizing: 'border-box' }}&gt;&#10;        &lt;Text style={{ fontSize: 13, color: '#8B97A8' }}&gt;&#10;            面镜 FutureMirror · 功能演示&#10;        &lt;/Text&gt;&#10;        &lt;Text style={{ fontSize: 14, color: '#1E4FA8', fontWeight: 'bold' }}&gt;&#10;            13 / 16&#10;        &lt;/Text&gt;&#10;    &lt;/Box&gt;&#10;&lt;/Slide&gt;&#10;"/>
+        <p:cNvPr id="140" name="" descr="&lt;Slide style={{&#10;    width: '1280px',&#10;    height: '720px',&#10;    background: '#FFFFFF',&#10;    padding: 0,&#10;    position: 'relative',&#10;    overflow: 'hidden',&#10;    fontFamily: &quot;'Noto Sans SC','Source Han Sans SC','PingFang SC','Microsoft YaHei',sans-serif&quot;,&#10;}}&gt;&#10;    {/* ===== 母版：A3 深蓝顶条 ===== */}&#10;    &lt;Box style={{ position: 'absolute', top: 0, left: 0, width: '1280px', height: 84, background: '#0E3F8C' }}&gt;&#10;        &lt;svg style={{ position: 'absolute', right: 210, top: 18, opacity: 0.16 }} width={150} height={48} viewBox='0 0 150 48'&gt;&#10;            &lt;g stroke='#FFFFFF' strokeWidth='1.2' fill='none'&gt;&#10;                &lt;path d='M2 24 L28 24 L38 10 L74 10 L84 24 L120 24 L130 38 L148 38' /&gt;&#10;                &lt;path d='M38 10 L38 38 L74 38' /&gt;&#10;                &lt;circle cx='28' cy='24' r='3' fill='#FFFFFF' /&gt;&#10;                &lt;circle cx='84' cy='24' r='3' fill='#FFFFFF' /&gt;&#10;            &lt;/g&gt;&#10;        &lt;/svg&gt;&#10;        &lt;Box style={{ position: 'absolute', left: 40, top: 0, height: 84, justifyContent: 'center' }}&gt;&#10;            &lt;Text style={{ fontSize: 26, fontWeight: 'bold', color: '#FFFFFF' }}&gt;&#10;                真实完成度：线上 SSE 流式闭环，不是 Mock 界面&#10;            &lt;/Text&gt;&#10;        &lt;/Box&gt;&#10;        &lt;Box style={{ position: 'absolute', right: 40, top: 24, background: '#1E4FA8', padding: '7px 16px', borderRadius: 14 }}&gt;&#10;            &lt;Text style={{ fontSize: 14, color: '#FFFFFF', letterSpacing: 1 }}&gt;&#10;                03 真实完成度&#10;            &lt;/Text&gt;&#10;        &lt;/Box&gt;&#10;    &lt;/Box&gt;&#10;    {/* ===== 上部：真实 SSE 事件流 + 三项线上验证 ===== */}&#10;    &lt;Box style={{ position: 'absolute', top: 84, left: 0, width: '1280px', height: 318, padding: '20px 40px 0 40px', boxSizing: 'border-box', flexDirection: 'row', gap: 24 }}&gt;&#10;        {/* 左：SSE 事件协议代码块 */}&#10;        &lt;Box style={{ width: 772 }}&gt;&#10;            &lt;Text style={{ fontSize: 15, fontWeight: 'bold', color: '#0E3F8C', letterSpacing: 1 }}&gt;&#10;                /api/chat/stream 事件协议（线上实测节选）&#10;            &lt;/Text&gt;&#10;            &lt;Box style={{ marginTop: 10 }}&gt;&#10;                &lt;CodeBlock&#10;                    code={`event: agent     data: {&quot;id&quot;:&quot;pressure&quot;,&quot;name&quot;:&quot;压力面试官&quot;}&#10;event: thinking  data: {&quot;text&quot;:&quot;正在组织第 3 个问题…&quot;}&#10;event: delta     data: {&quot;text&quot;:&quot;你提到订单服务——&quot;}&#10;event: delta     data: {&quot;text&quot;:&quot;峰值 QPS 是多少？&quot;}&#10;event: observer  data: {&quot;note&quot;:&quot;结构完整但缺量化&quot;}&#10;event: done      data: {&quot;finish_reason&quot;:&quot;stop&quot;,&quot;usage&quot;:true}`}&#10;                    language='javascript'&#10;                    width={772}&#10;                    fontSize={12.5}&#10;                    theme='github-light'&#10;                /&gt;&#10;            &lt;/Box&gt;&#10;            &lt;Text style={{ fontSize: 12.5, color: '#8B97A8', marginTop: 8, lineHeight: 1.5 }}&gt;&#10;                线上镜像实测：真实流式输出含 finish_reason 与 usage；GitHub Pages 跨域通道三头齐全，内容一致。&#10;            &lt;/Text&gt;&#10;        &lt;/Box&gt;&#10;        {/* 右：三项线上验证结果 */}&#10;        &lt;Box style={{ flex: 1, flexDirection: 'column', gap: 12 }}&gt;&#10;            &lt;Box style={{ flex: 1, background: '#E8EFF8', padding: '12px 16px', justifyContent: 'center' }}&gt;&#10;                &lt;Text style={{ fontSize: 22, fontWeight: 'bold', color: '#1E4FA8' }}&gt;&#10;                    llm_ready: true&#10;                &lt;/Text&gt;&#10;                &lt;Text style={{ fontSize: 13, color: '#4A5568', marginTop: 4 }}&gt;&#10;                    /api/health 线上返回 · 模型 glm-4-flash&#10;                &lt;/Text&gt;&#10;            &lt;/Box&gt;&#10;            &lt;Box style={{ flex: 1, background: '#E8EFF8', padding: '12px 16px', justifyContent: 'center' }}&gt;&#10;                &lt;Text style={{ fontSize: 22, fontWeight: 'bold', color: '#1E4FA8' }}&gt;&#10;                    报告总分 78&#10;                &lt;/Text&gt;&#10;                &lt;Text style={{ fontSize: 13, color: '#4A5568', marginTop: 4 }}&gt;&#10;                    登录 → 建会话 → GLM 提问 → sync → 服务端报告&#10;                &lt;/Text&gt;&#10;            &lt;/Box&gt;&#10;            &lt;Box style={{ flex: 1, background: '#E8EFF8', padding: '12px 16px', justifyContent: 'center' }}&gt;&#10;                &lt;Text style={{ fontSize: 22, fontWeight: 'bold', color: '#1E4FA8' }}&gt;&#10;                    Key 零前端接触&#10;                &lt;/Text&gt;&#10;                &lt;Text style={{ fontSize: 13, color: '#4A5568', marginTop: 4 }}&gt;&#10;                    只在服务端环境变量 · X-Auth-Token 双通道&#10;                &lt;/Text&gt;&#10;            &lt;/Box&gt;&#10;        &lt;/Box&gt;&#10;    &lt;/Box&gt;&#10;    {/* ===== 下部：三级降级三卡 ===== */}&#10;    &lt;Box style={{ position: 'absolute', top: 402, left: 0, width: '1280px', height: 254, padding: '0 40px', boxSizing: 'border-box', flexDirection: 'row', gap: 20 }}&gt;&#10;        &lt;Box style={{ flex: 1, background: '#F7F9FC', border: '1px solid #D6DCE5', borderTop: '3px solid #1E4FA8', padding: '14px 18px' }}&gt;&#10;            &lt;Text style={{ fontSize: 17, fontWeight: 'bold', color: '#0E3F8C' }}&gt;三级降级链&lt;/Text&gt;&#10;            &lt;Text style={{ fontSize: 13.5, color: '#4A5568', marginTop: 8, lineHeight: 1.7 }}&gt;&#10;                ① 后端真实模型（GLM SSE 流式）&lt;br /&gt;② 浏览器直连 Key（sessionStorage 逃生通道）&lt;br /&gt;③ 本地 Mock（无网也能完整走完流程）&#10;            &lt;/Text&gt;&#10;        &lt;/Box&gt;&#10;        &lt;Box style={{ flex: 1, background: '#F7F9FC', border: '1px solid #D6DCE5', borderTop: '3px solid #1E4FA8', padding: '14px 18px' }}&gt;&#10;            &lt;Text style={{ fontSize: 17, fontWeight: 'bold', color: '#0E3F8C' }}&gt;回退触发条件&lt;/Text&gt;&#10;            &lt;Text style={{ fontSize: 13.5, color: '#4A5568', marginTop: 8, lineHeight: 1.7 }}&gt;&#10;                后端 5xx / 超时 / 完全无网，均自动向下切换；评分与检索策略三级一致——现场网络抖动不打断演示。&#10;            &lt;/Text&gt;&#10;        &lt;/Box&gt;&#10;        &lt;Box style={{ width: 380, background: '#0E3F8C', padding: '14px 18px' }}&gt;&#10;            &lt;Text style={{ fontSize: 17, fontWeight: 'bold', color: '#FFFFFF' }}&gt;现场看什么&lt;/Text&gt;&#10;            &lt;Text style={{ fontSize: 13.5, color: '#D7E3F5', marginTop: 8, lineHeight: 1.7 }}&gt;&#10;                演示视频展示的是真实 API 请求与响应、错误处理与降级机制——远比一个完美的 Mock 界面更有说服力。&#10;            &lt;/Text&gt;&#10;        &lt;/Box&gt;&#10;    &lt;/Box&gt;&#10;    {/* ===== 母版：页脚 ===== */}&#10;    &lt;Box style={{ position: 'absolute', bottom: 0, left: 0, width: '1280px', height: 64, borderTop: '1px solid #E5E7EB', flexDirection: 'row', alignItems: 'center', justifyContent: 'space-between', padding: '0 40px', boxSizing: 'border-box' }}&gt;&#10;        &lt;Text style={{ fontSize: 13, color: '#8B97A8' }}&gt;&#10;            面镜 FutureMirror · 功能演示&#10;        &lt;/Text&gt;&#10;        &lt;Text style={{ fontSize: 14, color: '#1E4FA8', fontWeight: 'bold' }}&gt;&#10;            13 / 16&#10;        &lt;/Text&gt;&#10;    &lt;/Box&gt;&#10;&lt;/Slide&gt;&#10;"/>
         <p:cNvGrpSpPr/>
         <p:nvPr/>
       </p:nvGrpSpPr>
@@ -9413,7 +9413,7 @@
                 <a:latin typeface="Noto Sans SC"/>
                 <a:ea typeface="Noto Sans SC"/>
               </a:rPr>
-              <a:t>完全无网，均自动向下切换；评分与检索策略三级一致——赛场网络抖动不打断演示。</a:t>
+              <a:t>完全无网，均自动向下切换；评分与检索策略三级一致——现场网络抖动不打断演示。</a:t>
             </a:r>
             <a:endParaRPr/>
           </a:p>
@@ -9695,7 +9695,7 @@
   <p:cSld>
     <p:spTree>
       <p:nvGrpSpPr>
-        <p:cNvPr id="174" name="" descr="&lt;Slide style={{&#10;    width: '1280px',&#10;    height: '720px',&#10;    background: '#FFFFFF',&#10;    padding: 0,&#10;    position: 'relative',&#10;    overflow: 'hidden',&#10;    fontFamily: &quot;'Noto Sans SC','Source Han Sans SC','PingFang SC','Microsoft YaHei',sans-serif&quot;,&#10;}}&gt;&#10;    {/* ===== 母版：A3 深蓝顶条 ===== */}&#10;    &lt;Box style={{ position: 'absolute', top: 0, left: 0, width: '1280px', height: 84, background: '#0E3F8C' }}&gt;&#10;        &lt;svg style={{ position: 'absolute', right: 210, top: 18, opacity: 0.16 }} width={150} height={48} viewBox='0 0 150 48'&gt;&#10;            &lt;g stroke='#FFFFFF' strokeWidth='1.2' fill='none'&gt;&#10;                &lt;path d='M2 24 L28 24 L38 10 L74 10 L84 24 L120 24 L130 38 L148 38' /&gt;&#10;                &lt;path d='M38 10 L38 38 L74 38' /&gt;&#10;                &lt;circle cx='28' cy='24' r='3' fill='#FFFFFF' /&gt;&#10;                &lt;circle cx='84' cy='24' r='3' fill='#FFFFFF' /&gt;&#10;            &lt;/g&gt;&#10;        &lt;/svg&gt;&#10;        &lt;Box style={{ position: 'absolute', left: 40, top: 0, height: 84, justifyContent: 'center' }}&gt;&#10;            &lt;Text style={{ fontSize: 26, fontWeight: 'bold', color: '#FFFFFF' }}&gt;&#10;                工程质量：全量回归 + 四渠道发布流水线&#10;            &lt;/Text&gt;&#10;        &lt;/Box&gt;&#10;        &lt;Box style={{ position: 'absolute', right: 40, top: 24, background: '#1E4FA8', padding: '7px 16px', borderRadius: 14 }}&gt;&#10;            &lt;Text style={{ fontSize: 14, color: '#FFFFFF', letterSpacing: 1 }}&gt;&#10;                03 真实完成度&#10;            &lt;/Text&gt;&#10;        &lt;/Box&gt;&#10;    &lt;/Box&gt;&#10;    {/* ===== 左侧标题栏 ===== */}&#10;    &lt;Box style={{ position: 'absolute', top: 84, left: 0, width: 356, height: 572, background: '#0E3F8C', padding: '30px 32px 26px 40px', boxSizing: 'border-box', flexDirection: 'column' }}&gt;&#10;        &lt;Text style={{ fontSize: 14, color: '#9FB9E4', letterSpacing: 4 }}&gt;&#10;            测试与发布&#10;        &lt;/Text&gt;&#10;        &lt;Text style={{ fontSize: 30, fontWeight: 'bold', color: '#FFFFFF', marginTop: 14, lineHeight: 1.35 }}&gt;&#10;            全量回归纪律&#10;        &lt;/Text&gt;&#10;        &lt;Box style={{ width: 48, height: 4, background: '#FFC107', marginTop: 18 }} /&gt;&#10;        &lt;Text style={{ fontSize: 15, color: '#D7E3F5', lineHeight: 1.85, marginTop: 18 }}&gt;&#10;            每次改动必须全绿才提交——测试不是演示后的补丁，而是改动发生时的第一道闸门。能复现的工程纪律，是「团队可完整解释全部代码」的底座。&#10;        &lt;/Text&gt;&#10;        &lt;Box style={{ flex: 1 }} /&gt;&#10;        &lt;Box style={{ background: '#1E4FA8', padding: '14px 16px' }}&gt;&#10;            &lt;Text style={{ fontSize: 15, fontWeight: 'bold', color: '#FFFFFF' }}&gt;&#10;                发布链&#10;            &lt;/Text&gt;&#10;            &lt;Text style={{ fontSize: 14, color: '#D7E3F5', marginTop: 6, lineHeight: 1.6 }}&gt;&#10;                repo → Pages → 镜像 → Release&lt;br /&gt;每次变更后逐一核验&#10;            &lt;/Text&gt;&#10;        &lt;/Box&gt;&#10;    &lt;/Box&gt;&#10;    {/* ===== 右侧测试矩阵 + 发布链 ===== */}&#10;    &lt;Box style={{ position: 'absolute', top: 84, left: 356, width: 924, height: 572, padding: '24px 36px', boxSizing: 'border-box' }}&gt;&#10;        &lt;Text style={{ fontSize: 16, fontWeight: 'bold', color: '#0E3F8C', letterSpacing: 1 }}&gt;&#10;            测试矩阵（全部可当场重跑）&#10;        &lt;/Text&gt;&#10;        &lt;Box style={{ marginTop: 12, height: 252 }}&gt;&#10;            &lt;Table&#10;                style={{ width: '100%', height: 252 }}&#10;                defaultTextStyle={{ fontSize: 13.5, textAlign: 'center', color: '#1A2230' }}&#10;                defaultCellStyle={{&#10;                    border: {&#10;                        left: { width: 1, color: '#D6DCE5' },&#10;                        right: { width: 1, color: '#D6DCE5' },&#10;                        top: { width: 1, color: '#D6DCE5' },&#10;                        bottom: { width: 1, color: '#D6DCE5' },&#10;                    },&#10;                }}&#10;                cells={[&#10;                    [&#10;                        { text: '层', textStyle: { bold: true, color: '#FFFFFF' }, cellStyle: { background: { color: '#0E3F8C' } } },&#10;                        { text: '规模', textStyle: { bold: true, color: '#FFFFFF' }, cellStyle: { background: { color: '#0E3F8C' } } },&#10;                        { text: '覆盖内容', textStyle: { bold: true, color: '#FFFFFF' }, cellStyle: { background: { color: '#0E3F8C' } } },&#10;                    ],&#10;                    [&#10;                        { text: '前端', textStyle: { bold: true, color: '#0E3F8C' } },&#10;                        { text: '22 套 · 1513 断言', textStyle: { bold: true, color: '#1E4FA8' } },&#10;                        { text: 'jsdom 端到端（含 RAG 重排专项 9 条）' },&#10;                    ],&#10;                    [&#10;                        { text: '后端', textStyle: { bold: true, color: '#0E3F8C' }, cellStyle: { background: { color: '#F7F9FC' } } },&#10;                        { text: '37 项 pytest', textStyle: { bold: true, color: '#1E4FA8' }, cellStyle: { background: { color: '#F7F9FC' } } },&#10;                        { text: '含评分校准不变量 11 条（单调性 / 维度分离 / 确定性）', cellStyle: { background: { color: '#F7F9FC' } } },&#10;                    ],&#10;                    [&#10;                        { text: '单元', textStyle: { bold: true, color: '#0E3F8C' } },&#10;                        { text: '217 项 Node', textStyle: { bold: true, color: '#1E4FA8' } },&#10;                        { text: 'store / 用户系统 / 简历 / 报告逻辑' },&#10;                    ],&#10;                    [&#10;                        { text: '对拍', textStyle: { bold: true, color: '#0E3F8C' }, cellStyle: { background: { color: '#F7F9FC' } } },&#10;                        { text: '5/5 一致', textStyle: { bold: true, color: '#1E4FA8' }, cellStyle: { background: { color: '#F7F9FC' } } },&#10;                        { text: '双引擎评分共用同一份标准样本逐维度比对', cellStyle: { background: { color: '#F7F9FC' } } },&#10;                    ],&#10;                    [&#10;                        { text: '规范', textStyle: { bold: true, color: '#0E3F8C' } },&#10;                        { text: 'lint + 类型', textStyle: { bold: true, color: '#1E4FA8' } },&#10;                        { text: 'ESLint 0 error · Prettier 全绿 · JSDoc' },&#10;                    ],&#10;                ]}&#10;            /&gt;&#10;        &lt;/Box&gt;&#10;        {/* 发布链节点串 */}&#10;        &lt;Text style={{ fontSize: 16, fontWeight: 'bold', color: '#0E3F8C', letterSpacing: 1, marginTop: 20 }}&gt;&#10;            四渠道发布流水线&#10;        &lt;/Text&gt;&#10;        &lt;Box style={{ flexDirection: 'row', alignItems: 'center', gap: 10, marginTop: 12 }}&gt;&#10;            &lt;Box style={{ flex: 1, background: '#E8EFF8', border: '1px solid #C9D8F0', padding: '12px 8px', alignItems: 'center' }}&gt;&#10;                &lt;Text style={{ fontSize: 15, fontWeight: 'bold', color: '#0E3F8C' }}&gt;repo (main)&lt;/Text&gt;&#10;                &lt;Text style={{ fontSize: 12, color: '#4A5568', marginTop: 3 }}&gt;代码与文档单一事实源&lt;/Text&gt;&#10;            &lt;/Box&gt;&#10;            &lt;FAIcon name='arrow-right' style={{ fill: '#1E4FA8', width: 20, height: 20 }} /&gt;&#10;            &lt;Box style={{ flex: 1, background: '#E8EFF8', border: '1px solid #C9D8F0', padding: '12px 8px', alignItems: 'center' }}&gt;&#10;                &lt;Text style={{ fontSize: 15, fontWeight: 'bold', color: '#0E3F8C' }}&gt;GitHub Pages&lt;/Text&gt;&#10;                &lt;Text style={{ fontSize: 12, color: '#4A5568', marginTop: 3 }}&gt;海外演示入口&lt;/Text&gt;&#10;            &lt;/Box&gt;&#10;            &lt;FAIcon name='arrow-right' style={{ fill: '#1E4FA8', width: 20, height: 20 }} /&gt;&#10;            &lt;Box style={{ flex: 1, background: '#E8EFF8', border: '1px solid #C9D8F0', padding: '12px 8px', alignItems: 'center' }}&gt;&#10;                &lt;Text style={{ fontSize: 15, fontWeight: 'bold', color: '#0E3F8C' }}&gt;国内镜像&lt;/Text&gt;&#10;                &lt;Text style={{ fontSize: 12, color: '#4A5568', marginTop: 3 }}&gt;同源后端 · 赛场直连&lt;/Text&gt;&#10;            &lt;/Box&gt;&#10;            &lt;FAIcon name='arrow-right' style={{ fill: '#1E4FA8', width: 20, height: 20 }} /&gt;&#10;            &lt;Box style={{ flex: 1, background: '#E8EFF8', border: '1px solid #C9D8F0', padding: '12px 8px', alignItems: 'center' }}&gt;&#10;                &lt;Text style={{ fontSize: 15, fontWeight: 'bold', color: '#0E3F8C' }}&gt;Release 附件&lt;/Text&gt;&#10;                &lt;Text style={{ fontSize: 12, color: '#4A5568', marginTop: 3 }}&gt;demo / 文档 / PDF / 日志&lt;/Text&gt;&#10;            &lt;/Box&gt;&#10;        &lt;/Box&gt;&#10;    &lt;/Box&gt;&#10;    {/* ===== 母版：页脚 ===== */}&#10;    &lt;Box style={{ position: 'absolute', bottom: 0, left: 0, width: '1280px', height: 64, borderTop: '1px solid #E5E7EB', flexDirection: 'row', alignItems: 'center', justifyContent: 'space-between', padding: '0 40px', boxSizing: 'border-box' }}&gt;&#10;        &lt;Text style={{ fontSize: 13, color: '#8B97A8' }}&gt;&#10;            面镜 FutureMirror · 功能演示&#10;        &lt;/Text&gt;&#10;        &lt;Text style={{ fontSize: 14, color: '#1E4FA8', fontWeight: 'bold' }}&gt;&#10;            14 / 16&#10;        &lt;/Text&gt;&#10;    &lt;/Box&gt;&#10;&lt;/Slide&gt;&#10;"/>
+        <p:cNvPr id="174" name="" descr="&lt;Slide style={{&#10;    width: '1280px',&#10;    height: '720px',&#10;    background: '#FFFFFF',&#10;    padding: 0,&#10;    position: 'relative',&#10;    overflow: 'hidden',&#10;    fontFamily: &quot;'Noto Sans SC','Source Han Sans SC','PingFang SC','Microsoft YaHei',sans-serif&quot;,&#10;}}&gt;&#10;    {/* ===== 母版：A3 深蓝顶条 ===== */}&#10;    &lt;Box style={{ position: 'absolute', top: 0, left: 0, width: '1280px', height: 84, background: '#0E3F8C' }}&gt;&#10;        &lt;svg style={{ position: 'absolute', right: 210, top: 18, opacity: 0.16 }} width={150} height={48} viewBox='0 0 150 48'&gt;&#10;            &lt;g stroke='#FFFFFF' strokeWidth='1.2' fill='none'&gt;&#10;                &lt;path d='M2 24 L28 24 L38 10 L74 10 L84 24 L120 24 L130 38 L148 38' /&gt;&#10;                &lt;path d='M38 10 L38 38 L74 38' /&gt;&#10;                &lt;circle cx='28' cy='24' r='3' fill='#FFFFFF' /&gt;&#10;                &lt;circle cx='84' cy='24' r='3' fill='#FFFFFF' /&gt;&#10;            &lt;/g&gt;&#10;        &lt;/svg&gt;&#10;        &lt;Box style={{ position: 'absolute', left: 40, top: 0, height: 84, justifyContent: 'center' }}&gt;&#10;            &lt;Text style={{ fontSize: 26, fontWeight: 'bold', color: '#FFFFFF' }}&gt;&#10;                工程质量：全量回归 + 四渠道发布流水线&#10;            &lt;/Text&gt;&#10;        &lt;/Box&gt;&#10;        &lt;Box style={{ position: 'absolute', right: 40, top: 24, background: '#1E4FA8', padding: '7px 16px', borderRadius: 14 }}&gt;&#10;            &lt;Text style={{ fontSize: 14, color: '#FFFFFF', letterSpacing: 1 }}&gt;&#10;                03 真实完成度&#10;            &lt;/Text&gt;&#10;        &lt;/Box&gt;&#10;    &lt;/Box&gt;&#10;    {/* ===== 左侧标题栏 ===== */}&#10;    &lt;Box style={{ position: 'absolute', top: 84, left: 0, width: 356, height: 572, background: '#0E3F8C', padding: '30px 32px 26px 40px', boxSizing: 'border-box', flexDirection: 'column' }}&gt;&#10;        &lt;Text style={{ fontSize: 14, color: '#9FB9E4', letterSpacing: 4 }}&gt;&#10;            测试与发布&#10;        &lt;/Text&gt;&#10;        &lt;Text style={{ fontSize: 30, fontWeight: 'bold', color: '#FFFFFF', marginTop: 14, lineHeight: 1.35 }}&gt;&#10;            全量回归纪律&#10;        &lt;/Text&gt;&#10;        &lt;Box style={{ width: 48, height: 4, background: '#FFC107', marginTop: 18 }} /&gt;&#10;        &lt;Text style={{ fontSize: 15, color: '#D7E3F5', lineHeight: 1.85, marginTop: 18 }}&gt;&#10;            每次改动必须全绿才提交——测试不是演示后的补丁，而是改动发生时的第一道闸门。能复现的工程纪律，是「团队可完整解释全部代码」的底座。&#10;        &lt;/Text&gt;&#10;        &lt;Box style={{ flex: 1 }} /&gt;&#10;        &lt;Box style={{ background: '#1E4FA8', padding: '14px 16px' }}&gt;&#10;            &lt;Text style={{ fontSize: 15, fontWeight: 'bold', color: '#FFFFFF' }}&gt;&#10;                发布链&#10;            &lt;/Text&gt;&#10;            &lt;Text style={{ fontSize: 14, color: '#D7E3F5', marginTop: 6, lineHeight: 1.6 }}&gt;&#10;                repo → Pages → 镜像 → Release&lt;br /&gt;每次变更后逐一核验&#10;            &lt;/Text&gt;&#10;        &lt;/Box&gt;&#10;    &lt;/Box&gt;&#10;    {/* ===== 右侧测试矩阵 + 发布链 ===== */}&#10;    &lt;Box style={{ position: 'absolute', top: 84, left: 356, width: 924, height: 572, padding: '24px 36px', boxSizing: 'border-box' }}&gt;&#10;        &lt;Text style={{ fontSize: 16, fontWeight: 'bold', color: '#0E3F8C', letterSpacing: 1 }}&gt;&#10;            测试矩阵（全部可当场重跑）&#10;        &lt;/Text&gt;&#10;        &lt;Box style={{ marginTop: 12, height: 252 }}&gt;&#10;            &lt;Table&#10;                style={{ width: '100%', height: 252 }}&#10;                defaultTextStyle={{ fontSize: 13.5, textAlign: 'center', color: '#1A2230' }}&#10;                defaultCellStyle={{&#10;                    border: {&#10;                        left: { width: 1, color: '#D6DCE5' },&#10;                        right: { width: 1, color: '#D6DCE5' },&#10;                        top: { width: 1, color: '#D6DCE5' },&#10;                        bottom: { width: 1, color: '#D6DCE5' },&#10;                    },&#10;                }}&#10;                cells={[&#10;                    [&#10;                        { text: '层', textStyle: { bold: true, color: '#FFFFFF' }, cellStyle: { background: { color: '#0E3F8C' } } },&#10;                        { text: '规模', textStyle: { bold: true, color: '#FFFFFF' }, cellStyle: { background: { color: '#0E3F8C' } } },&#10;                        { text: '覆盖内容', textStyle: { bold: true, color: '#FFFFFF' }, cellStyle: { background: { color: '#0E3F8C' } } },&#10;                    ],&#10;                    [&#10;                        { text: '前端', textStyle: { bold: true, color: '#0E3F8C' } },&#10;                        { text: '22 套 · 1513 断言', textStyle: { bold: true, color: '#1E4FA8' } },&#10;                        { text: 'jsdom 端到端（含 RAG 重排专项 9 条）' },&#10;                    ],&#10;                    [&#10;                        { text: '后端', textStyle: { bold: true, color: '#0E3F8C' }, cellStyle: { background: { color: '#F7F9FC' } } },&#10;                        { text: '37 项 pytest', textStyle: { bold: true, color: '#1E4FA8' }, cellStyle: { background: { color: '#F7F9FC' } } },&#10;                        { text: '含评分校准不变量 11 条（单调性 / 维度分离 / 确定性）', cellStyle: { background: { color: '#F7F9FC' } } },&#10;                    ],&#10;                    [&#10;                        { text: '单元', textStyle: { bold: true, color: '#0E3F8C' } },&#10;                        { text: '217 项 Node', textStyle: { bold: true, color: '#1E4FA8' } },&#10;                        { text: 'store / 用户系统 / 简历 / 报告逻辑' },&#10;                    ],&#10;                    [&#10;                        { text: '对拍', textStyle: { bold: true, color: '#0E3F8C' }, cellStyle: { background: { color: '#F7F9FC' } } },&#10;                        { text: '5/5 一致', textStyle: { bold: true, color: '#1E4FA8' }, cellStyle: { background: { color: '#F7F9FC' } } },&#10;                        { text: '双引擎评分共用同一份标准样本逐维度比对', cellStyle: { background: { color: '#F7F9FC' } } },&#10;                    ],&#10;                    [&#10;                        { text: '规范', textStyle: { bold: true, color: '#0E3F8C' } },&#10;                        { text: 'lint + 类型', textStyle: { bold: true, color: '#1E4FA8' } },&#10;                        { text: 'ESLint 0 error · Prettier 全绿 · JSDoc' },&#10;                    ],&#10;                ]}&#10;            /&gt;&#10;        &lt;/Box&gt;&#10;        {/* 发布链节点串 */}&#10;        &lt;Text style={{ fontSize: 16, fontWeight: 'bold', color: '#0E3F8C', letterSpacing: 1, marginTop: 20 }}&gt;&#10;            四渠道发布流水线&#10;        &lt;/Text&gt;&#10;        &lt;Box style={{ flexDirection: 'row', alignItems: 'center', gap: 10, marginTop: 12 }}&gt;&#10;            &lt;Box style={{ flex: 1, background: '#E8EFF8', border: '1px solid #C9D8F0', padding: '12px 8px', alignItems: 'center' }}&gt;&#10;                &lt;Text style={{ fontSize: 15, fontWeight: 'bold', color: '#0E3F8C' }}&gt;repo (main)&lt;/Text&gt;&#10;                &lt;Text style={{ fontSize: 12, color: '#4A5568', marginTop: 3 }}&gt;代码与文档单一事实源&lt;/Text&gt;&#10;            &lt;/Box&gt;&#10;            &lt;FAIcon name='arrow-right' style={{ fill: '#1E4FA8', width: 20, height: 20 }} /&gt;&#10;            &lt;Box style={{ flex: 1, background: '#E8EFF8', border: '1px solid #C9D8F0', padding: '12px 8px', alignItems: 'center' }}&gt;&#10;                &lt;Text style={{ fontSize: 15, fontWeight: 'bold', color: '#0E3F8C' }}&gt;GitHub Pages&lt;/Text&gt;&#10;                &lt;Text style={{ fontSize: 12, color: '#4A5568', marginTop: 3 }}&gt;海外演示入口&lt;/Text&gt;&#10;            &lt;/Box&gt;&#10;            &lt;FAIcon name='arrow-right' style={{ fill: '#1E4FA8', width: 20, height: 20 }} /&gt;&#10;            &lt;Box style={{ flex: 1, background: '#E8EFF8', border: '1px solid #C9D8F0', padding: '12px 8px', alignItems: 'center' }}&gt;&#10;                &lt;Text style={{ fontSize: 15, fontWeight: 'bold', color: '#0E3F8C' }}&gt;国内镜像&lt;/Text&gt;&#10;                &lt;Text style={{ fontSize: 12, color: '#4A5568', marginTop: 3 }}&gt;同源后端 · 现场直连&lt;/Text&gt;&#10;            &lt;/Box&gt;&#10;            &lt;FAIcon name='arrow-right' style={{ fill: '#1E4FA8', width: 20, height: 20 }} /&gt;&#10;            &lt;Box style={{ flex: 1, background: '#E8EFF8', border: '1px solid #C9D8F0', padding: '12px 8px', alignItems: 'center' }}&gt;&#10;                &lt;Text style={{ fontSize: 15, fontWeight: 'bold', color: '#0E3F8C' }}&gt;Release 附件&lt;/Text&gt;&#10;                &lt;Text style={{ fontSize: 12, color: '#4A5568', marginTop: 3 }}&gt;demo / 文档 / PDF / 日志&lt;/Text&gt;&#10;            &lt;/Box&gt;&#10;        &lt;/Box&gt;&#10;    &lt;/Box&gt;&#10;    {/* ===== 母版：页脚 ===== */}&#10;    &lt;Box style={{ position: 'absolute', bottom: 0, left: 0, width: '1280px', height: 64, borderTop: '1px solid #E5E7EB', flexDirection: 'row', alignItems: 'center', justifyContent: 'space-between', padding: '0 40px', boxSizing: 'border-box' }}&gt;&#10;        &lt;Text style={{ fontSize: 13, color: '#8B97A8' }}&gt;&#10;            面镜 FutureMirror · 功能演示&#10;        &lt;/Text&gt;&#10;        &lt;Text style={{ fontSize: 14, color: '#1E4FA8', fontWeight: 'bold' }}&gt;&#10;            14 / 16&#10;        &lt;/Text&gt;&#10;    &lt;/Box&gt;&#10;&lt;/Slide&gt;&#10;"/>
         <p:cNvGrpSpPr/>
         <p:nvPr/>
       </p:nvGrpSpPr>
@@ -11454,7 +11454,7 @@
                 <a:latin typeface="Noto Sans SC"/>
                 <a:ea typeface="Noto Sans SC"/>
               </a:rPr>
-              <a:t>赛场直连</a:t>
+              <a:t>现场直连</a:t>
             </a:r>
             <a:endParaRPr/>
           </a:p>
@@ -13089,7 +13089,7 @@
   <p:cSld>
     <p:spTree>
       <p:nvGrpSpPr>
-        <p:cNvPr id="249" name="" descr="&lt;Slide style={{&#10;    width: '1280px',&#10;    height: '720px',&#10;    background: '#FFFFFF',&#10;    padding: 0,&#10;    position: 'relative',&#10;    overflow: 'hidden',&#10;    fontFamily: &quot;'Noto Sans SC','Source Han Sans SC','PingFang SC','Microsoft YaHei',sans-serif&quot;,&#10;}}&gt;&#10;    {/* 顶部深蓝条（呼应封面） */}&#10;    &lt;Box style={{ position: 'absolute', top: 0, left: 0, width: '720', height: 14, background: '#0E3F8C' }} /&gt;&#10;    {/* 左：骑线文字入口区 */}&#10;    &lt;Box style={{ position: 'absolute', top: 0, left: 0, width: 720, height: 720, padding: '58px 56px 0 64px', boxSizing: 'border-box' }}&gt;&#10;        &lt;Text style={{ fontSize: 15, color: '#3D7BD9', letterSpacing: 4, fontWeight: 'bold' }}&gt;&#10;            04 现场验证 · LIVE VERIFICATION&#10;        &lt;/Text&gt;&#10;        &lt;Text style={{ fontSize: 46, fontWeight: 'bold', color: '#0E3F8C', marginTop: 12 }}&gt;&#10;            现在就可以验证&#10;        &lt;/Text&gt;&#10;        &lt;Box style={{ flexDirection: 'column', gap: 14, marginTop: 28 }}&gt;&#10;            &lt;Box style={{ background: '#F7F9FC', border: '1px solid #D6DCE5', padding: '15px 18px', flexDirection: 'row', alignItems: 'center', gap: 16 }}&gt;&#10;                &lt;Box style={{ width: 40, height: 40, background: '#1E4FA8', justifyContent: 'center', alignItems: 'center' }}&gt;&#10;                    &lt;Text style={{ fontSize: 18, fontWeight: 'bold', color: '#FFFFFF' }}&gt;1&lt;/Text&gt;&#10;                &lt;/Box&gt;&#10;                &lt;Box style={{ flex: 1 }}&gt;&#10;                    &lt;Text style={{ fontSize: 18, fontWeight: 'bold', color: '#1A2230' }}&gt;&#10;                        GitHub Pages 演示（免安装）&#10;                    &lt;/Text&gt;&#10;                    &lt;Text style={{ fontSize: 13.5, color: '#3D7BD9', marginTop: 3 }}&gt;&#10;                        https://penguin-zhou.github.io/FutureMirror/&#10;                    &lt;/Text&gt;&#10;                &lt;/Box&gt;&#10;            &lt;/Box&gt;&#10;            &lt;Box style={{ background: '#F7F9FC', border: '1px solid #D6DCE5', padding: '15px 18px', flexDirection: 'row', alignItems: 'center', gap: 16 }}&gt;&#10;                &lt;Box style={{ width: 40, height: 40, background: '#1E4FA8', justifyContent: 'center', alignItems: 'center' }}&gt;&#10;                    &lt;Text style={{ fontSize: 18, fontWeight: 'bold', color: '#FFFFFF' }}&gt;2&lt;/Text&gt;&#10;                &lt;/Box&gt;&#10;                &lt;Box style={{ flex: 1 }}&gt;&#10;                    &lt;Text style={{ fontSize: 18, fontWeight: 'bold', color: '#1A2230' }}&gt;&#10;                        国内直连镜像（赛场网络友好）&#10;                    &lt;/Text&gt;&#10;                    &lt;Text style={{ fontSize: 13.5, color: '#3D7BD9', marginTop: 3 }}&gt;&#10;                        https://futuremirror-demo.app.workbuddy.host/&#10;                    &lt;/Text&gt;&#10;                &lt;/Box&gt;&#10;            &lt;/Box&gt;&#10;            &lt;Box style={{ background: '#F7F9FC', border: '1px solid #D6DCE5', padding: '15px 18px', flexDirection: 'row', alignItems: 'center', gap: 16 }}&gt;&#10;                &lt;Box style={{ width: 40, height: 40, background: '#1E4FA8', justifyContent: 'center', alignItems: 'center' }}&gt;&#10;                    &lt;Text style={{ fontSize: 18, fontWeight: 'bold', color: '#FFFFFF' }}&gt;3&lt;/Text&gt;&#10;                &lt;/Box&gt;&#10;                &lt;Box style={{ flex: 1 }}&gt;&#10;                    &lt;Text style={{ fontSize: 18, fontWeight: 'bold', color: '#1A2230' }}&gt;&#10;                        演示账号一键登录&#10;                    &lt;/Text&gt;&#10;                    &lt;Text style={{ fontSize: 13.5, color: '#4A5568', marginTop: 3 }}&gt;&#10;                        demo@futuremirror.app · 登录页点「一键使用演示账号」&#10;                    &lt;/Text&gt;&#10;                &lt;/Box&gt;&#10;            &lt;/Box&gt;&#10;            &lt;Box style={{ background: '#FFFFFF', border: '1px solid #D6DCE5', borderLeft: '4px solid #FFC107', padding: '12px 18px', marginTop: 4 }}&gt;&#10;                &lt;Text style={{ fontSize: 15, fontWeight: 'bold', color: '#0E3F8C' }}&gt;&#10;                    现场可要求的演示&#10;                &lt;/Text&gt;&#10;                &lt;Text style={{ fontSize: 13.5, color: '#4A5568', marginTop: 4, lineHeight: 1.55 }}&gt;&#10;                    断网刷新页面——系统自动降级到本地 Mock，面试流程不中断；开发者模式（Ctrl+Shift+J）可看自检面板。&#10;                &lt;/Text&gt;&#10;            &lt;/Box&gt;&#10;        &lt;/Box&gt;&#10;        {/* 底部金句条 */}&#10;        &lt;Box style={{ position: 'absolute', bottom: 46, left: 64, right: 56, background: '#0E3F8C', padding: '16px 20px' }}&gt;&#10;            &lt;Text style={{ fontSize: 17, fontWeight: 'bold', color: '#FFFFFF', lineHeight: 1.5 }}&gt;&#10;                做法来自设计，证据可以当场复现&#10;            &lt;/Text&gt;&#10;            &lt;Text style={{ fontSize: 14, color: '#9FB9E4', marginTop: 4 }}&gt;&#10;                —— 恳请访客现场指正&#10;            &lt;/Text&gt;&#10;        &lt;/Box&gt;&#10;    &lt;/Box&gt;&#10;    {/* 右：藏蓝二维码与文档面板 */}&#10;    &lt;Box style={{ position: 'absolute', top: 0, left: 720, width: 560, height: 720, background: '#0E3F8C', padding: '58px 56px 0 56px', boxSizing: 'border-box', alignItems: 'center' }}&gt;&#10;        &lt;Text style={{ fontSize: 16, color: '#9FB9E4', letterSpacing: 3 }}&gt;&#10;            扫码打开演示&#10;        &lt;/Text&gt;&#10;        &lt;Box style={{ background: '#FFFFFF', padding: 14, marginTop: 20 }}&gt;&#10;            &lt;QRCode&#10;                text='https://penguin-zhou.github.io/FutureMirror/'&#10;                width={216}&#10;                darkColor='#0E3F8C'&#10;                lightColor='#FFFFFF'&#10;                errorCorrectionLevel='Q'&#10;            /&gt;&#10;        &lt;/Box&gt;&#10;        &lt;Text style={{ fontSize: 14, color: '#D7E3F5', marginTop: 14 }}&gt;&#10;            手机扫码即可打开（GitHub Pages）&#10;        &lt;/Text&gt;&#10;        &lt;Box style={{ width: 200, height: 1, background: '#2E63BE', marginTop: 36 }} /&gt;&#10;        &lt;Box style={{ marginTop: 28, width: '100%' }}&gt;&#10;            &lt;Text style={{ fontSize: 15, fontWeight: 'bold', color: '#FFFFFF' }}&gt;&#10;                技术文档 · 第 7 章&#10;            &lt;/Text&gt;&#10;            &lt;Text style={{ fontSize: 13, color: '#9FB9E4', marginTop: 6, lineHeight: 1.6 }}&gt;&#10;                核心算法详解与原创性论证&lt;br /&gt;两个渠道均可在线阅读&#10;            &lt;/Text&gt;&#10;        &lt;/Box&gt;&#10;        &lt;Box style={{ marginTop: 22, width: '100%' }}&gt;&#10;            &lt;Text style={{ fontSize: 15, fontWeight: 'bold', color: '#FFFFFF' }}&gt;&#10;                开源仓库&#10;            &lt;/Text&gt;&#10;            &lt;Text style={{ fontSize: 13, color: '#9FB9E4', marginTop: 6, lineHeight: 1.6 }}&gt;&#10;                github.com/penguin-zhou/FutureMirror&lt;br /&gt;MIT · 完整 Git 提交记录可查&#10;            &lt;/Text&gt;&#10;        &lt;/Box&gt;&#10;        &lt;Box style={{ flex: 1 }} /&gt;&#10;        &lt;Text style={{ fontSize: 13, color: '#9FB9E4', marginBottom: 34, letterSpacing: 2 }}&gt;&#10;            面镜 FutureMirror · 2026&#10;        &lt;/Text&gt;&#10;    &lt;/Box&gt;&#10;&lt;/Slide&gt;&#10;"/>
+        <p:cNvPr id="249" name="" descr="&lt;Slide style={{&#10;    width: '1280px',&#10;    height: '720px',&#10;    background: '#FFFFFF',&#10;    padding: 0,&#10;    position: 'relative',&#10;    overflow: 'hidden',&#10;    fontFamily: &quot;'Noto Sans SC','Source Han Sans SC','PingFang SC','Microsoft YaHei',sans-serif&quot;,&#10;}}&gt;&#10;    {/* 顶部深蓝条（呼应封面） */}&#10;    &lt;Box style={{ position: 'absolute', top: 0, left: 0, width: '720', height: 14, background: '#0E3F8C' }} /&gt;&#10;    {/* 左：骑线文字入口区 */}&#10;    &lt;Box style={{ position: 'absolute', top: 0, left: 0, width: 720, height: 720, padding: '58px 56px 0 64px', boxSizing: 'border-box' }}&gt;&#10;        &lt;Text style={{ fontSize: 15, color: '#3D7BD9', letterSpacing: 4, fontWeight: 'bold' }}&gt;&#10;            04 现场验证 · LIVE VERIFICATION&#10;        &lt;/Text&gt;&#10;        &lt;Text style={{ fontSize: 46, fontWeight: 'bold', color: '#0E3F8C', marginTop: 12 }}&gt;&#10;            现在就可以验证&#10;        &lt;/Text&gt;&#10;        &lt;Box style={{ flexDirection: 'column', gap: 14, marginTop: 28 }}&gt;&#10;            &lt;Box style={{ background: '#F7F9FC', border: '1px solid #D6DCE5', padding: '15px 18px', flexDirection: 'row', alignItems: 'center', gap: 16 }}&gt;&#10;                &lt;Box style={{ width: 40, height: 40, background: '#1E4FA8', justifyContent: 'center', alignItems: 'center' }}&gt;&#10;                    &lt;Text style={{ fontSize: 18, fontWeight: 'bold', color: '#FFFFFF' }}&gt;1&lt;/Text&gt;&#10;                &lt;/Box&gt;&#10;                &lt;Box style={{ flex: 1 }}&gt;&#10;                    &lt;Text style={{ fontSize: 18, fontWeight: 'bold', color: '#1A2230' }}&gt;&#10;                        GitHub Pages 演示（免安装）&#10;                    &lt;/Text&gt;&#10;                    &lt;Text style={{ fontSize: 13.5, color: '#3D7BD9', marginTop: 3 }}&gt;&#10;                        https://penguin-zhou.github.io/FutureMirror/&#10;                    &lt;/Text&gt;&#10;                &lt;/Box&gt;&#10;            &lt;/Box&gt;&#10;            &lt;Box style={{ background: '#F7F9FC', border: '1px solid #D6DCE5', padding: '15px 18px', flexDirection: 'row', alignItems: 'center', gap: 16 }}&gt;&#10;                &lt;Box style={{ width: 40, height: 40, background: '#1E4FA8', justifyContent: 'center', alignItems: 'center' }}&gt;&#10;                    &lt;Text style={{ fontSize: 18, fontWeight: 'bold', color: '#FFFFFF' }}&gt;2&lt;/Text&gt;&#10;                &lt;/Box&gt;&#10;                &lt;Box style={{ flex: 1 }}&gt;&#10;                    &lt;Text style={{ fontSize: 18, fontWeight: 'bold', color: '#1A2230' }}&gt;&#10;                        国内直连镜像（现场网络友好）&#10;                    &lt;/Text&gt;&#10;                    &lt;Text style={{ fontSize: 13.5, color: '#3D7BD9', marginTop: 3 }}&gt;&#10;                        https://futuremirror-demo.app.workbuddy.host/&#10;                    &lt;/Text&gt;&#10;                &lt;/Box&gt;&#10;            &lt;/Box&gt;&#10;            &lt;Box style={{ background: '#F7F9FC', border: '1px solid #D6DCE5', padding: '15px 18px', flexDirection: 'row', alignItems: 'center', gap: 16 }}&gt;&#10;                &lt;Box style={{ width: 40, height: 40, background: '#1E4FA8', justifyContent: 'center', alignItems: 'center' }}&gt;&#10;                    &lt;Text style={{ fontSize: 18, fontWeight: 'bold', color: '#FFFFFF' }}&gt;3&lt;/Text&gt;&#10;                &lt;/Box&gt;&#10;                &lt;Box style={{ flex: 1 }}&gt;&#10;                    &lt;Text style={{ fontSize: 18, fontWeight: 'bold', color: '#1A2230' }}&gt;&#10;                        演示账号一键登录&#10;                    &lt;/Text&gt;&#10;                    &lt;Text style={{ fontSize: 13.5, color: '#4A5568', marginTop: 3 }}&gt;&#10;                        demo@futuremirror.app · 登录页点「一键使用演示账号」&#10;                    &lt;/Text&gt;&#10;                &lt;/Box&gt;&#10;            &lt;/Box&gt;&#10;            &lt;Box style={{ background: '#FFFFFF', border: '1px solid #D6DCE5', borderLeft: '4px solid #FFC107', padding: '12px 18px', marginTop: 4 }}&gt;&#10;                &lt;Text style={{ fontSize: 15, fontWeight: 'bold', color: '#0E3F8C' }}&gt;&#10;                    现场可要求的演示&#10;                &lt;/Text&gt;&#10;                &lt;Text style={{ fontSize: 13.5, color: '#4A5568', marginTop: 4, lineHeight: 1.55 }}&gt;&#10;                    断网刷新页面——系统自动降级到本地 Mock，面试流程不中断；开发者模式（Ctrl+Shift+J）可看自检面板。&#10;                &lt;/Text&gt;&#10;            &lt;/Box&gt;&#10;        &lt;/Box&gt;&#10;        {/* 底部金句条 */}&#10;        &lt;Box style={{ position: 'absolute', bottom: 46, left: 64, right: 56, background: '#0E3F8C', padding: '16px 20px' }}&gt;&#10;            &lt;Text style={{ fontSize: 17, fontWeight: 'bold', color: '#FFFFFF', lineHeight: 1.5 }}&gt;&#10;                做法来自设计，证据可以当场复现&#10;            &lt;/Text&gt;&#10;            &lt;Text style={{ fontSize: 14, color: '#9FB9E4', marginTop: 4 }}&gt;&#10;                —— 恳请访客现场指正&#10;            &lt;/Text&gt;&#10;        &lt;/Box&gt;&#10;    &lt;/Box&gt;&#10;    {/* 右：藏蓝二维码与文档面板 */}&#10;    &lt;Box style={{ position: 'absolute', top: 0, left: 720, width: 560, height: 720, background: '#0E3F8C', padding: '58px 56px 0 56px', boxSizing: 'border-box', alignItems: 'center' }}&gt;&#10;        &lt;Text style={{ fontSize: 16, color: '#9FB9E4', letterSpacing: 3 }}&gt;&#10;            扫码打开演示&#10;        &lt;/Text&gt;&#10;        &lt;Box style={{ background: '#FFFFFF', padding: 14, marginTop: 20 }}&gt;&#10;            &lt;QRCode&#10;                text='https://penguin-zhou.github.io/FutureMirror/'&#10;                width={216}&#10;                darkColor='#0E3F8C'&#10;                lightColor='#FFFFFF'&#10;                errorCorrectionLevel='Q'&#10;            /&gt;&#10;        &lt;/Box&gt;&#10;        &lt;Text style={{ fontSize: 14, color: '#D7E3F5', marginTop: 14 }}&gt;&#10;            手机扫码即可打开（GitHub Pages）&#10;        &lt;/Text&gt;&#10;        &lt;Box style={{ width: 200, height: 1, background: '#2E63BE', marginTop: 36 }} /&gt;&#10;        &lt;Box style={{ marginTop: 28, width: '100%' }}&gt;&#10;            &lt;Text style={{ fontSize: 15, fontWeight: 'bold', color: '#FFFFFF' }}&gt;&#10;                技术文档 · 第 7 章&#10;            &lt;/Text&gt;&#10;            &lt;Text style={{ fontSize: 13, color: '#9FB9E4', marginTop: 6, lineHeight: 1.6 }}&gt;&#10;                核心算法详解与原创性论证&lt;br /&gt;两个渠道均可在线阅读&#10;            &lt;/Text&gt;&#10;        &lt;/Box&gt;&#10;        &lt;Box style={{ marginTop: 22, width: '100%' }}&gt;&#10;            &lt;Text style={{ fontSize: 15, fontWeight: 'bold', color: '#FFFFFF' }}&gt;&#10;                开源仓库&#10;            &lt;/Text&gt;&#10;            &lt;Text style={{ fontSize: 13, color: '#9FB9E4', marginTop: 6, lineHeight: 1.6 }}&gt;&#10;                github.com/penguin-zhou/FutureMirror&lt;br /&gt;MIT · 完整 Git 提交记录可查&#10;            &lt;/Text&gt;&#10;        &lt;/Box&gt;&#10;        &lt;Box style={{ flex: 1 }} /&gt;&#10;        &lt;Text style={{ fontSize: 13, color: '#9FB9E4', marginBottom: 34, letterSpacing: 2 }}&gt;&#10;            面镜 FutureMirror · 2026&#10;        &lt;/Text&gt;&#10;    &lt;/Box&gt;&#10;&lt;/Slide&gt;&#10;"/>
         <p:cNvGrpSpPr/>
         <p:nvPr/>
       </p:nvGrpSpPr>
@@ -13524,7 +13524,7 @@
                 <a:latin typeface="Noto Sans SC"/>
                 <a:ea typeface="Noto Sans SC"/>
               </a:rPr>
-              <a:t>国内直连镜像（赛场网络友好）</a:t>
+              <a:t>国内直连镜像（现场网络友好）</a:t>
             </a:r>
             <a:endParaRPr/>
           </a:p>
@@ -18298,7 +18298,7 @@
                 <a:latin typeface="Noto Sans SC"/>
                 <a:ea typeface="Noto Sans SC"/>
               </a:rPr>
-              <a:t>的产品，在赛场网络不稳定时直接白屏</a:t>
+              <a:t>的产品，在现场网络不稳定时直接白屏</a:t>
             </a:r>
             <a:endParaRPr/>
           </a:p>
@@ -19180,7 +19180,7 @@
   <p:cSld>
     <p:spTree>
       <p:nvGrpSpPr>
-        <p:cNvPr id="407" name="" descr="&lt;Slide style={{&#10;    width: '1280px',&#10;    height: '720px',&#10;    background: '#FFFFFF',&#10;    padding: 0,&#10;    position: 'relative',&#10;    overflow: 'hidden',&#10;    fontFamily: &quot;'Noto Sans SC','Source Han Sans SC','PingFang SC','Microsoft YaHei',sans-serif&quot;,&#10;}}&gt;&#10;    {/* ===== 母版：A3 深蓝顶条 ===== */}&#10;    &lt;Box style={{ position: 'absolute', top: 0, left: 0, width: '1280px', height: 84, background: '#0E3F8C' }}&gt;&#10;        &lt;svg style={{ position: 'absolute', right: 210, top: 18, opacity: 0.16 }} width={150} height={48} viewBox='0 0 150 48'&gt;&#10;            &lt;g stroke='#FFFFFF' strokeWidth='1.2' fill='none'&gt;&#10;                &lt;path d='M2 24 L28 24 L38 10 L74 10 L84 24 L120 24 L130 38 L148 38' /&gt;&#10;                &lt;path d='M38 10 L38 38 L74 38' /&gt;&#10;                &lt;circle cx='28' cy='24' r='3' fill='#FFFFFF' /&gt;&#10;                &lt;circle cx='84' cy='24' r='3' fill='#FFFFFF' /&gt;&#10;            &lt;/g&gt;&#10;        &lt;/svg&gt;&#10;        &lt;Box style={{ position: 'absolute', left: 40, top: 0, height: 84, justifyContent: 'center' }}&gt;&#10;            &lt;Text style={{ fontSize: 26, fontWeight: 'bold', color: '#FFFFFF' }}&gt;&#10;                一套业务逻辑，三种部署形态&#10;            &lt;/Text&gt;&#10;        &lt;/Box&gt;&#10;        &lt;Box style={{ position: 'absolute', right: 40, top: 24, background: '#1E4FA8', padding: '7px 16px', borderRadius: 14 }}&gt;&#10;            &lt;Text style={{ fontSize: 14, color: '#FFFFFF', letterSpacing: 1 }}&gt;&#10;                01 问题与方案&#10;            &lt;/Text&gt;&#10;        &lt;/Box&gt;&#10;    &lt;/Box&gt;&#10;    {/* ===== 左侧标题栏 ===== */}&#10;    &lt;Box style={{ position: 'absolute', top: 84, left: 0, width: 356, height: 572, background: '#0E3F8C', padding: '30px 30px 26px 40px', boxSizing: 'border-box', flexDirection: 'column' }}&gt;&#10;        &lt;Text style={{ fontSize: 14, color: '#9FB9E4', letterSpacing: 4 }}&gt;&#10;            系统架构总览&#10;        &lt;/Text&gt;&#10;        &lt;Text style={{ fontSize: 27, fontWeight: 'bold', color: '#FFFFFF', marginTop: 14, lineHeight: 1.35 }}&gt;&#10;            一套业务逻辑&lt;br /&gt;三种部署形态&#10;        &lt;/Text&gt;&#10;        &lt;Box style={{ width: 48, height: 4, background: '#FFC107', marginTop: 18 }} /&gt;&#10;        &lt;Text style={{ fontSize: 15, color: '#D7E3F5', lineHeight: 1.85, marginTop: 18 }}&gt;&#10;            前端三种形态经适配层统一走「后端优先」策略：在线走服务端，离线自动回退本地引擎，业务逻辑零分叉。&#10;        &lt;/Text&gt;&#10;        &lt;Box style={{ flex: 1 }} /&gt;&#10;        &lt;Box style={{ background: '#1E4FA8', padding: '14px 16px' }}&gt;&#10;            &lt;Text style={{ fontSize: 15, fontWeight: 'bold', color: '#FFFFFF' }}&gt;&#10;                架构目标&#10;            &lt;/Text&gt;&#10;            &lt;Text style={{ fontSize: 14, color: '#D7E3F5', marginTop: 6, lineHeight: 1.6 }}&gt;&#10;                ① 密钥零前端接触&lt;br /&gt;② 赛场无网也能跑完&#10;            &lt;/Text&gt;&#10;        &lt;/Box&gt;&#10;    &lt;/Box&gt;&#10;    {/* ===== 右侧架构图 ===== */}&#10;    &lt;Box style={{ position: 'absolute', top: 84, left: 356, width: 924, height: 572, padding: '22px 36px', boxSizing: 'border-box' }}&gt;&#10;        &lt;svg width={852} height='520' viewBox='0 0 852 520' style={{ fontFamily: &quot;'Noto Sans SC','PingFang SC','Microsoft YaHei',sans-serif&quot; }}&gt;&#10;            {/* 第 1 层：前端三形态 */}&#10;            &lt;text x='0' y='26' fill='#0E3F8C' fontSize='16' fontWeight='bold'&gt;前端三形态&lt;/text&gt;&#10;            &lt;rect x='120' y='8' width='224' height='72' rx='4' fill='#FFFFFF' stroke='#1E4FA8' strokeWidth='1.5' /&gt;&#10;            &lt;text x='232' y='36' fill='#0E3F8C' fontSize='16' fontWeight='bold' textAnchor='middle'&gt;单文件演示版&lt;/text&gt;&#10;            &lt;text x='232' y='60' fill='#4A5568' fontSize='13' textAnchor='middle'&gt;零依赖 · 浏览器直接打开&lt;/text&gt;&#10;            &lt;rect x='360' y='8' width='224' height='72' rx='4' fill='#FFFFFF' stroke='#1E4FA8' strokeWidth='1.5' /&gt;&#10;            &lt;text x='472' y='36' fill='#0E3F8C' fontSize='16' fontWeight='bold' textAnchor='middle'&gt;模块版前端&lt;/text&gt;&#10;            &lt;text x='472' y='60' fill='#4A5568' fontSize='13' textAnchor='middle'&gt;ES Module · 工程化开发&lt;/text&gt;&#10;            &lt;rect x='600' y='8' width='224' height='72' rx='4' fill='#FFFFFF' stroke='#1E4FA8' strokeWidth='1.5' /&gt;&#10;            &lt;text x='712' y='36' fill='#0E3F8C' fontSize='16' fontWeight='bold' textAnchor='middle'&gt;同源托管版&lt;/text&gt;&#10;            &lt;text x='712' y='60' fill='#4A5568' fontSize='13' textAnchor='middle'&gt;演示页 + API 同域&lt;/text&gt;&#10;            {/* 连接箭头 1→2 */}&#10;            &lt;path d='M426 82 L426 104' stroke='#1E4FA8' strokeWidth='2' /&gt;&#10;            &lt;path d='M418 98 L426 110 L434 98 Z' fill='#1E4FA8' /&gt;&#10;            {/* 第 2 层：适配层 */}&#10;            &lt;text x='0' y='146' fill='#0E3F8C' fontSize='16' fontWeight='bold'&gt;适配层&lt;/text&gt;&#10;            &lt;rect x='120' y='124' width='704' height='48' rx='4' fill='#F0F5FC' stroke='#C9D8F0' strokeWidth='1.5' /&gt;&#10;            &lt;text x='472' y='153' fill='#0E3F8C' fontSize='15' fontWeight='bold' textAnchor='middle'&gt;后端优先适配：在线走服务端，失败自动回退本地引擎&lt;/text&gt;&#10;            {/* 连接箭头 2→3 */}&#10;            &lt;path d='M426 176 L426 198' stroke='#1E4FA8' strokeWidth='2' /&gt;&#10;            &lt;path d='M418 192 L426 204 L434 192 Z' fill='#1E4FA8' /&gt;&#10;            {/* 第 3 层：服务端 */}&#10;            &lt;text x='0' y='240' fill='#0E3F8C' fontSize='16' fontWeight='bold'&gt;服务端&lt;/text&gt;&#10;            &lt;rect x='120' y='218' width='704' height='120' rx='4' fill='#E8EFF8' stroke='#1E4FA8' strokeWidth='1.5' /&gt;&#10;            &lt;text x='136' y='244' fill='#0E3F8C' fontSize='15' fontWeight='bold'&gt;FastAPI&lt;/text&gt;&#10;            &lt;rect x='220' y='226' width='188' height='40' rx='3' fill='#FFFFFF' stroke='#C9D8F0' strokeWidth='1' /&gt;&#10;            &lt;text x='314' y='251' fill='#1A2230' fontSize='13' textAnchor='middle'&gt;JWT 鉴权（12h）&lt;/text&gt;&#10;            &lt;rect x='420' y='226' width='188' height='40' rx='3' fill='#FFFFFF' stroke='#C9D8F0' strokeWidth='1' /&gt;&#10;            &lt;text x='514' y='251' fill='#1A2230' fontSize='13' textAnchor='middle'&gt;scrypt 密码哈希&lt;/text&gt;&#10;            &lt;rect x='620' y='226' width='188' height='40' rx='3' fill='#FFFFFF' stroke='#C9D8F0' strokeWidth='1' /&gt;&#10;            &lt;text x='714' y='251' fill='#1A2230' fontSize='13' textAnchor='middle'&gt;SQLite 持久化&lt;/text&gt;&#10;            &lt;rect x='220' y='278' width='288' height='44' rx='3' fill='#FFFFFF' stroke='#C9D8F0' strokeWidth='1' /&gt;&#10;            &lt;text x='364' y='298' fill='#1A2230' fontSize='13' textAnchor='middle'&gt;GLM SSE 流式代理&lt;/text&gt;&#10;            &lt;text x='364' y='316' fill='#D9534F' fontSize='12' textAnchor='middle'&gt;Key 只在服务端环境变量&lt;/text&gt;&#10;            &lt;rect x='520' y='278' width='288' height='44' rx='3' fill='#FFFFFF' stroke='#C9D8F0' strokeWidth='1' /&gt;&#10;            &lt;text x='664' y='298' fill='#1A2230' fontSize='13' textAnchor='middle'&gt;评分引擎 Python 同构&lt;/text&gt;&#10;            &lt;text x='664' y='316' fill='#4A5568' fontSize='12' textAnchor='middle'&gt;与前端逐位一致（对拍 5/5）&lt;/text&gt;&#10;            {/* 连接箭头 3→4 */}&#10;            &lt;path d='M426 342 L426 364' stroke='#1E4FA8' strokeWidth='2' /&gt;&#10;            &lt;path d='M418 358 L426 370 L434 358 Z' fill='#1E4FA8' /&gt;&#10;            {/* 第 4 层：三级降级 */}&#10;            &lt;text x='0' y='406' fill='#0E3F8C' fontSize='16' fontWeight='bold'&gt;三级降级&lt;/text&gt;&#10;            &lt;rect x='120' y='384' width='204' height='60' rx='4' fill='#FFFFFF' stroke='#1E4FA8' strokeWidth='1.5' /&gt;&#10;            &lt;text x='222' y='409' fill='#0E3F8C' fontSize='14' fontWeight='bold' textAnchor='middle'&gt;① 后端真实模型&lt;/text&gt;&#10;            &lt;text x='222' y='430' fill='#4A5568' fontSize='12' textAnchor='middle'&gt;GLM-4-Flash 流式&lt;/text&gt;&#10;            &lt;path d='M328 414 L360 414' stroke='#1E4FA8' strokeWidth='2' /&gt;&#10;            &lt;path d='M352 407 L364 414 L352 421 Z' fill='#1E4FA8' /&gt;&#10;            &lt;rect x='368' y='384' width='204' height='60' rx='4' fill='#FFFFFF' stroke='#1E4FA8' strokeWidth='1.5' /&gt;&#10;            &lt;text x='470' y='409' fill='#0E3F8C' fontSize='14' fontWeight='bold' textAnchor='middle'&gt;② 浏览器直连 Key&lt;/text&gt;&#10;            &lt;text x='470' y='430' fill='#4A5568' fontSize='12' textAnchor='middle'&gt;sessionStorage 逃生通道&lt;/text&gt;&#10;            &lt;path d='M576 414 L608 414' stroke='#1E4FA8' strokeWidth='2' /&gt;&#10;            &lt;path d='M600 407 L612 414 L600 421 Z' fill='#1E4FA8' /&gt;&#10;            &lt;rect x='616' y='384' width='204' height='60' rx='4' fill='#FFFFFF' stroke='#1E4FA8' strokeWidth='1.5' /&gt;&#10;            &lt;text x='718' y='409' fill='#0E3F8C' fontSize='14' fontWeight='bold' textAnchor='middle'&gt;③ 本地 Mock&lt;/text&gt;&#10;            &lt;text x='718' y='430' fill='#4A5568' fontSize='12' textAnchor='middle'&gt;无网完整走完流程&lt;/text&gt;&#10;            {/* 降级注释 */}&#10;            &lt;rect x='120' y='458' width='704' height='44' rx='4' fill='#F7F9FC' stroke='#D6DCE5' strokeWidth='1' /&gt;&#10;            &lt;text x='472' y='485' fill='#4A5568' fontSize='13' textAnchor='middle'&gt;后端 5xx / 超时同样回退——赛场网络抖动不打断演示，评分与检索策略三级一致&lt;/text&gt;&#10;        &lt;/svg&gt;&#10;    &lt;/Box&gt;&#10;    {/* ===== 母版：页脚 ===== */}&#10;    &lt;Box style={{ position: 'absolute', bottom: 0, left: 0, width: '1280px', height: 64, borderTop: '1px solid #E5E7EB', flexDirection: 'row', alignItems: 'center', justifyContent: 'space-between', padding: '0 40px', boxSizing: 'border-box' }}&gt;&#10;        &lt;Text style={{ fontSize: 13, color: '#8B97A8' }}&gt;&#10;            面镜 FutureMirror · 功能演示&#10;        &lt;/Text&gt;&#10;        &lt;Text style={{ fontSize: 14, color: '#1E4FA8', fontWeight: 'bold' }}&gt;&#10;            05 / 16&#10;        &lt;/Text&gt;&#10;    &lt;/Box&gt;&#10;&lt;/Slide&gt;&#10;"/>
+        <p:cNvPr id="407" name="" descr="&lt;Slide style={{&#10;    width: '1280px',&#10;    height: '720px',&#10;    background: '#FFFFFF',&#10;    padding: 0,&#10;    position: 'relative',&#10;    overflow: 'hidden',&#10;    fontFamily: &quot;'Noto Sans SC','Source Han Sans SC','PingFang SC','Microsoft YaHei',sans-serif&quot;,&#10;}}&gt;&#10;    {/* ===== 母版：A3 深蓝顶条 ===== */}&#10;    &lt;Box style={{ position: 'absolute', top: 0, left: 0, width: '1280px', height: 84, background: '#0E3F8C' }}&gt;&#10;        &lt;svg style={{ position: 'absolute', right: 210, top: 18, opacity: 0.16 }} width={150} height={48} viewBox='0 0 150 48'&gt;&#10;            &lt;g stroke='#FFFFFF' strokeWidth='1.2' fill='none'&gt;&#10;                &lt;path d='M2 24 L28 24 L38 10 L74 10 L84 24 L120 24 L130 38 L148 38' /&gt;&#10;                &lt;path d='M38 10 L38 38 L74 38' /&gt;&#10;                &lt;circle cx='28' cy='24' r='3' fill='#FFFFFF' /&gt;&#10;                &lt;circle cx='84' cy='24' r='3' fill='#FFFFFF' /&gt;&#10;            &lt;/g&gt;&#10;        &lt;/svg&gt;&#10;        &lt;Box style={{ position: 'absolute', left: 40, top: 0, height: 84, justifyContent: 'center' }}&gt;&#10;            &lt;Text style={{ fontSize: 26, fontWeight: 'bold', color: '#FFFFFF' }}&gt;&#10;                一套业务逻辑，三种部署形态&#10;            &lt;/Text&gt;&#10;        &lt;/Box&gt;&#10;        &lt;Box style={{ position: 'absolute', right: 40, top: 24, background: '#1E4FA8', padding: '7px 16px', borderRadius: 14 }}&gt;&#10;            &lt;Text style={{ fontSize: 14, color: '#FFFFFF', letterSpacing: 1 }}&gt;&#10;                01 问题与方案&#10;            &lt;/Text&gt;&#10;        &lt;/Box&gt;&#10;    &lt;/Box&gt;&#10;    {/* ===== 左侧标题栏 ===== */}&#10;    &lt;Box style={{ position: 'absolute', top: 84, left: 0, width: 356, height: 572, background: '#0E3F8C', padding: '30px 30px 26px 40px', boxSizing: 'border-box', flexDirection: 'column' }}&gt;&#10;        &lt;Text style={{ fontSize: 14, color: '#9FB9E4', letterSpacing: 4 }}&gt;&#10;            系统架构总览&#10;        &lt;/Text&gt;&#10;        &lt;Text style={{ fontSize: 27, fontWeight: 'bold', color: '#FFFFFF', marginTop: 14, lineHeight: 1.35 }}&gt;&#10;            一套业务逻辑&lt;br /&gt;三种部署形态&#10;        &lt;/Text&gt;&#10;        &lt;Box style={{ width: 48, height: 4, background: '#FFC107', marginTop: 18 }} /&gt;&#10;        &lt;Text style={{ fontSize: 15, color: '#D7E3F5', lineHeight: 1.85, marginTop: 18 }}&gt;&#10;            前端三种形态经适配层统一走「后端优先」策略：在线走服务端，离线自动回退本地引擎，业务逻辑零分叉。&#10;        &lt;/Text&gt;&#10;        &lt;Box style={{ flex: 1 }} /&gt;&#10;        &lt;Box style={{ background: '#1E4FA8', padding: '14px 16px' }}&gt;&#10;            &lt;Text style={{ fontSize: 15, fontWeight: 'bold', color: '#FFFFFF' }}&gt;&#10;                架构目标&#10;            &lt;/Text&gt;&#10;            &lt;Text style={{ fontSize: 14, color: '#D7E3F5', marginTop: 6, lineHeight: 1.6 }}&gt;&#10;                ① 密钥零前端接触&lt;br /&gt;② 现场无网也能跑完&#10;            &lt;/Text&gt;&#10;        &lt;/Box&gt;&#10;    &lt;/Box&gt;&#10;    {/* ===== 右侧架构图 ===== */}&#10;    &lt;Box style={{ position: 'absolute', top: 84, left: 356, width: 924, height: 572, padding: '22px 36px', boxSizing: 'border-box' }}&gt;&#10;        &lt;svg width={852} height='520' viewBox='0 0 852 520' style={{ fontFamily: &quot;'Noto Sans SC','PingFang SC','Microsoft YaHei',sans-serif&quot; }}&gt;&#10;            {/* 第 1 层：前端三形态 */}&#10;            &lt;text x='0' y='26' fill='#0E3F8C' fontSize='16' fontWeight='bold'&gt;前端三形态&lt;/text&gt;&#10;            &lt;rect x='120' y='8' width='224' height='72' rx='4' fill='#FFFFFF' stroke='#1E4FA8' strokeWidth='1.5' /&gt;&#10;            &lt;text x='232' y='36' fill='#0E3F8C' fontSize='16' fontWeight='bold' textAnchor='middle'&gt;单文件演示版&lt;/text&gt;&#10;            &lt;text x='232' y='60' fill='#4A5568' fontSize='13' textAnchor='middle'&gt;零依赖 · 浏览器直接打开&lt;/text&gt;&#10;            &lt;rect x='360' y='8' width='224' height='72' rx='4' fill='#FFFFFF' stroke='#1E4FA8' strokeWidth='1.5' /&gt;&#10;            &lt;text x='472' y='36' fill='#0E3F8C' fontSize='16' fontWeight='bold' textAnchor='middle'&gt;模块版前端&lt;/text&gt;&#10;            &lt;text x='472' y='60' fill='#4A5568' fontSize='13' textAnchor='middle'&gt;ES Module · 工程化开发&lt;/text&gt;&#10;            &lt;rect x='600' y='8' width='224' height='72' rx='4' fill='#FFFFFF' stroke='#1E4FA8' strokeWidth='1.5' /&gt;&#10;            &lt;text x='712' y='36' fill='#0E3F8C' fontSize='16' fontWeight='bold' textAnchor='middle'&gt;同源托管版&lt;/text&gt;&#10;            &lt;text x='712' y='60' fill='#4A5568' fontSize='13' textAnchor='middle'&gt;演示页 + API 同域&lt;/text&gt;&#10;            {/* 连接箭头 1→2 */}&#10;            &lt;path d='M426 82 L426 104' stroke='#1E4FA8' strokeWidth='2' /&gt;&#10;            &lt;path d='M418 98 L426 110 L434 98 Z' fill='#1E4FA8' /&gt;&#10;            {/* 第 2 层：适配层 */}&#10;            &lt;text x='0' y='146' fill='#0E3F8C' fontSize='16' fontWeight='bold'&gt;适配层&lt;/text&gt;&#10;            &lt;rect x='120' y='124' width='704' height='48' rx='4' fill='#F0F5FC' stroke='#C9D8F0' strokeWidth='1.5' /&gt;&#10;            &lt;text x='472' y='153' fill='#0E3F8C' fontSize='15' fontWeight='bold' textAnchor='middle'&gt;后端优先适配：在线走服务端，失败自动回退本地引擎&lt;/text&gt;&#10;            {/* 连接箭头 2→3 */}&#10;            &lt;path d='M426 176 L426 198' stroke='#1E4FA8' strokeWidth='2' /&gt;&#10;            &lt;path d='M418 192 L426 204 L434 192 Z' fill='#1E4FA8' /&gt;&#10;            {/* 第 3 层：服务端 */}&#10;            &lt;text x='0' y='240' fill='#0E3F8C' fontSize='16' fontWeight='bold'&gt;服务端&lt;/text&gt;&#10;            &lt;rect x='120' y='218' width='704' height='120' rx='4' fill='#E8EFF8' stroke='#1E4FA8' strokeWidth='1.5' /&gt;&#10;            &lt;text x='136' y='244' fill='#0E3F8C' fontSize='15' fontWeight='bold'&gt;FastAPI&lt;/text&gt;&#10;            &lt;rect x='220' y='226' width='188' height='40' rx='3' fill='#FFFFFF' stroke='#C9D8F0' strokeWidth='1' /&gt;&#10;            &lt;text x='314' y='251' fill='#1A2230' fontSize='13' textAnchor='middle'&gt;JWT 鉴权（12h）&lt;/text&gt;&#10;            &lt;rect x='420' y='226' width='188' height='40' rx='3' fill='#FFFFFF' stroke='#C9D8F0' strokeWidth='1' /&gt;&#10;            &lt;text x='514' y='251' fill='#1A2230' fontSize='13' textAnchor='middle'&gt;scrypt 密码哈希&lt;/text&gt;&#10;            &lt;rect x='620' y='226' width='188' height='40' rx='3' fill='#FFFFFF' stroke='#C9D8F0' strokeWidth='1' /&gt;&#10;            &lt;text x='714' y='251' fill='#1A2230' fontSize='13' textAnchor='middle'&gt;SQLite 持久化&lt;/text&gt;&#10;            &lt;rect x='220' y='278' width='288' height='44' rx='3' fill='#FFFFFF' stroke='#C9D8F0' strokeWidth='1' /&gt;&#10;            &lt;text x='364' y='298' fill='#1A2230' fontSize='13' textAnchor='middle'&gt;GLM SSE 流式代理&lt;/text&gt;&#10;            &lt;text x='364' y='316' fill='#D9534F' fontSize='12' textAnchor='middle'&gt;Key 只在服务端环境变量&lt;/text&gt;&#10;            &lt;rect x='520' y='278' width='288' height='44' rx='3' fill='#FFFFFF' stroke='#C9D8F0' strokeWidth='1' /&gt;&#10;            &lt;text x='664' y='298' fill='#1A2230' fontSize='13' textAnchor='middle'&gt;评分引擎 Python 同构&lt;/text&gt;&#10;            &lt;text x='664' y='316' fill='#4A5568' fontSize='12' textAnchor='middle'&gt;与前端逐位一致（对拍 5/5）&lt;/text&gt;&#10;            {/* 连接箭头 3→4 */}&#10;            &lt;path d='M426 342 L426 364' stroke='#1E4FA8' strokeWidth='2' /&gt;&#10;            &lt;path d='M418 358 L426 370 L434 358 Z' fill='#1E4FA8' /&gt;&#10;            {/* 第 4 层：三级降级 */}&#10;            &lt;text x='0' y='406' fill='#0E3F8C' fontSize='16' fontWeight='bold'&gt;三级降级&lt;/text&gt;&#10;            &lt;rect x='120' y='384' width='204' height='60' rx='4' fill='#FFFFFF' stroke='#1E4FA8' strokeWidth='1.5' /&gt;&#10;            &lt;text x='222' y='409' fill='#0E3F8C' fontSize='14' fontWeight='bold' textAnchor='middle'&gt;① 后端真实模型&lt;/text&gt;&#10;            &lt;text x='222' y='430' fill='#4A5568' fontSize='12' textAnchor='middle'&gt;GLM-4-Flash 流式&lt;/text&gt;&#10;            &lt;path d='M328 414 L360 414' stroke='#1E4FA8' strokeWidth='2' /&gt;&#10;            &lt;path d='M352 407 L364 414 L352 421 Z' fill='#1E4FA8' /&gt;&#10;            &lt;rect x='368' y='384' width='204' height='60' rx='4' fill='#FFFFFF' stroke='#1E4FA8' strokeWidth='1.5' /&gt;&#10;            &lt;text x='470' y='409' fill='#0E3F8C' fontSize='14' fontWeight='bold' textAnchor='middle'&gt;② 浏览器直连 Key&lt;/text&gt;&#10;            &lt;text x='470' y='430' fill='#4A5568' fontSize='12' textAnchor='middle'&gt;sessionStorage 逃生通道&lt;/text&gt;&#10;            &lt;path d='M576 414 L608 414' stroke='#1E4FA8' strokeWidth='2' /&gt;&#10;            &lt;path d='M600 407 L612 414 L600 421 Z' fill='#1E4FA8' /&gt;&#10;            &lt;rect x='616' y='384' width='204' height='60' rx='4' fill='#FFFFFF' stroke='#1E4FA8' strokeWidth='1.5' /&gt;&#10;            &lt;text x='718' y='409' fill='#0E3F8C' fontSize='14' fontWeight='bold' textAnchor='middle'&gt;③ 本地 Mock&lt;/text&gt;&#10;            &lt;text x='718' y='430' fill='#4A5568' fontSize='12' textAnchor='middle'&gt;无网完整走完流程&lt;/text&gt;&#10;            {/* 降级注释 */}&#10;            &lt;rect x='120' y='458' width='704' height='44' rx='4' fill='#F7F9FC' stroke='#D6DCE5' strokeWidth='1' /&gt;&#10;            &lt;text x='472' y='485' fill='#4A5568' fontSize='13' textAnchor='middle'&gt;后端 5xx / 超时同样回退——现场网络抖动不打断演示，评分与检索策略三级一致&lt;/text&gt;&#10;        &lt;/svg&gt;&#10;    &lt;/Box&gt;&#10;    {/* ===== 母版：页脚 ===== */}&#10;    &lt;Box style={{ position: 'absolute', bottom: 0, left: 0, width: '1280px', height: 64, borderTop: '1px solid #E5E7EB', flexDirection: 'row', alignItems: 'center', justifyContent: 'space-between', padding: '0 40px', boxSizing: 'border-box' }}&gt;&#10;        &lt;Text style={{ fontSize: 13, color: '#8B97A8' }}&gt;&#10;            面镜 FutureMirror · 功能演示&#10;        &lt;/Text&gt;&#10;        &lt;Text style={{ fontSize: 14, color: '#1E4FA8', fontWeight: 'bold' }}&gt;&#10;            05 / 16&#10;        &lt;/Text&gt;&#10;    &lt;/Box&gt;&#10;&lt;/Slide&gt;&#10;"/>
         <p:cNvGrpSpPr/>
         <p:nvPr/>
       </p:nvGrpSpPr>
@@ -19677,7 +19677,7 @@
                 <a:latin typeface="Noto Sans SC"/>
                 <a:ea typeface="Noto Sans SC"/>
               </a:rPr>
-              <a:t>赛场无网也能跑完</a:t>
+              <a:t>现场无网也能跑完</a:t>
             </a:r>
             <a:endParaRPr/>
           </a:p>

--- a/docs/FutureMirror.Deck.pptx
+++ b/docs/FutureMirror.Deck.pptx
@@ -11770,7 +11770,7 @@
   <p:cSld>
     <p:spTree>
       <p:nvGrpSpPr>
-        <p:cNvPr id="210" name="" descr="&lt;Slide style={{&#10;    width: '1280px',&#10;    height: '720px',&#10;    background: '#FFFFFF',&#10;    padding: 0,&#10;    position: 'relative',&#10;    overflow: 'hidden',&#10;    fontFamily: &quot;'Noto Sans SC','Source Han Sans SC','PingFang SC','Microsoft YaHei',sans-serif&quot;,&#10;}}&gt;&#10;    {/* 左：藏蓝巨数字面板 */}&#10;    &lt;Box style={{&#10;        position: 'absolute',&#10;        top: 0,&#10;        left: 0,&#10;        width: 460,&#10;        height: 720,&#10;        background: '#0E3F8C',&#10;        justifyContent: 'center',&#10;        alignItems: 'center',&#10;    }}&gt;&#10;        &lt;Text style={{ fontSize: 15, color: '#9FB9E4', letterSpacing: 6, marginBottom: 8 }}&gt;&#10;            CHAPTER&#10;        &lt;/Text&gt;&#10;        &lt;Text style={{ fontSize: 210, fontWeight: 'bold', color: '#FFFFFF', opacity: 0.28, lineHeight: 1 }}&gt;&#10;            04&#10;        &lt;/Text&gt;&#10;    &lt;/Box&gt;&#10;    {/* 右上：章节页眉带 */}&#10;    &lt;Box style={{&#10;        position: 'absolute',&#10;        top: 0,&#10;        left: 460,&#10;        width: 820,&#10;        height: 236,&#10;        background: '#F7F9FC',&#10;        borderBottom: '1px solid #E5E7EB',&#10;        padding: '0 72px',&#10;        boxSizing: 'border-box',&#10;        flexDirection: 'row',&#10;        alignItems: 'center',&#10;        justifyContent: 'space-between',&#10;    }}&gt;&#10;        &lt;Box style={{ width: 430, height: 120, justifyContent: 'center' }}&gt;&#10;            &lt;Text style={{ fontSize: 15, color: '#3D7BD9', letterSpacing: 4, fontWeight: 'bold' }}&gt;&#10;                第 04 章&#10;            &lt;/Text&gt;&#10;            &lt;Text style={{ fontSize: 44, fontWeight: 'bold', color: '#0E3F8C', marginTop: 14 }}&gt;&#10;                现场验证&#10;            &lt;/Text&gt;&#10;            &lt;Box style={{ width: 72, height: 4, background: '#FFC107', marginTop: 22 }} /&gt;&#10;        &lt;/Box&gt;&#10;        &lt;Box style={{ height: 100, background: '#E8EFF8', padding: '0 24px', alignItems: 'center', justifyContent: 'center' }}&gt;&#10;            &lt;Text style={{ fontSize: 46, fontWeight: 'bold', color: '#1E4FA8', lineHeight: 1 }}&gt;&#10;                P15–P16&#10;            &lt;/Text&gt;&#10;            &lt;Text style={{ fontSize: 13, color: '#4A5568', marginTop: 8, letterSpacing: 3 }}&gt;&#10;                本章范围&#10;            &lt;/Text&gt;&#10;        &lt;/Box&gt;&#10;    &lt;/Box&gt;&#10;    {/* 右中：要点卡 */}&#10;    &lt;Box style={{ position: 'absolute', top: 236, left: 460, width: 820, height: 334, padding: '28px 72px 0 72px', boxSizing: 'border-box' }}&gt;&#10;        &lt;Box style={{ flexDirection: 'column', gap: 18 }}&gt;&#10;            &lt;Box style={{ background: '#FFFFFF', border: '1px solid #D6DCE5', borderLeft: '4px solid #1E4FA8', padding: '14px 20px', flexDirection: 'row', alignItems: 'center', justifyContent: 'space-between' }}&gt;&#10;                &lt;Box style={{ flexDirection: 'row', alignItems: 'flex-start', gap: 14 }}&gt;&#10;                    &lt;Box style={{ width: 10, height: 10, background: '#1E4FA8', marginTop: 9 }} /&gt;&#10;                    &lt;Box&gt;&#10;                        &lt;Text style={{ fontSize: 21, fontWeight: 'bold', color: '#1A2230' }}&gt;两个免安装入口&lt;/Text&gt;&#10;                        &lt;Text style={{ fontSize: 16, color: '#4A5568', marginTop: 5, lineHeight: 1.5 }}&gt;&#10;                            GitHub Pages 演示 + 国内直连镜像，浏览器直接打开&#10;                        &lt;/Text&gt;&#10;                    &lt;/Box&gt;&#10;                &lt;/Box&gt;&#10;                &lt;Box style={{ background: '#E8EFF8', padding: '6px 14px', marginLeft: 16 }}&gt;&#10;                    &lt;Text style={{ fontSize: 14, color: '#1E4FA8', fontWeight: 'bold' }}&gt;免安装&lt;/Text&gt;&#10;                &lt;/Box&gt;&#10;            &lt;/Box&gt;&#10;            &lt;Box style={{ background: '#FFFFFF', border: '1px solid #D6DCE5', borderLeft: '4px solid #1E4FA8', padding: '14px 20px', flexDirection: 'row', alignItems: 'center', justifyContent: 'space-between' }}&gt;&#10;                &lt;Box style={{ flexDirection: 'row', alignItems: 'flex-start', gap: 14 }}&gt;&#10;                    &lt;Box style={{ width: 10, height: 10, background: '#1E4FA8', marginTop: 9 }} /&gt;&#10;                    &lt;Box&gt;&#10;                        &lt;Text style={{ fontSize: 21, fontWeight: 'bold', color: '#1A2230' }}&gt;演示账号一键登录&lt;/Text&gt;&#10;                        &lt;Text style={{ fontSize: 16, color: '#4A5568', marginTop: 5, lineHeight: 1.5 }}&gt;&#10;                            前端「一键使用演示账号」按钮，无需手输密码&#10;                        &lt;/Text&gt;&#10;                    &lt;/Box&gt;&#10;                &lt;/Box&gt;&#10;                &lt;Box style={{ background: '#E8EFF8', padding: '6px 14px', marginLeft: 16 }}&gt;&#10;                    &lt;Text style={{ fontSize: 14, color: '#1E4FA8', fontWeight: 'bold' }}&gt;一键登录&lt;/Text&gt;&#10;                &lt;/Box&gt;&#10;            &lt;/Box&gt;&#10;            &lt;Box style={{ background: '#FFFFFF', border: '1px solid #D6DCE5', borderLeft: '4px solid #1E4FA8', padding: '14px 20px', flexDirection: 'row', alignItems: 'center', justifyContent: 'space-between' }}&gt;&#10;                &lt;Box style={{ flexDirection: 'row', alignItems: 'flex-start', gap: 14 }}&gt;&#10;                    &lt;Box style={{ width: 10, height: 10, background: '#1E4FA8', marginTop: 9 }} /&gt;&#10;                    &lt;Box&gt;&#10;                        &lt;Text style={{ fontSize: 21, fontWeight: 'bold', color: '#1A2230' }}&gt;证据当场可复现&lt;/Text&gt;&#10;                        &lt;Text style={{ fontSize: 16, color: '#4A5568', marginTop: 5, lineHeight: 1.5 }}&gt;&#10;                            开发者模式自检面板 + 双引擎对拍脚本可现场运行&#10;                        &lt;/Text&gt;&#10;                    &lt;/Box&gt;&#10;                &lt;/Box&gt;&#10;                &lt;Box style={{ background: '#E8EFF8', padding: '6px 14px', marginLeft: 16 }}&gt;&#10;                    &lt;Text style={{ fontSize: 14, color: '#1E4FA8', fontWeight: 'bold' }}&gt;当场复现&lt;/Text&gt;&#10;                &lt;/Box&gt;&#10;            &lt;/Box&gt;&#10;        &lt;/Box&gt;&#10;    &lt;/Box&gt;&#10;    {/* 右下：本章邀请通栏 */}&#10;    &lt;Box style={{&#10;        position: 'absolute',&#10;        bottom: 0,&#10;        left: 460,&#10;        width: 820,&#10;        height: 150,&#10;        background: '#0E3F8C',&#10;        padding: '0 72px',&#10;        boxSizing: 'border-box',&#10;        flexDirection: 'row',&#10;        alignItems: 'center',&#10;        justifyContent: 'space-between',&#10;    }}&gt;&#10;        &lt;Box style={{ width: 520 }}&gt;&#10;            &lt;Text style={{ fontSize: 17, fontWeight: 'bold', color: '#FFFFFF' }}&gt;&#10;                本章邀请&#10;            &lt;/Text&gt;&#10;            &lt;Text style={{ fontSize: 16, color: '#D7E3F5', marginTop: 6, lineHeight: 1.6 }}&gt;&#10;                请访客现场打开链接、登录账号、运行对拍脚本——所有数字都经得起核对。&#10;            &lt;/Text&gt;&#10;        &lt;/Box&gt;&#10;        &lt;Box style={{ width: 120, alignItems: 'center', gap: 6 }}&gt;&#10;            &lt;FAIcon name='eye' style={{ fill: '#FFFFFF', width: 30, height: 30 }} /&gt;&#10;            &lt;Text style={{ fontSize: 13, color: '#9FB9E4', letterSpacing: 1 }}&gt;&#10;                第 04 章 · 现场验证&#10;            &lt;/Text&gt;&#10;        &lt;/Box&gt;&#10;    &lt;/Box&gt;&#10;&lt;/Slide&gt;&#10;"/>
+        <p:cNvPr id="210" name="" descr="&lt;Slide style={{&#10;    width: '1280px',&#10;    height: '720px',&#10;    background: '#FFFFFF',&#10;    padding: 0,&#10;    position: 'relative',&#10;    overflow: 'hidden',&#10;    fontFamily: &quot;'Noto Sans SC','Source Han Sans SC','PingFang SC','Microsoft YaHei',sans-serif&quot;,&#10;}}&gt;&#10;    {/* 左：藏蓝巨数字面板 */}&#10;    &lt;Box style={{&#10;        position: 'absolute',&#10;        top: 0,&#10;        left: 0,&#10;        width: 460,&#10;        height: 720,&#10;        background: '#0E3F8C',&#10;        justifyContent: 'center',&#10;        alignItems: 'center',&#10;    }}&gt;&#10;        &lt;Text style={{ fontSize: 15, color: '#9FB9E4', letterSpacing: 6, marginBottom: 8 }}&gt;&#10;            CHAPTER&#10;        &lt;/Text&gt;&#10;        &lt;Text style={{ fontSize: 210, fontWeight: 'bold', color: '#FFFFFF', opacity: 0.28, lineHeight: 1 }}&gt;&#10;            04&#10;        &lt;/Text&gt;&#10;    &lt;/Box&gt;&#10;    {/* 右上：章节页眉带 */}&#10;    &lt;Box style={{&#10;        position: 'absolute',&#10;        top: 0,&#10;        left: 460,&#10;        width: 820,&#10;        height: 236,&#10;        background: '#F7F9FC',&#10;        borderBottom: '1px solid #E5E7EB',&#10;        padding: '0 72px',&#10;        boxSizing: 'border-box',&#10;        flexDirection: 'row',&#10;        alignItems: 'center',&#10;        justifyContent: 'space-between',&#10;    }}&gt;&#10;        &lt;Box style={{ width: 430, height: 120, justifyContent: 'center' }}&gt;&#10;            &lt;Text style={{ fontSize: 15, color: '#3D7BD9', letterSpacing: 4, fontWeight: 'bold' }}&gt;&#10;                第 04 章&#10;            &lt;/Text&gt;&#10;            &lt;Text style={{ fontSize: 44, fontWeight: 'bold', color: '#0E3F8C', marginTop: 14 }}&gt;&#10;                现场验证&#10;            &lt;/Text&gt;&#10;            &lt;Box style={{ width: 72, height: 4, background: '#FFC107', marginTop: 22 }} /&gt;&#10;        &lt;/Box&gt;&#10;        &lt;Box style={{ height: 100, background: '#E8EFF8', padding: '0 24px', alignItems: 'center', justifyContent: 'center' }}&gt;&#10;            &lt;Text style={{ fontSize: 46, fontWeight: 'bold', color: '#1E4FA8', lineHeight: 1 }}&gt;&#10;                P15–P16&#10;            &lt;/Text&gt;&#10;            &lt;Text style={{ fontSize: 13, color: '#4A5568', marginTop: 8, letterSpacing: 3 }}&gt;&#10;                本章范围&#10;            &lt;/Text&gt;&#10;        &lt;/Box&gt;&#10;    &lt;/Box&gt;&#10;    {/* 右中：要点卡 */}&#10;    &lt;Box style={{ position: 'absolute', top: 236, left: 460, width: 820, height: 334, padding: '28px 72px 0 72px', boxSizing: 'border-box' }}&gt;&#10;        &lt;Box style={{ flexDirection: 'column', gap: 18 }}&gt;&#10;            &lt;Box style={{ background: '#FFFFFF', border: '1px solid #D6DCE5', borderLeft: '4px solid #1E4FA8', padding: '14px 20px', flexDirection: 'row', alignItems: 'center', justifyContent: 'space-between' }}&gt;&#10;                &lt;Box style={{ flexDirection: 'row', alignItems: 'flex-start', gap: 14 }}&gt;&#10;                    &lt;Box style={{ width: 10, height: 10, background: '#1E4FA8', marginTop: 9 }} /&gt;&#10;                    &lt;Box&gt;&#10;                        &lt;Text style={{ fontSize: 21, fontWeight: 'bold', color: '#1A2230' }}&gt;两个免安装入口&lt;/Text&gt;&#10;                        &lt;Text style={{ fontSize: 16, color: '#4A5568', marginTop: 5, lineHeight: 1.5 }}&gt;&#10;                            GitHub Pages 演示 + 国内直连镜像，浏览器直接打开&#10;                        &lt;/Text&gt;&#10;                    &lt;/Box&gt;&#10;                &lt;/Box&gt;&#10;                &lt;Box style={{ background: '#E8EFF8', padding: '6px 14px', marginLeft: 16 }}&gt;&#10;                    &lt;Text style={{ fontSize: 14, color: '#1E4FA8', fontWeight: 'bold' }}&gt;免安装&lt;/Text&gt;&#10;                &lt;/Box&gt;&#10;            &lt;/Box&gt;&#10;            &lt;Box style={{ background: '#FFFFFF', border: '1px solid #D6DCE5', borderLeft: '4px solid #1E4FA8', padding: '14px 20px', flexDirection: 'row', alignItems: 'center', justifyContent: 'space-between' }}&gt;&#10;                &lt;Box style={{ flexDirection: 'row', alignItems: 'flex-start', gap: 14 }}&gt;&#10;                    &lt;Box style={{ width: 10, height: 10, background: '#1E4FA8', marginTop: 9 }} /&gt;&#10;                    &lt;Box&gt;&#10;                        &lt;Text style={{ fontSize: 21, fontWeight: 'bold', color: '#1A2230' }}&gt;演示账号一键登录&lt;/Text&gt;&#10;                        &lt;Text style={{ fontSize: 16, color: '#4A5568', marginTop: 5, lineHeight: 1.5 }}&gt;&#10;                            前端「一键使用演示账号」按钮，无需手输密码&#10;                        &lt;/Text&gt;&#10;                    &lt;/Box&gt;&#10;                &lt;/Box&gt;&#10;                &lt;Box style={{ background: '#E8EFF8', padding: '6px 14px', marginLeft: 16 }}&gt;&#10;                    &lt;Text style={{ fontSize: 14, color: '#1E4FA8', fontWeight: 'bold' }}&gt;一键登录&lt;/Text&gt;&#10;                &lt;/Box&gt;&#10;            &lt;/Box&gt;&#10;            &lt;Box style={{ background: '#FFFFFF', border: '1px solid #D6DCE5', borderLeft: '4px solid #1E4FA8', padding: '14px 20px', flexDirection: 'row', alignItems: 'center', justifyContent: 'space-between' }}&gt;&#10;                &lt;Box style={{ flexDirection: 'row', alignItems: 'flex-start', gap: 14 }}&gt;&#10;                    &lt;Box style={{ width: 10, height: 10, background: '#1E4FA8', marginTop: 9 }} /&gt;&#10;                    &lt;Box&gt;&#10;                        &lt;Text style={{ fontSize: 21, fontWeight: 'bold', color: '#1A2230' }}&gt;证据当场可复现&lt;/Text&gt;&#10;                        &lt;Text style={{ fontSize: 16, color: '#4A5568', marginTop: 5, lineHeight: 1.5 }}&gt;&#10;                            开发者模式自检面板 + 双引擎对拍程序可现场运行&#10;                        &lt;/Text&gt;&#10;                    &lt;/Box&gt;&#10;                &lt;/Box&gt;&#10;                &lt;Box style={{ background: '#E8EFF8', padding: '6px 14px', marginLeft: 16 }}&gt;&#10;                    &lt;Text style={{ fontSize: 14, color: '#1E4FA8', fontWeight: 'bold' }}&gt;当场复现&lt;/Text&gt;&#10;                &lt;/Box&gt;&#10;            &lt;/Box&gt;&#10;        &lt;/Box&gt;&#10;    &lt;/Box&gt;&#10;    {/* 右下：本章邀请通栏 */}&#10;    &lt;Box style={{&#10;        position: 'absolute',&#10;        bottom: 0,&#10;        left: 460,&#10;        width: 820,&#10;        height: 150,&#10;        background: '#0E3F8C',&#10;        padding: '0 72px',&#10;        boxSizing: 'border-box',&#10;        flexDirection: 'row',&#10;        alignItems: 'center',&#10;        justifyContent: 'space-between',&#10;    }}&gt;&#10;        &lt;Box style={{ width: 520 }}&gt;&#10;            &lt;Text style={{ fontSize: 17, fontWeight: 'bold', color: '#FFFFFF' }}&gt;&#10;                本章邀请&#10;            &lt;/Text&gt;&#10;            &lt;Text style={{ fontSize: 16, color: '#D7E3F5', marginTop: 6, lineHeight: 1.6 }}&gt;&#10;                请访客现场打开链接、登录账号、运行对拍程序——所有数字都经得起核对。&#10;            &lt;/Text&gt;&#10;        &lt;/Box&gt;&#10;        &lt;Box style={{ width: 120, alignItems: 'center', gap: 6 }}&gt;&#10;            &lt;FAIcon name='eye' style={{ fill: '#FFFFFF', width: 30, height: 30 }} /&gt;&#10;            &lt;Text style={{ fontSize: 13, color: '#9FB9E4', letterSpacing: 1 }}&gt;&#10;                第 04 章 · 现场验证&#10;            &lt;/Text&gt;&#10;        &lt;/Box&gt;&#10;    &lt;/Box&gt;&#10;&lt;/Slide&gt;&#10;"/>
         <p:cNvGrpSpPr/>
         <p:nvPr/>
       </p:nvGrpSpPr>
@@ -12810,7 +12810,7 @@
                 <a:latin typeface="Noto Sans SC"/>
                 <a:ea typeface="Noto Sans SC"/>
               </a:rPr>
-              <a:t>双引擎对拍脚本可现场运行</a:t>
+              <a:t>双引擎对拍程序可现场运行</a:t>
             </a:r>
             <a:endParaRPr/>
           </a:p>
@@ -12965,7 +12965,7 @@
                 <a:latin typeface="Noto Sans SC"/>
                 <a:ea typeface="Noto Sans SC"/>
               </a:rPr>
-              <a:t>请访客现场打开链接、登录账号、运行对拍脚本——所有数字都经得起核对。</a:t>
+              <a:t>请访客现场打开链接、登录账号、运行对拍程序——所有数字都经得起核对。</a:t>
             </a:r>
             <a:endParaRPr/>
           </a:p>
@@ -15732,7 +15732,7 @@
                 <a:latin typeface="Noto Sans SC"/>
                 <a:ea typeface="Noto Sans SC"/>
               </a:rPr>
-              <a:t>可当场运行的双引擎对拍脚本</a:t>
+              <a:t>可当场运行的双引擎对拍程序</a:t>
             </a:r>
             <a:endParaRPr/>
           </a:p>
